--- a/clients/大晃産業/03_日程調整/【アジェンダ】20260323_打合せ.pptx
+++ b/clients/大晃産業/03_日程調整/【アジェンダ】20260323_打合せ.pptx
@@ -20,6 +20,8 @@
     <p:sldId id="268" r:id="rId19"/>
     <p:sldId id="269" r:id="rId20"/>
     <p:sldId id="270" r:id="rId21"/>
+    <p:sldId id="271" r:id="rId22"/>
+    <p:sldId id="272" r:id="rId23"/>
   </p:sldIdLst>
   <p:sldSz cx="12191695" cy="6858000" type="screen4x3"/>
   <p:notesSz cx="6858000" cy="9144000"/>
@@ -3095,14 +3097,6 @@
 <file path=ppt/slides/slide1.xml><?xml version="1.0" encoding="utf-8"?>
 <p:sld xmlns:a="http://schemas.openxmlformats.org/drawingml/2006/main" xmlns:p="http://schemas.openxmlformats.org/presentationml/2006/main" xmlns:r="http://schemas.openxmlformats.org/officeDocument/2006/relationships">
   <p:cSld>
-    <p:bg>
-      <p:bgPr>
-        <a:solidFill>
-          <a:srgbClr val="1B2A4A"/>
-        </a:solidFill>
-        <a:effectLst/>
-      </p:bgPr>
-    </p:bg>
     <p:spTree>
       <p:nvGrpSpPr>
         <p:cNvPr id="1" name=""/>
@@ -3176,12 +3170,7 @@
           <a:lstStyle/>
           <a:p>
             <a:pPr algn="ctr">
-              <a:defRPr sz="4800" b="1">
-                <a:solidFill>
-                  <a:srgbClr val="FFFFFF"/>
-                </a:solidFill>
-                <a:latin typeface="Yu Gothic"/>
-              </a:defRPr>
+              <a:defRPr sz="4800" b="1"/>
             </a:pPr>
             <a:r>
               <a:t>打合せアジェンダ</a:t>
@@ -3212,12 +3201,7 @@
           <a:lstStyle/>
           <a:p>
             <a:pPr algn="ctr">
-              <a:defRPr sz="2400" b="0">
-                <a:solidFill>
-                  <a:srgbClr val="A0C4E8"/>
-                </a:solidFill>
-                <a:latin typeface="Yu Gothic"/>
-              </a:defRPr>
+              <a:defRPr sz="2400" b="0"/>
             </a:pPr>
             <a:r>
               <a:t>株式会社大晃産業様　管理職候補育成プログラム</a:t>
@@ -3291,12 +3275,7 @@
           <a:lstStyle/>
           <a:p>
             <a:pPr algn="ctr">
-              <a:defRPr sz="1800" b="0">
-                <a:solidFill>
-                  <a:srgbClr val="88AACC"/>
-                </a:solidFill>
-                <a:latin typeface="Yu Gothic"/>
-              </a:defRPr>
+              <a:defRPr sz="1800" b="0"/>
             </a:pPr>
             <a:r>
               <a:t>2026年3月23日（月）10:00〜  ／  大晃産業様　会議室</a:t>
@@ -3327,12 +3306,7 @@
           <a:lstStyle/>
           <a:p>
             <a:pPr algn="ctr">
-              <a:defRPr sz="1600" b="0">
-                <a:solidFill>
-                  <a:srgbClr val="88AACC"/>
-                </a:solidFill>
-                <a:latin typeface="Yu Gothic"/>
-              </a:defRPr>
+              <a:defRPr sz="1600" b="0"/>
             </a:pPr>
             <a:r>
               <a:t>株式会社えんのした</a:t>
@@ -3351,14 +3325,6 @@
 <file path=ppt/slides/slide10.xml><?xml version="1.0" encoding="utf-8"?>
 <p:sld xmlns:a="http://schemas.openxmlformats.org/drawingml/2006/main" xmlns:p="http://schemas.openxmlformats.org/presentationml/2006/main" xmlns:r="http://schemas.openxmlformats.org/officeDocument/2006/relationships">
   <p:cSld>
-    <p:bg>
-      <p:bgPr>
-        <a:solidFill>
-          <a:srgbClr val="FFFFFF"/>
-        </a:solidFill>
-        <a:effectLst/>
-      </p:bgPr>
-    </p:bg>
     <p:spTree>
       <p:nvGrpSpPr>
         <p:cNvPr id="1" name=""/>
@@ -3445,18 +3411,14 @@
           </a:fontRef>
         </p:style>
         <p:txBody>
-          <a:bodyPr rtlCol="0" anchor="ctr" wrap="none"/>
+          <a:bodyPr rtlCol="0" anchor="ctr"/>
           <a:lstStyle/>
           <a:p>
             <a:pPr algn="ctr">
-              <a:spcBef>
-                <a:spcPts val="600"/>
-              </a:spcBef>
               <a:defRPr sz="3600" b="1">
                 <a:solidFill>
                   <a:srgbClr val="FFFFFF"/>
                 </a:solidFill>
-                <a:latin typeface="Yu Gothic"/>
               </a:defRPr>
             </a:pPr>
             <a:r>
@@ -3488,15 +3450,10 @@
           <a:lstStyle/>
           <a:p>
             <a:pPr algn="l">
-              <a:defRPr sz="3000" b="1">
-                <a:solidFill>
-                  <a:srgbClr val="1B2A4A"/>
-                </a:solidFill>
-                <a:latin typeface="Yu Gothic"/>
-              </a:defRPr>
-            </a:pPr>
-            <a:r>
-              <a:t>案内書の確認</a:t>
+              <a:defRPr sz="3000" b="1"/>
+            </a:pPr>
+            <a:r>
+              <a:t>参加者のスキル確認</a:t>
             </a:r>
           </a:p>
         </p:txBody>
@@ -3567,28 +3524,58 @@
           <a:lstStyle/>
           <a:p>
             <a:pPr algn="l">
-              <a:defRPr sz="1800" b="0">
+              <a:defRPr sz="1800" b="0"/>
+            </a:pPr>
+            <a:r>
+              <a:t>●  塾生のPCスキル（特にPowerPoint）のレベル感</a:t>
+            </a:r>
+          </a:p>
+        </p:txBody>
+      </p:sp>
+      <p:sp>
+        <p:nvSpPr>
+          <p:cNvPr id="7" name="TextBox 6"/>
+          <p:cNvSpPr txBox="1"/>
+          <p:nvPr/>
+        </p:nvSpPr>
+        <p:spPr>
+          <a:xfrm>
+            <a:off x="1645920" y="2194560"/>
+            <a:ext cx="9509760" cy="365760"/>
+          </a:xfrm>
+          <a:prstGeom prst="rect">
+            <a:avLst/>
+          </a:prstGeom>
+          <a:noFill/>
+        </p:spPr>
+        <p:txBody>
+          <a:bodyPr wrap="square">
+            <a:spAutoFit/>
+          </a:bodyPr>
+          <a:lstStyle/>
+          <a:p>
+            <a:pPr algn="l">
+              <a:defRPr sz="1500" b="0">
                 <a:solidFill>
-                  <a:srgbClr val="333333"/>
+                  <a:srgbClr val="666666"/>
                 </a:solidFill>
-                <a:latin typeface="Yu Gothic"/>
               </a:defRPr>
             </a:pPr>
             <a:r>
-              <a:t>●  塾生向け案内書の内容確認・修正点</a:t>
-            </a:r>
-          </a:p>
-        </p:txBody>
-      </p:sp>
-      <p:sp>
-        <p:nvSpPr>
-          <p:cNvPr id="7" name="TextBox 6"/>
-          <p:cNvSpPr txBox="1"/>
-          <p:nvPr/>
-        </p:nvSpPr>
-        <p:spPr>
-          <a:xfrm>
-            <a:off x="1097280" y="2194560"/>
+              <a:t>→  第6回「プレゼンテーション技術」の内容レベル調整に反映</a:t>
+            </a:r>
+          </a:p>
+        </p:txBody>
+      </p:sp>
+      <p:sp>
+        <p:nvSpPr>
+          <p:cNvPr id="8" name="TextBox 7"/>
+          <p:cNvSpPr txBox="1"/>
+          <p:nvPr/>
+        </p:nvSpPr>
+        <p:spPr>
+          <a:xfrm>
+            <a:off x="1097280" y="2560320"/>
             <a:ext cx="10058400" cy="411480"/>
           </a:xfrm>
           <a:prstGeom prst="rect">
@@ -3603,28 +3590,23 @@
           <a:lstStyle/>
           <a:p>
             <a:pPr algn="l">
-              <a:defRPr sz="1800" b="0">
-                <a:solidFill>
-                  <a:srgbClr val="333333"/>
-                </a:solidFill>
-                <a:latin typeface="Yu Gothic"/>
-              </a:defRPr>
-            </a:pPr>
-            <a:r>
-              <a:t>●  コーディネーター向け案内書の内容確認・修正点</a:t>
-            </a:r>
-          </a:p>
-        </p:txBody>
-      </p:sp>
-      <p:sp>
-        <p:nvSpPr>
-          <p:cNvPr id="8" name="TextBox 7"/>
-          <p:cNvSpPr txBox="1"/>
-          <p:nvPr/>
-        </p:nvSpPr>
-        <p:spPr>
-          <a:xfrm>
-            <a:off x="1097280" y="2651760"/>
+              <a:defRPr sz="1800" b="0"/>
+            </a:pPr>
+            <a:r>
+              <a:t>●  Excel・Word等の基本スキルの把握</a:t>
+            </a:r>
+          </a:p>
+        </p:txBody>
+      </p:sp>
+      <p:sp>
+        <p:nvSpPr>
+          <p:cNvPr id="9" name="TextBox 8"/>
+          <p:cNvSpPr txBox="1"/>
+          <p:nvPr/>
+        </p:nvSpPr>
+        <p:spPr>
+          <a:xfrm>
+            <a:off x="1097280" y="3017520"/>
             <a:ext cx="10058400" cy="411480"/>
           </a:xfrm>
           <a:prstGeom prst="rect">
@@ -3639,15 +3621,10 @@
           <a:lstStyle/>
           <a:p>
             <a:pPr algn="l">
-              <a:defRPr sz="1800" b="0">
-                <a:solidFill>
-                  <a:srgbClr val="333333"/>
-                </a:solidFill>
-                <a:latin typeface="Yu Gothic"/>
-              </a:defRPr>
-            </a:pPr>
-            <a:r>
-              <a:t>●  配布時期・配布方法の決定</a:t>
+              <a:defRPr sz="1800" b="0"/>
+            </a:pPr>
+            <a:r>
+              <a:t>●  プレゼン経験の有無</a:t>
             </a:r>
           </a:p>
         </p:txBody>
@@ -3663,14 +3640,6 @@
 <file path=ppt/slides/slide11.xml><?xml version="1.0" encoding="utf-8"?>
 <p:sld xmlns:a="http://schemas.openxmlformats.org/drawingml/2006/main" xmlns:p="http://schemas.openxmlformats.org/presentationml/2006/main" xmlns:r="http://schemas.openxmlformats.org/officeDocument/2006/relationships">
   <p:cSld>
-    <p:bg>
-      <p:bgPr>
-        <a:solidFill>
-          <a:srgbClr val="FFFFFF"/>
-        </a:solidFill>
-        <a:effectLst/>
-      </p:bgPr>
-    </p:bg>
     <p:spTree>
       <p:nvGrpSpPr>
         <p:cNvPr id="1" name=""/>
@@ -3757,18 +3726,14 @@
           </a:fontRef>
         </p:style>
         <p:txBody>
-          <a:bodyPr rtlCol="0" anchor="ctr" wrap="none"/>
+          <a:bodyPr rtlCol="0" anchor="ctr"/>
           <a:lstStyle/>
           <a:p>
             <a:pPr algn="ctr">
-              <a:spcBef>
-                <a:spcPts val="600"/>
-              </a:spcBef>
               <a:defRPr sz="3600" b="1">
                 <a:solidFill>
                   <a:srgbClr val="FFFFFF"/>
                 </a:solidFill>
-                <a:latin typeface="Yu Gothic"/>
               </a:defRPr>
             </a:pPr>
             <a:r>
@@ -3800,15 +3765,10 @@
           <a:lstStyle/>
           <a:p>
             <a:pPr algn="l">
-              <a:defRPr sz="3000" b="1">
-                <a:solidFill>
-                  <a:srgbClr val="1B2A4A"/>
-                </a:solidFill>
-                <a:latin typeface="Yu Gothic"/>
-              </a:defRPr>
-            </a:pPr>
-            <a:r>
-              <a:t>合宿について（第11回）</a:t>
+              <a:defRPr sz="3000" b="1"/>
+            </a:pPr>
+            <a:r>
+              <a:t>課題図書について</a:t>
             </a:r>
           </a:p>
         </p:txBody>
@@ -3879,15 +3839,10 @@
           <a:lstStyle/>
           <a:p>
             <a:pPr algn="l">
-              <a:defRPr sz="1800" b="0">
-                <a:solidFill>
-                  <a:srgbClr val="333333"/>
-                </a:solidFill>
-                <a:latin typeface="Yu Gothic"/>
-              </a:defRPr>
-            </a:pPr>
-            <a:r>
-              <a:t>●  実施可否の最終判断</a:t>
+              <a:defRPr sz="1800" b="0"/>
+            </a:pPr>
+            <a:r>
+              <a:t>●  課題図書の提示可否（費用負担含む）</a:t>
             </a:r>
           </a:p>
         </p:txBody>
@@ -3915,15 +3870,10 @@
           <a:lstStyle/>
           <a:p>
             <a:pPr algn="l">
-              <a:defRPr sz="1800" b="0">
-                <a:solidFill>
-                  <a:srgbClr val="333333"/>
-                </a:solidFill>
-                <a:latin typeface="Yu Gothic"/>
-              </a:defRPr>
-            </a:pPr>
-            <a:r>
-              <a:t>●  候補地の検討（先方提案 or こちらから候補提示）</a:t>
+              <a:defRPr sz="1800" b="0"/>
+            </a:pPr>
+            <a:r>
+              <a:t>●  4回分程度を想定：どのタイミングで指定するか</a:t>
             </a:r>
           </a:p>
         </p:txBody>
@@ -3951,15 +3901,10 @@
           <a:lstStyle/>
           <a:p>
             <a:pPr algn="l">
-              <a:defRPr sz="1800" b="0">
-                <a:solidFill>
-                  <a:srgbClr val="333333"/>
-                </a:solidFill>
-                <a:latin typeface="Yu Gothic"/>
-              </a:defRPr>
-            </a:pPr>
-            <a:r>
-              <a:t>●  予算感の確認（宿泊費・会場費・食事代）</a:t>
+              <a:defRPr sz="1800" b="0"/>
+            </a:pPr>
+            <a:r>
+              <a:t>●  選書はえんのした側で行い、先方承認の流れでよいか</a:t>
             </a:r>
           </a:p>
         </p:txBody>
@@ -3987,123 +3932,10 @@
           <a:lstStyle/>
           <a:p>
             <a:pPr algn="l">
-              <a:defRPr sz="1800" b="0">
-                <a:solidFill>
-                  <a:srgbClr val="333333"/>
-                </a:solidFill>
-                <a:latin typeface="Yu Gothic"/>
-              </a:defRPr>
-            </a:pPr>
-            <a:r>
-              <a:t>●  スケジュール</a:t>
-            </a:r>
-          </a:p>
-        </p:txBody>
-      </p:sp>
-      <p:sp>
-        <p:nvSpPr>
-          <p:cNvPr id="10" name="TextBox 9"/>
-          <p:cNvSpPr txBox="1"/>
-          <p:nvPr/>
-        </p:nvSpPr>
-        <p:spPr>
-          <a:xfrm>
-            <a:off x="1645920" y="3566160"/>
-            <a:ext cx="9509760" cy="365760"/>
-          </a:xfrm>
-          <a:prstGeom prst="rect">
-            <a:avLst/>
-          </a:prstGeom>
-          <a:noFill/>
-        </p:spPr>
-        <p:txBody>
-          <a:bodyPr wrap="square">
-            <a:spAutoFit/>
-          </a:bodyPr>
-          <a:lstStyle/>
-          <a:p>
-            <a:pPr algn="l">
-              <a:defRPr sz="1500" b="0">
-                <a:solidFill>
-                  <a:srgbClr val="666666"/>
-                </a:solidFill>
-                <a:latin typeface="Yu Gothic"/>
-              </a:defRPr>
-            </a:pPr>
-            <a:r>
-              <a:t>→  DAY1: 9:00〜17:00</a:t>
-            </a:r>
-          </a:p>
-        </p:txBody>
-      </p:sp>
-      <p:sp>
-        <p:nvSpPr>
-          <p:cNvPr id="11" name="TextBox 10"/>
-          <p:cNvSpPr txBox="1"/>
-          <p:nvPr/>
-        </p:nvSpPr>
-        <p:spPr>
-          <a:xfrm>
-            <a:off x="1645920" y="3931920"/>
-            <a:ext cx="9509760" cy="365760"/>
-          </a:xfrm>
-          <a:prstGeom prst="rect">
-            <a:avLst/>
-          </a:prstGeom>
-          <a:noFill/>
-        </p:spPr>
-        <p:txBody>
-          <a:bodyPr wrap="square">
-            <a:spAutoFit/>
-          </a:bodyPr>
-          <a:lstStyle/>
-          <a:p>
-            <a:pPr algn="l">
-              <a:defRPr sz="1500" b="0">
-                <a:solidFill>
-                  <a:srgbClr val="666666"/>
-                </a:solidFill>
-                <a:latin typeface="Yu Gothic"/>
-              </a:defRPr>
-            </a:pPr>
-            <a:r>
-              <a:t>→  DAY2: 8:30〜15:00</a:t>
-            </a:r>
-          </a:p>
-        </p:txBody>
-      </p:sp>
-      <p:sp>
-        <p:nvSpPr>
-          <p:cNvPr id="12" name="TextBox 11"/>
-          <p:cNvSpPr txBox="1"/>
-          <p:nvPr/>
-        </p:nvSpPr>
-        <p:spPr>
-          <a:xfrm>
-            <a:off x="1097280" y="4297680"/>
-            <a:ext cx="10058400" cy="411480"/>
-          </a:xfrm>
-          <a:prstGeom prst="rect">
-            <a:avLst/>
-          </a:prstGeom>
-          <a:noFill/>
-        </p:spPr>
-        <p:txBody>
-          <a:bodyPr wrap="square">
-            <a:spAutoFit/>
-          </a:bodyPr>
-          <a:lstStyle/>
-          <a:p>
-            <a:pPr algn="l">
-              <a:defRPr sz="1800" b="0">
-                <a:solidFill>
-                  <a:srgbClr val="333333"/>
-                </a:solidFill>
-                <a:latin typeface="Yu Gothic"/>
-              </a:defRPr>
-            </a:pPr>
-            <a:r>
-              <a:t>●  移動手段（バス手配 / 各自 / 社用車）</a:t>
+              <a:defRPr sz="1800" b="0"/>
+            </a:pPr>
+            <a:r>
+              <a:t>●  購入・配布の方法（会社負担 or 個人負担）</a:t>
             </a:r>
           </a:p>
         </p:txBody>
@@ -4119,14 +3951,6 @@
 <file path=ppt/slides/slide12.xml><?xml version="1.0" encoding="utf-8"?>
 <p:sld xmlns:a="http://schemas.openxmlformats.org/drawingml/2006/main" xmlns:p="http://schemas.openxmlformats.org/presentationml/2006/main" xmlns:r="http://schemas.openxmlformats.org/officeDocument/2006/relationships">
   <p:cSld>
-    <p:bg>
-      <p:bgPr>
-        <a:solidFill>
-          <a:srgbClr val="FFFFFF"/>
-        </a:solidFill>
-        <a:effectLst/>
-      </p:bgPr>
-    </p:bg>
     <p:spTree>
       <p:nvGrpSpPr>
         <p:cNvPr id="1" name=""/>
@@ -4213,18 +4037,14 @@
           </a:fontRef>
         </p:style>
         <p:txBody>
-          <a:bodyPr rtlCol="0" anchor="ctr" wrap="none"/>
+          <a:bodyPr rtlCol="0" anchor="ctr"/>
           <a:lstStyle/>
           <a:p>
             <a:pPr algn="ctr">
-              <a:spcBef>
-                <a:spcPts val="600"/>
-              </a:spcBef>
               <a:defRPr sz="3600" b="1">
                 <a:solidFill>
                   <a:srgbClr val="FFFFFF"/>
                 </a:solidFill>
-                <a:latin typeface="Yu Gothic"/>
               </a:defRPr>
             </a:pPr>
             <a:r>
@@ -4256,15 +4076,10 @@
           <a:lstStyle/>
           <a:p>
             <a:pPr algn="l">
-              <a:defRPr sz="3000" b="1">
-                <a:solidFill>
-                  <a:srgbClr val="1B2A4A"/>
-                </a:solidFill>
-                <a:latin typeface="Yu Gothic"/>
-              </a:defRPr>
-            </a:pPr>
-            <a:r>
-              <a:t>上司向けオリエンテーション</a:t>
+              <a:defRPr sz="3000" b="1"/>
+            </a:pPr>
+            <a:r>
+              <a:t>振り返りシートの運用方法</a:t>
             </a:r>
           </a:p>
         </p:txBody>
@@ -4335,15 +4150,10 @@
           <a:lstStyle/>
           <a:p>
             <a:pPr algn="l">
-              <a:defRPr sz="1800" b="0">
-                <a:solidFill>
-                  <a:srgbClr val="333333"/>
-                </a:solidFill>
-                <a:latin typeface="Yu Gothic"/>
-              </a:defRPr>
-            </a:pPr>
-            <a:r>
-              <a:t>●  4月中旬に30分・無料で実施予定</a:t>
+              <a:defRPr sz="1800" b="0"/>
+            </a:pPr>
+            <a:r>
+              <a:t>●  振り返りシート（A3 Excel）の内容確認</a:t>
             </a:r>
           </a:p>
         </p:txBody>
@@ -4371,28 +4181,58 @@
           <a:lstStyle/>
           <a:p>
             <a:pPr algn="l">
-              <a:defRPr sz="1800" b="0">
+              <a:defRPr sz="1800" b="0"/>
+            </a:pPr>
+            <a:r>
+              <a:t>●  運用フロー</a:t>
+            </a:r>
+          </a:p>
+        </p:txBody>
+      </p:sp>
+      <p:sp>
+        <p:nvSpPr>
+          <p:cNvPr id="8" name="TextBox 7"/>
+          <p:cNvSpPr txBox="1"/>
+          <p:nvPr/>
+        </p:nvSpPr>
+        <p:spPr>
+          <a:xfrm>
+            <a:off x="1645920" y="2651760"/>
+            <a:ext cx="9509760" cy="365760"/>
+          </a:xfrm>
+          <a:prstGeom prst="rect">
+            <a:avLst/>
+          </a:prstGeom>
+          <a:noFill/>
+        </p:spPr>
+        <p:txBody>
+          <a:bodyPr wrap="square">
+            <a:spAutoFit/>
+          </a:bodyPr>
+          <a:lstStyle/>
+          <a:p>
+            <a:pPr algn="l">
+              <a:defRPr sz="1500" b="0">
                 <a:solidFill>
-                  <a:srgbClr val="333333"/>
+                  <a:srgbClr val="666666"/>
                 </a:solidFill>
-                <a:latin typeface="Yu Gothic"/>
               </a:defRPr>
             </a:pPr>
             <a:r>
-              <a:t>●  対象者：塾生の直属上司</a:t>
-            </a:r>
-          </a:p>
-        </p:txBody>
-      </p:sp>
-      <p:sp>
-        <p:nvSpPr>
-          <p:cNvPr id="8" name="TextBox 7"/>
-          <p:cNvSpPr txBox="1"/>
-          <p:nvPr/>
-        </p:nvSpPr>
-        <p:spPr>
-          <a:xfrm>
-            <a:off x="1097280" y="2651760"/>
+              <a:t>→  研修当日記入 → 実践 → 次回までに実践振り返り記入</a:t>
+            </a:r>
+          </a:p>
+        </p:txBody>
+      </p:sp>
+      <p:sp>
+        <p:nvSpPr>
+          <p:cNvPr id="9" name="TextBox 8"/>
+          <p:cNvSpPr txBox="1"/>
+          <p:nvPr/>
+        </p:nvSpPr>
+        <p:spPr>
+          <a:xfrm>
+            <a:off x="1097280" y="3017520"/>
             <a:ext cx="10058400" cy="411480"/>
           </a:xfrm>
           <a:prstGeom prst="rect">
@@ -4407,28 +4247,93 @@
           <a:lstStyle/>
           <a:p>
             <a:pPr algn="l">
-              <a:defRPr sz="1800" b="0">
+              <a:defRPr sz="1800" b="0"/>
+            </a:pPr>
+            <a:r>
+              <a:t>●  上司確認の仕組み</a:t>
+            </a:r>
+          </a:p>
+        </p:txBody>
+      </p:sp>
+      <p:sp>
+        <p:nvSpPr>
+          <p:cNvPr id="10" name="TextBox 9"/>
+          <p:cNvSpPr txBox="1"/>
+          <p:nvPr/>
+        </p:nvSpPr>
+        <p:spPr>
+          <a:xfrm>
+            <a:off x="1645920" y="3474720"/>
+            <a:ext cx="9509760" cy="365760"/>
+          </a:xfrm>
+          <a:prstGeom prst="rect">
+            <a:avLst/>
+          </a:prstGeom>
+          <a:noFill/>
+        </p:spPr>
+        <p:txBody>
+          <a:bodyPr wrap="square">
+            <a:spAutoFit/>
+          </a:bodyPr>
+          <a:lstStyle/>
+          <a:p>
+            <a:pPr algn="l">
+              <a:defRPr sz="1500" b="0">
                 <a:solidFill>
-                  <a:srgbClr val="333333"/>
+                  <a:srgbClr val="666666"/>
                 </a:solidFill>
-                <a:latin typeface="Yu Gothic"/>
               </a:defRPr>
             </a:pPr>
             <a:r>
-              <a:t>●  日程候補の調整方法</a:t>
-            </a:r>
-          </a:p>
-        </p:txBody>
-      </p:sp>
-      <p:sp>
-        <p:nvSpPr>
-          <p:cNvPr id="9" name="TextBox 8"/>
-          <p:cNvSpPr txBox="1"/>
-          <p:nvPr/>
-        </p:nvSpPr>
-        <p:spPr>
-          <a:xfrm>
-            <a:off x="1097280" y="3108960"/>
+              <a:t>→  誰が確認するか（直属上司 or コーディネーター）</a:t>
+            </a:r>
+          </a:p>
+        </p:txBody>
+      </p:sp>
+      <p:sp>
+        <p:nvSpPr>
+          <p:cNvPr id="11" name="TextBox 10"/>
+          <p:cNvSpPr txBox="1"/>
+          <p:nvPr/>
+        </p:nvSpPr>
+        <p:spPr>
+          <a:xfrm>
+            <a:off x="1645920" y="3840480"/>
+            <a:ext cx="9509760" cy="365760"/>
+          </a:xfrm>
+          <a:prstGeom prst="rect">
+            <a:avLst/>
+          </a:prstGeom>
+          <a:noFill/>
+        </p:spPr>
+        <p:txBody>
+          <a:bodyPr wrap="square">
+            <a:spAutoFit/>
+          </a:bodyPr>
+          <a:lstStyle/>
+          <a:p>
+            <a:pPr algn="l">
+              <a:defRPr sz="1500" b="0">
+                <a:solidFill>
+                  <a:srgbClr val="666666"/>
+                </a:solidFill>
+              </a:defRPr>
+            </a:pPr>
+            <a:r>
+              <a:t>→  上司フィードバックの運用ルール</a:t>
+            </a:r>
+          </a:p>
+        </p:txBody>
+      </p:sp>
+      <p:sp>
+        <p:nvSpPr>
+          <p:cNvPr id="12" name="TextBox 11"/>
+          <p:cNvSpPr txBox="1"/>
+          <p:nvPr/>
+        </p:nvSpPr>
+        <p:spPr>
+          <a:xfrm>
+            <a:off x="1097280" y="4206240"/>
             <a:ext cx="10058400" cy="411480"/>
           </a:xfrm>
           <a:prstGeom prst="rect">
@@ -4443,15 +4348,10 @@
           <a:lstStyle/>
           <a:p>
             <a:pPr algn="l">
-              <a:defRPr sz="1800" b="0">
-                <a:solidFill>
-                  <a:srgbClr val="333333"/>
-                </a:solidFill>
-                <a:latin typeface="Yu Gothic"/>
-              </a:defRPr>
-            </a:pPr>
-            <a:r>
-              <a:t>●  実施形式：オンライン or 対面</a:t>
+              <a:defRPr sz="1800" b="0"/>
+            </a:pPr>
+            <a:r>
+              <a:t>●  提出・回収の方法（紙 or データ）</a:t>
             </a:r>
           </a:p>
         </p:txBody>
@@ -4467,14 +4367,6 @@
 <file path=ppt/slides/slide13.xml><?xml version="1.0" encoding="utf-8"?>
 <p:sld xmlns:a="http://schemas.openxmlformats.org/drawingml/2006/main" xmlns:p="http://schemas.openxmlformats.org/presentationml/2006/main" xmlns:r="http://schemas.openxmlformats.org/officeDocument/2006/relationships">
   <p:cSld>
-    <p:bg>
-      <p:bgPr>
-        <a:solidFill>
-          <a:srgbClr val="FFFFFF"/>
-        </a:solidFill>
-        <a:effectLst/>
-      </p:bgPr>
-    </p:bg>
     <p:spTree>
       <p:nvGrpSpPr>
         <p:cNvPr id="1" name=""/>
@@ -4565,14 +4457,10 @@
           <a:lstStyle/>
           <a:p>
             <a:pPr algn="ctr">
-              <a:spcBef>
-                <a:spcPts val="600"/>
-              </a:spcBef>
               <a:defRPr sz="3600" b="1">
                 <a:solidFill>
                   <a:srgbClr val="FFFFFF"/>
                 </a:solidFill>
-                <a:latin typeface="Yu Gothic"/>
               </a:defRPr>
             </a:pPr>
             <a:r>
@@ -4604,15 +4492,10 @@
           <a:lstStyle/>
           <a:p>
             <a:pPr algn="l">
-              <a:defRPr sz="3000" b="1">
-                <a:solidFill>
-                  <a:srgbClr val="1B2A4A"/>
-                </a:solidFill>
-                <a:latin typeface="Yu Gothic"/>
-              </a:defRPr>
-            </a:pPr>
-            <a:r>
-              <a:t>今後のスケジュール確認</a:t>
+              <a:defRPr sz="3000" b="1"/>
+            </a:pPr>
+            <a:r>
+              <a:t>案内書の確認</a:t>
             </a:r>
           </a:p>
         </p:txBody>
@@ -4662,87 +4545,63 @@
       </p:sp>
       <p:sp>
         <p:nvSpPr>
-          <p:cNvPr id="6" name="Rectangle 5"/>
-          <p:cNvSpPr/>
-          <p:nvPr/>
-        </p:nvSpPr>
-        <p:spPr>
-          <a:xfrm>
-            <a:off x="1097280" y="1828800"/>
-            <a:ext cx="9966960" cy="502920"/>
-          </a:xfrm>
-          <a:prstGeom prst="rect">
-            <a:avLst/>
-          </a:prstGeom>
-          <a:solidFill>
-            <a:srgbClr val="E8F4F8"/>
-          </a:solidFill>
-          <a:ln>
-            <a:noFill/>
-          </a:ln>
-        </p:spPr>
-        <p:style>
-          <a:lnRef idx="1">
-            <a:schemeClr val="accent1"/>
-          </a:lnRef>
-          <a:fillRef idx="3">
-            <a:schemeClr val="accent1"/>
-          </a:fillRef>
-          <a:effectRef idx="2">
-            <a:schemeClr val="accent1"/>
-          </a:effectRef>
-          <a:fontRef idx="minor">
-            <a:schemeClr val="lt1"/>
-          </a:fontRef>
-        </p:style>
-        <p:txBody>
-          <a:bodyPr rtlCol="0" anchor="ctr"/>
-          <a:lstStyle/>
-          <a:p>
-            <a:pPr algn="ctr"/>
-          </a:p>
-        </p:txBody>
-      </p:sp>
-      <p:sp>
-        <p:nvSpPr>
-          <p:cNvPr id="7" name="Rectangle 6"/>
-          <p:cNvSpPr/>
-          <p:nvPr/>
-        </p:nvSpPr>
-        <p:spPr>
-          <a:xfrm>
-            <a:off x="1280160" y="1965960"/>
-            <a:ext cx="228600" cy="228600"/>
-          </a:xfrm>
-          <a:prstGeom prst="rect">
-            <a:avLst/>
-          </a:prstGeom>
-          <a:solidFill>
-            <a:srgbClr val="2E86AB"/>
-          </a:solidFill>
-          <a:ln>
-            <a:noFill/>
-          </a:ln>
-        </p:spPr>
-        <p:style>
-          <a:lnRef idx="1">
-            <a:schemeClr val="accent1"/>
-          </a:lnRef>
-          <a:fillRef idx="3">
-            <a:schemeClr val="accent1"/>
-          </a:fillRef>
-          <a:effectRef idx="2">
-            <a:schemeClr val="accent1"/>
-          </a:effectRef>
-          <a:fontRef idx="minor">
-            <a:schemeClr val="lt1"/>
-          </a:fontRef>
-        </p:style>
-        <p:txBody>
-          <a:bodyPr rtlCol="0" anchor="ctr"/>
-          <a:lstStyle/>
-          <a:p>
-            <a:pPr algn="ctr"/>
+          <p:cNvPr id="6" name="TextBox 5"/>
+          <p:cNvSpPr txBox="1"/>
+          <p:nvPr/>
+        </p:nvSpPr>
+        <p:spPr>
+          <a:xfrm>
+            <a:off x="1097280" y="1737360"/>
+            <a:ext cx="10058400" cy="411480"/>
+          </a:xfrm>
+          <a:prstGeom prst="rect">
+            <a:avLst/>
+          </a:prstGeom>
+          <a:noFill/>
+        </p:spPr>
+        <p:txBody>
+          <a:bodyPr wrap="square">
+            <a:spAutoFit/>
+          </a:bodyPr>
+          <a:lstStyle/>
+          <a:p>
+            <a:pPr algn="l">
+              <a:defRPr sz="1800" b="0"/>
+            </a:pPr>
+            <a:r>
+              <a:t>●  塾生向け案内書の内容確認・修正点</a:t>
+            </a:r>
+          </a:p>
+        </p:txBody>
+      </p:sp>
+      <p:sp>
+        <p:nvSpPr>
+          <p:cNvPr id="7" name="TextBox 6"/>
+          <p:cNvSpPr txBox="1"/>
+          <p:nvPr/>
+        </p:nvSpPr>
+        <p:spPr>
+          <a:xfrm>
+            <a:off x="1097280" y="2194560"/>
+            <a:ext cx="10058400" cy="411480"/>
+          </a:xfrm>
+          <a:prstGeom prst="rect">
+            <a:avLst/>
+          </a:prstGeom>
+          <a:noFill/>
+        </p:spPr>
+        <p:txBody>
+          <a:bodyPr wrap="square">
+            <a:spAutoFit/>
+          </a:bodyPr>
+          <a:lstStyle/>
+          <a:p>
+            <a:pPr algn="l">
+              <a:defRPr sz="1800" b="0"/>
+            </a:pPr>
+            <a:r>
+              <a:t>●  コーディネーター向け案内書の内容確認・修正点</a:t>
+            </a:r>
           </a:p>
         </p:txBody>
       </p:sp>
@@ -4754,1014 +4613,25 @@
         </p:nvSpPr>
         <p:spPr>
           <a:xfrm>
-            <a:off x="1737360" y="1901952"/>
-            <a:ext cx="1828800" cy="411480"/>
-          </a:xfrm>
-          <a:prstGeom prst="rect">
-            <a:avLst/>
-          </a:prstGeom>
-          <a:noFill/>
-        </p:spPr>
-        <p:txBody>
-          <a:bodyPr wrap="square">
-            <a:spAutoFit/>
-          </a:bodyPr>
-          <a:lstStyle/>
-          <a:p>
-            <a:pPr algn="l">
-              <a:defRPr sz="1800" b="1">
-                <a:solidFill>
-                  <a:srgbClr val="1B2A4A"/>
-                </a:solidFill>
-                <a:latin typeface="Yu Gothic"/>
-              </a:defRPr>
-            </a:pPr>
-            <a:r>
-              <a:t>3月末</a:t>
-            </a:r>
-          </a:p>
-        </p:txBody>
-      </p:sp>
-      <p:sp>
-        <p:nvSpPr>
-          <p:cNvPr id="9" name="TextBox 8"/>
-          <p:cNvSpPr txBox="1"/>
-          <p:nvPr/>
-        </p:nvSpPr>
-        <p:spPr>
-          <a:xfrm>
-            <a:off x="3657600" y="1901952"/>
-            <a:ext cx="7315200" cy="411480"/>
-          </a:xfrm>
-          <a:prstGeom prst="rect">
-            <a:avLst/>
-          </a:prstGeom>
-          <a:noFill/>
-        </p:spPr>
-        <p:txBody>
-          <a:bodyPr wrap="square">
-            <a:spAutoFit/>
-          </a:bodyPr>
-          <a:lstStyle/>
-          <a:p>
-            <a:pPr algn="l">
-              <a:defRPr sz="1800" b="0">
-                <a:solidFill>
-                  <a:srgbClr val="333333"/>
-                </a:solidFill>
-                <a:latin typeface="Yu Gothic"/>
-              </a:defRPr>
-            </a:pPr>
-            <a:r>
-              <a:t>メンバー構成表の最終確定</a:t>
-            </a:r>
-          </a:p>
-        </p:txBody>
-      </p:sp>
-      <p:sp>
-        <p:nvSpPr>
-          <p:cNvPr id="10" name="Rectangle 9"/>
-          <p:cNvSpPr/>
-          <p:nvPr/>
-        </p:nvSpPr>
-        <p:spPr>
-          <a:xfrm>
-            <a:off x="1097280" y="2377440"/>
-            <a:ext cx="9966960" cy="502920"/>
-          </a:xfrm>
-          <a:prstGeom prst="rect">
-            <a:avLst/>
-          </a:prstGeom>
-          <a:solidFill>
-            <a:srgbClr val="FFFFFF"/>
-          </a:solidFill>
-          <a:ln>
-            <a:noFill/>
-          </a:ln>
-        </p:spPr>
-        <p:style>
-          <a:lnRef idx="1">
-            <a:schemeClr val="accent1"/>
-          </a:lnRef>
-          <a:fillRef idx="3">
-            <a:schemeClr val="accent1"/>
-          </a:fillRef>
-          <a:effectRef idx="2">
-            <a:schemeClr val="accent1"/>
-          </a:effectRef>
-          <a:fontRef idx="minor">
-            <a:schemeClr val="lt1"/>
-          </a:fontRef>
-        </p:style>
-        <p:txBody>
-          <a:bodyPr rtlCol="0" anchor="ctr"/>
-          <a:lstStyle/>
-          <a:p>
-            <a:pPr algn="ctr"/>
-          </a:p>
-        </p:txBody>
-      </p:sp>
-      <p:sp>
-        <p:nvSpPr>
-          <p:cNvPr id="11" name="Rectangle 10"/>
-          <p:cNvSpPr/>
-          <p:nvPr/>
-        </p:nvSpPr>
-        <p:spPr>
-          <a:xfrm>
-            <a:off x="1280160" y="2514600"/>
-            <a:ext cx="228600" cy="228600"/>
-          </a:xfrm>
-          <a:prstGeom prst="rect">
-            <a:avLst/>
-          </a:prstGeom>
-          <a:solidFill>
-            <a:srgbClr val="2E86AB"/>
-          </a:solidFill>
-          <a:ln>
-            <a:noFill/>
-          </a:ln>
-        </p:spPr>
-        <p:style>
-          <a:lnRef idx="1">
-            <a:schemeClr val="accent1"/>
-          </a:lnRef>
-          <a:fillRef idx="3">
-            <a:schemeClr val="accent1"/>
-          </a:fillRef>
-          <a:effectRef idx="2">
-            <a:schemeClr val="accent1"/>
-          </a:effectRef>
-          <a:fontRef idx="minor">
-            <a:schemeClr val="lt1"/>
-          </a:fontRef>
-        </p:style>
-        <p:txBody>
-          <a:bodyPr rtlCol="0" anchor="ctr"/>
-          <a:lstStyle/>
-          <a:p>
-            <a:pPr algn="ctr"/>
-          </a:p>
-        </p:txBody>
-      </p:sp>
-      <p:sp>
-        <p:nvSpPr>
-          <p:cNvPr id="12" name="TextBox 11"/>
-          <p:cNvSpPr txBox="1"/>
-          <p:nvPr/>
-        </p:nvSpPr>
-        <p:spPr>
-          <a:xfrm>
-            <a:off x="1737360" y="2450592"/>
-            <a:ext cx="1828800" cy="411480"/>
-          </a:xfrm>
-          <a:prstGeom prst="rect">
-            <a:avLst/>
-          </a:prstGeom>
-          <a:noFill/>
-        </p:spPr>
-        <p:txBody>
-          <a:bodyPr wrap="square">
-            <a:spAutoFit/>
-          </a:bodyPr>
-          <a:lstStyle/>
-          <a:p>
-            <a:pPr algn="l">
-              <a:defRPr sz="1800" b="1">
-                <a:solidFill>
-                  <a:srgbClr val="1B2A4A"/>
-                </a:solidFill>
-                <a:latin typeface="Yu Gothic"/>
-              </a:defRPr>
-            </a:pPr>
-            <a:r>
-              <a:t>4月上旬</a:t>
-            </a:r>
-          </a:p>
-        </p:txBody>
-      </p:sp>
-      <p:sp>
-        <p:nvSpPr>
-          <p:cNvPr id="13" name="TextBox 12"/>
-          <p:cNvSpPr txBox="1"/>
-          <p:nvPr/>
-        </p:nvSpPr>
-        <p:spPr>
-          <a:xfrm>
-            <a:off x="3657600" y="2450592"/>
-            <a:ext cx="7315200" cy="411480"/>
-          </a:xfrm>
-          <a:prstGeom prst="rect">
-            <a:avLst/>
-          </a:prstGeom>
-          <a:noFill/>
-        </p:spPr>
-        <p:txBody>
-          <a:bodyPr wrap="square">
-            <a:spAutoFit/>
-          </a:bodyPr>
-          <a:lstStyle/>
-          <a:p>
-            <a:pPr algn="l">
-              <a:defRPr sz="1800" b="0">
-                <a:solidFill>
-                  <a:srgbClr val="333333"/>
-                </a:solidFill>
-                <a:latin typeface="Yu Gothic"/>
-              </a:defRPr>
-            </a:pPr>
-            <a:r>
-              <a:t>振り返りシート最終版の作成</a:t>
-            </a:r>
-          </a:p>
-        </p:txBody>
-      </p:sp>
-      <p:sp>
-        <p:nvSpPr>
-          <p:cNvPr id="14" name="Rectangle 13"/>
-          <p:cNvSpPr/>
-          <p:nvPr/>
-        </p:nvSpPr>
-        <p:spPr>
-          <a:xfrm>
-            <a:off x="1097280" y="2926080"/>
-            <a:ext cx="9966960" cy="502920"/>
-          </a:xfrm>
-          <a:prstGeom prst="rect">
-            <a:avLst/>
-          </a:prstGeom>
-          <a:solidFill>
-            <a:srgbClr val="E8F4F8"/>
-          </a:solidFill>
-          <a:ln>
-            <a:noFill/>
-          </a:ln>
-        </p:spPr>
-        <p:style>
-          <a:lnRef idx="1">
-            <a:schemeClr val="accent1"/>
-          </a:lnRef>
-          <a:fillRef idx="3">
-            <a:schemeClr val="accent1"/>
-          </a:fillRef>
-          <a:effectRef idx="2">
-            <a:schemeClr val="accent1"/>
-          </a:effectRef>
-          <a:fontRef idx="minor">
-            <a:schemeClr val="lt1"/>
-          </a:fontRef>
-        </p:style>
-        <p:txBody>
-          <a:bodyPr rtlCol="0" anchor="ctr"/>
-          <a:lstStyle/>
-          <a:p>
-            <a:pPr algn="ctr"/>
-          </a:p>
-        </p:txBody>
-      </p:sp>
-      <p:sp>
-        <p:nvSpPr>
-          <p:cNvPr id="15" name="Rectangle 14"/>
-          <p:cNvSpPr/>
-          <p:nvPr/>
-        </p:nvSpPr>
-        <p:spPr>
-          <a:xfrm>
-            <a:off x="1280160" y="3063240"/>
-            <a:ext cx="228600" cy="228600"/>
-          </a:xfrm>
-          <a:prstGeom prst="rect">
-            <a:avLst/>
-          </a:prstGeom>
-          <a:solidFill>
-            <a:srgbClr val="2E86AB"/>
-          </a:solidFill>
-          <a:ln>
-            <a:noFill/>
-          </a:ln>
-        </p:spPr>
-        <p:style>
-          <a:lnRef idx="1">
-            <a:schemeClr val="accent1"/>
-          </a:lnRef>
-          <a:fillRef idx="3">
-            <a:schemeClr val="accent1"/>
-          </a:fillRef>
-          <a:effectRef idx="2">
-            <a:schemeClr val="accent1"/>
-          </a:effectRef>
-          <a:fontRef idx="minor">
-            <a:schemeClr val="lt1"/>
-          </a:fontRef>
-        </p:style>
-        <p:txBody>
-          <a:bodyPr rtlCol="0" anchor="ctr"/>
-          <a:lstStyle/>
-          <a:p>
-            <a:pPr algn="ctr"/>
-          </a:p>
-        </p:txBody>
-      </p:sp>
-      <p:sp>
-        <p:nvSpPr>
-          <p:cNvPr id="16" name="TextBox 15"/>
-          <p:cNvSpPr txBox="1"/>
-          <p:nvPr/>
-        </p:nvSpPr>
-        <p:spPr>
-          <a:xfrm>
-            <a:off x="1737360" y="2999232"/>
-            <a:ext cx="1828800" cy="411480"/>
-          </a:xfrm>
-          <a:prstGeom prst="rect">
-            <a:avLst/>
-          </a:prstGeom>
-          <a:noFill/>
-        </p:spPr>
-        <p:txBody>
-          <a:bodyPr wrap="square">
-            <a:spAutoFit/>
-          </a:bodyPr>
-          <a:lstStyle/>
-          <a:p>
-            <a:pPr algn="l">
-              <a:defRPr sz="1800" b="1">
-                <a:solidFill>
-                  <a:srgbClr val="1B2A4A"/>
-                </a:solidFill>
-                <a:latin typeface="Yu Gothic"/>
-              </a:defRPr>
-            </a:pPr>
-            <a:r>
-              <a:t>4月上旬</a:t>
-            </a:r>
-          </a:p>
-        </p:txBody>
-      </p:sp>
-      <p:sp>
-        <p:nvSpPr>
-          <p:cNvPr id="17" name="TextBox 16"/>
-          <p:cNvSpPr txBox="1"/>
-          <p:nvPr/>
-        </p:nvSpPr>
-        <p:spPr>
-          <a:xfrm>
-            <a:off x="3657600" y="2999232"/>
-            <a:ext cx="7315200" cy="411480"/>
-          </a:xfrm>
-          <a:prstGeom prst="rect">
-            <a:avLst/>
-          </a:prstGeom>
-          <a:noFill/>
-        </p:spPr>
-        <p:txBody>
-          <a:bodyPr wrap="square">
-            <a:spAutoFit/>
-          </a:bodyPr>
-          <a:lstStyle/>
-          <a:p>
-            <a:pPr algn="l">
-              <a:defRPr sz="1800" b="0">
-                <a:solidFill>
-                  <a:srgbClr val="333333"/>
-                </a:solidFill>
-                <a:latin typeface="Yu Gothic"/>
-              </a:defRPr>
-            </a:pPr>
-            <a:r>
-              <a:t>課題図書の選定・発注</a:t>
-            </a:r>
-          </a:p>
-        </p:txBody>
-      </p:sp>
-      <p:sp>
-        <p:nvSpPr>
-          <p:cNvPr id="18" name="Rectangle 17"/>
-          <p:cNvSpPr/>
-          <p:nvPr/>
-        </p:nvSpPr>
-        <p:spPr>
-          <a:xfrm>
-            <a:off x="1097280" y="3474720"/>
-            <a:ext cx="9966960" cy="502920"/>
-          </a:xfrm>
-          <a:prstGeom prst="rect">
-            <a:avLst/>
-          </a:prstGeom>
-          <a:solidFill>
-            <a:srgbClr val="FFFFFF"/>
-          </a:solidFill>
-          <a:ln>
-            <a:noFill/>
-          </a:ln>
-        </p:spPr>
-        <p:style>
-          <a:lnRef idx="1">
-            <a:schemeClr val="accent1"/>
-          </a:lnRef>
-          <a:fillRef idx="3">
-            <a:schemeClr val="accent1"/>
-          </a:fillRef>
-          <a:effectRef idx="2">
-            <a:schemeClr val="accent1"/>
-          </a:effectRef>
-          <a:fontRef idx="minor">
-            <a:schemeClr val="lt1"/>
-          </a:fontRef>
-        </p:style>
-        <p:txBody>
-          <a:bodyPr rtlCol="0" anchor="ctr"/>
-          <a:lstStyle/>
-          <a:p>
-            <a:pPr algn="ctr"/>
-          </a:p>
-        </p:txBody>
-      </p:sp>
-      <p:sp>
-        <p:nvSpPr>
-          <p:cNvPr id="19" name="Rectangle 18"/>
-          <p:cNvSpPr/>
-          <p:nvPr/>
-        </p:nvSpPr>
-        <p:spPr>
-          <a:xfrm>
-            <a:off x="1280160" y="3611880"/>
-            <a:ext cx="228600" cy="228600"/>
-          </a:xfrm>
-          <a:prstGeom prst="rect">
-            <a:avLst/>
-          </a:prstGeom>
-          <a:solidFill>
-            <a:srgbClr val="2E86AB"/>
-          </a:solidFill>
-          <a:ln>
-            <a:noFill/>
-          </a:ln>
-        </p:spPr>
-        <p:style>
-          <a:lnRef idx="1">
-            <a:schemeClr val="accent1"/>
-          </a:lnRef>
-          <a:fillRef idx="3">
-            <a:schemeClr val="accent1"/>
-          </a:fillRef>
-          <a:effectRef idx="2">
-            <a:schemeClr val="accent1"/>
-          </a:effectRef>
-          <a:fontRef idx="minor">
-            <a:schemeClr val="lt1"/>
-          </a:fontRef>
-        </p:style>
-        <p:txBody>
-          <a:bodyPr rtlCol="0" anchor="ctr"/>
-          <a:lstStyle/>
-          <a:p>
-            <a:pPr algn="ctr"/>
-          </a:p>
-        </p:txBody>
-      </p:sp>
-      <p:sp>
-        <p:nvSpPr>
-          <p:cNvPr id="20" name="TextBox 19"/>
-          <p:cNvSpPr txBox="1"/>
-          <p:nvPr/>
-        </p:nvSpPr>
-        <p:spPr>
-          <a:xfrm>
-            <a:off x="1737360" y="3547872"/>
-            <a:ext cx="1828800" cy="411480"/>
-          </a:xfrm>
-          <a:prstGeom prst="rect">
-            <a:avLst/>
-          </a:prstGeom>
-          <a:noFill/>
-        </p:spPr>
-        <p:txBody>
-          <a:bodyPr wrap="square">
-            <a:spAutoFit/>
-          </a:bodyPr>
-          <a:lstStyle/>
-          <a:p>
-            <a:pPr algn="l">
-              <a:defRPr sz="1800" b="1">
-                <a:solidFill>
-                  <a:srgbClr val="1B2A4A"/>
-                </a:solidFill>
-                <a:latin typeface="Yu Gothic"/>
-              </a:defRPr>
-            </a:pPr>
-            <a:r>
-              <a:t>4月中旬</a:t>
-            </a:r>
-          </a:p>
-        </p:txBody>
-      </p:sp>
-      <p:sp>
-        <p:nvSpPr>
-          <p:cNvPr id="21" name="TextBox 20"/>
-          <p:cNvSpPr txBox="1"/>
-          <p:nvPr/>
-        </p:nvSpPr>
-        <p:spPr>
-          <a:xfrm>
-            <a:off x="3657600" y="3547872"/>
-            <a:ext cx="7315200" cy="411480"/>
-          </a:xfrm>
-          <a:prstGeom prst="rect">
-            <a:avLst/>
-          </a:prstGeom>
-          <a:noFill/>
-        </p:spPr>
-        <p:txBody>
-          <a:bodyPr wrap="square">
-            <a:spAutoFit/>
-          </a:bodyPr>
-          <a:lstStyle/>
-          <a:p>
-            <a:pPr algn="l">
-              <a:defRPr sz="1800" b="0">
-                <a:solidFill>
-                  <a:srgbClr val="333333"/>
-                </a:solidFill>
-                <a:latin typeface="Yu Gothic"/>
-              </a:defRPr>
-            </a:pPr>
-            <a:r>
-              <a:t>上司向けオリエンテーション実施</a:t>
-            </a:r>
-          </a:p>
-        </p:txBody>
-      </p:sp>
-      <p:sp>
-        <p:nvSpPr>
-          <p:cNvPr id="22" name="Rectangle 21"/>
-          <p:cNvSpPr/>
-          <p:nvPr/>
-        </p:nvSpPr>
-        <p:spPr>
-          <a:xfrm>
-            <a:off x="1097280" y="4023360"/>
-            <a:ext cx="9966960" cy="502920"/>
-          </a:xfrm>
-          <a:prstGeom prst="rect">
-            <a:avLst/>
-          </a:prstGeom>
-          <a:solidFill>
-            <a:srgbClr val="E8F4F8"/>
-          </a:solidFill>
-          <a:ln>
-            <a:noFill/>
-          </a:ln>
-        </p:spPr>
-        <p:style>
-          <a:lnRef idx="1">
-            <a:schemeClr val="accent1"/>
-          </a:lnRef>
-          <a:fillRef idx="3">
-            <a:schemeClr val="accent1"/>
-          </a:fillRef>
-          <a:effectRef idx="2">
-            <a:schemeClr val="accent1"/>
-          </a:effectRef>
-          <a:fontRef idx="minor">
-            <a:schemeClr val="lt1"/>
-          </a:fontRef>
-        </p:style>
-        <p:txBody>
-          <a:bodyPr rtlCol="0" anchor="ctr"/>
-          <a:lstStyle/>
-          <a:p>
-            <a:pPr algn="ctr"/>
-          </a:p>
-        </p:txBody>
-      </p:sp>
-      <p:sp>
-        <p:nvSpPr>
-          <p:cNvPr id="23" name="Rectangle 22"/>
-          <p:cNvSpPr/>
-          <p:nvPr/>
-        </p:nvSpPr>
-        <p:spPr>
-          <a:xfrm>
-            <a:off x="1280160" y="4160520"/>
-            <a:ext cx="228600" cy="228600"/>
-          </a:xfrm>
-          <a:prstGeom prst="rect">
-            <a:avLst/>
-          </a:prstGeom>
-          <a:solidFill>
-            <a:srgbClr val="2E86AB"/>
-          </a:solidFill>
-          <a:ln>
-            <a:noFill/>
-          </a:ln>
-        </p:spPr>
-        <p:style>
-          <a:lnRef idx="1">
-            <a:schemeClr val="accent1"/>
-          </a:lnRef>
-          <a:fillRef idx="3">
-            <a:schemeClr val="accent1"/>
-          </a:fillRef>
-          <a:effectRef idx="2">
-            <a:schemeClr val="accent1"/>
-          </a:effectRef>
-          <a:fontRef idx="minor">
-            <a:schemeClr val="lt1"/>
-          </a:fontRef>
-        </p:style>
-        <p:txBody>
-          <a:bodyPr rtlCol="0" anchor="ctr"/>
-          <a:lstStyle/>
-          <a:p>
-            <a:pPr algn="ctr"/>
-          </a:p>
-        </p:txBody>
-      </p:sp>
-      <p:sp>
-        <p:nvSpPr>
-          <p:cNvPr id="24" name="TextBox 23"/>
-          <p:cNvSpPr txBox="1"/>
-          <p:nvPr/>
-        </p:nvSpPr>
-        <p:spPr>
-          <a:xfrm>
-            <a:off x="1737360" y="4096512"/>
-            <a:ext cx="1828800" cy="411480"/>
-          </a:xfrm>
-          <a:prstGeom prst="rect">
-            <a:avLst/>
-          </a:prstGeom>
-          <a:noFill/>
-        </p:spPr>
-        <p:txBody>
-          <a:bodyPr wrap="square">
-            <a:spAutoFit/>
-          </a:bodyPr>
-          <a:lstStyle/>
-          <a:p>
-            <a:pPr algn="l">
-              <a:defRPr sz="1800" b="1">
-                <a:solidFill>
-                  <a:srgbClr val="1B2A4A"/>
-                </a:solidFill>
-                <a:latin typeface="Yu Gothic"/>
-              </a:defRPr>
-            </a:pPr>
-            <a:r>
-              <a:t>5月上旬</a:t>
-            </a:r>
-          </a:p>
-        </p:txBody>
-      </p:sp>
-      <p:sp>
-        <p:nvSpPr>
-          <p:cNvPr id="25" name="TextBox 24"/>
-          <p:cNvSpPr txBox="1"/>
-          <p:nvPr/>
-        </p:nvSpPr>
-        <p:spPr>
-          <a:xfrm>
-            <a:off x="3657600" y="4096512"/>
-            <a:ext cx="7315200" cy="411480"/>
-          </a:xfrm>
-          <a:prstGeom prst="rect">
-            <a:avLst/>
-          </a:prstGeom>
-          <a:noFill/>
-        </p:spPr>
-        <p:txBody>
-          <a:bodyPr wrap="square">
-            <a:spAutoFit/>
-          </a:bodyPr>
-          <a:lstStyle/>
-          <a:p>
-            <a:pPr algn="l">
-              <a:defRPr sz="1800" b="0">
-                <a:solidFill>
-                  <a:srgbClr val="333333"/>
-                </a:solidFill>
-                <a:latin typeface="Yu Gothic"/>
-              </a:defRPr>
-            </a:pPr>
-            <a:r>
-              <a:t>第1回研修資料の完成</a:t>
-            </a:r>
-          </a:p>
-        </p:txBody>
-      </p:sp>
-      <p:sp>
-        <p:nvSpPr>
-          <p:cNvPr id="26" name="Rectangle 25"/>
-          <p:cNvSpPr/>
-          <p:nvPr/>
-        </p:nvSpPr>
-        <p:spPr>
-          <a:xfrm>
-            <a:off x="1097280" y="4572000"/>
-            <a:ext cx="9966960" cy="502920"/>
-          </a:xfrm>
-          <a:prstGeom prst="rect">
-            <a:avLst/>
-          </a:prstGeom>
-          <a:solidFill>
-            <a:srgbClr val="FFFFFF"/>
-          </a:solidFill>
-          <a:ln>
-            <a:noFill/>
-          </a:ln>
-        </p:spPr>
-        <p:style>
-          <a:lnRef idx="1">
-            <a:schemeClr val="accent1"/>
-          </a:lnRef>
-          <a:fillRef idx="3">
-            <a:schemeClr val="accent1"/>
-          </a:fillRef>
-          <a:effectRef idx="2">
-            <a:schemeClr val="accent1"/>
-          </a:effectRef>
-          <a:fontRef idx="minor">
-            <a:schemeClr val="lt1"/>
-          </a:fontRef>
-        </p:style>
-        <p:txBody>
-          <a:bodyPr rtlCol="0" anchor="ctr"/>
-          <a:lstStyle/>
-          <a:p>
-            <a:pPr algn="ctr"/>
-          </a:p>
-        </p:txBody>
-      </p:sp>
-      <p:sp>
-        <p:nvSpPr>
-          <p:cNvPr id="27" name="Rectangle 26"/>
-          <p:cNvSpPr/>
-          <p:nvPr/>
-        </p:nvSpPr>
-        <p:spPr>
-          <a:xfrm>
-            <a:off x="1280160" y="4709160"/>
-            <a:ext cx="228600" cy="228600"/>
-          </a:xfrm>
-          <a:prstGeom prst="rect">
-            <a:avLst/>
-          </a:prstGeom>
-          <a:solidFill>
-            <a:srgbClr val="2E86AB"/>
-          </a:solidFill>
-          <a:ln>
-            <a:noFill/>
-          </a:ln>
-        </p:spPr>
-        <p:style>
-          <a:lnRef idx="1">
-            <a:schemeClr val="accent1"/>
-          </a:lnRef>
-          <a:fillRef idx="3">
-            <a:schemeClr val="accent1"/>
-          </a:fillRef>
-          <a:effectRef idx="2">
-            <a:schemeClr val="accent1"/>
-          </a:effectRef>
-          <a:fontRef idx="minor">
-            <a:schemeClr val="lt1"/>
-          </a:fontRef>
-        </p:style>
-        <p:txBody>
-          <a:bodyPr rtlCol="0" anchor="ctr"/>
-          <a:lstStyle/>
-          <a:p>
-            <a:pPr algn="ctr"/>
-          </a:p>
-        </p:txBody>
-      </p:sp>
-      <p:sp>
-        <p:nvSpPr>
-          <p:cNvPr id="28" name="TextBox 27"/>
-          <p:cNvSpPr txBox="1"/>
-          <p:nvPr/>
-        </p:nvSpPr>
-        <p:spPr>
-          <a:xfrm>
-            <a:off x="1737360" y="4645152"/>
-            <a:ext cx="1828800" cy="411480"/>
-          </a:xfrm>
-          <a:prstGeom prst="rect">
-            <a:avLst/>
-          </a:prstGeom>
-          <a:noFill/>
-        </p:spPr>
-        <p:txBody>
-          <a:bodyPr wrap="square">
-            <a:spAutoFit/>
-          </a:bodyPr>
-          <a:lstStyle/>
-          <a:p>
-            <a:pPr algn="l">
-              <a:defRPr sz="1800" b="1">
-                <a:solidFill>
-                  <a:srgbClr val="1B2A4A"/>
-                </a:solidFill>
-                <a:latin typeface="Yu Gothic"/>
-              </a:defRPr>
-            </a:pPr>
-            <a:r>
-              <a:t>5月中旬</a:t>
-            </a:r>
-          </a:p>
-        </p:txBody>
-      </p:sp>
-      <p:sp>
-        <p:nvSpPr>
-          <p:cNvPr id="29" name="TextBox 28"/>
-          <p:cNvSpPr txBox="1"/>
-          <p:nvPr/>
-        </p:nvSpPr>
-        <p:spPr>
-          <a:xfrm>
-            <a:off x="3657600" y="4645152"/>
-            <a:ext cx="7315200" cy="411480"/>
-          </a:xfrm>
-          <a:prstGeom prst="rect">
-            <a:avLst/>
-          </a:prstGeom>
-          <a:noFill/>
-        </p:spPr>
-        <p:txBody>
-          <a:bodyPr wrap="square">
-            <a:spAutoFit/>
-          </a:bodyPr>
-          <a:lstStyle/>
-          <a:p>
-            <a:pPr algn="l">
-              <a:defRPr sz="1800" b="0">
-                <a:solidFill>
-                  <a:srgbClr val="333333"/>
-                </a:solidFill>
-                <a:latin typeface="Yu Gothic"/>
-              </a:defRPr>
-            </a:pPr>
-            <a:r>
-              <a:t>参加者への最終案内・事前課題送付</a:t>
-            </a:r>
-          </a:p>
-        </p:txBody>
-      </p:sp>
-      <p:sp>
-        <p:nvSpPr>
-          <p:cNvPr id="30" name="Rectangle 29"/>
-          <p:cNvSpPr/>
-          <p:nvPr/>
-        </p:nvSpPr>
-        <p:spPr>
-          <a:xfrm>
-            <a:off x="1097280" y="5120640"/>
-            <a:ext cx="9966960" cy="502920"/>
-          </a:xfrm>
-          <a:prstGeom prst="rect">
-            <a:avLst/>
-          </a:prstGeom>
-          <a:solidFill>
-            <a:srgbClr val="E8F4F8"/>
-          </a:solidFill>
-          <a:ln>
-            <a:noFill/>
-          </a:ln>
-        </p:spPr>
-        <p:style>
-          <a:lnRef idx="1">
-            <a:schemeClr val="accent1"/>
-          </a:lnRef>
-          <a:fillRef idx="3">
-            <a:schemeClr val="accent1"/>
-          </a:fillRef>
-          <a:effectRef idx="2">
-            <a:schemeClr val="accent1"/>
-          </a:effectRef>
-          <a:fontRef idx="minor">
-            <a:schemeClr val="lt1"/>
-          </a:fontRef>
-        </p:style>
-        <p:txBody>
-          <a:bodyPr rtlCol="0" anchor="ctr"/>
-          <a:lstStyle/>
-          <a:p>
-            <a:pPr algn="ctr"/>
-          </a:p>
-        </p:txBody>
-      </p:sp>
-      <p:sp>
-        <p:nvSpPr>
-          <p:cNvPr id="31" name="Rectangle 30"/>
-          <p:cNvSpPr/>
-          <p:nvPr/>
-        </p:nvSpPr>
-        <p:spPr>
-          <a:xfrm>
-            <a:off x="1280160" y="5257800"/>
-            <a:ext cx="228600" cy="228600"/>
-          </a:xfrm>
-          <a:prstGeom prst="rect">
-            <a:avLst/>
-          </a:prstGeom>
-          <a:solidFill>
-            <a:srgbClr val="2E86AB"/>
-          </a:solidFill>
-          <a:ln>
-            <a:noFill/>
-          </a:ln>
-        </p:spPr>
-        <p:style>
-          <a:lnRef idx="1">
-            <a:schemeClr val="accent1"/>
-          </a:lnRef>
-          <a:fillRef idx="3">
-            <a:schemeClr val="accent1"/>
-          </a:fillRef>
-          <a:effectRef idx="2">
-            <a:schemeClr val="accent1"/>
-          </a:effectRef>
-          <a:fontRef idx="minor">
-            <a:schemeClr val="lt1"/>
-          </a:fontRef>
-        </p:style>
-        <p:txBody>
-          <a:bodyPr rtlCol="0" anchor="ctr"/>
-          <a:lstStyle/>
-          <a:p>
-            <a:pPr algn="ctr"/>
-          </a:p>
-        </p:txBody>
-      </p:sp>
-      <p:sp>
-        <p:nvSpPr>
-          <p:cNvPr id="32" name="TextBox 31"/>
-          <p:cNvSpPr txBox="1"/>
-          <p:nvPr/>
-        </p:nvSpPr>
-        <p:spPr>
-          <a:xfrm>
-            <a:off x="1737360" y="5193792"/>
-            <a:ext cx="1828800" cy="411480"/>
-          </a:xfrm>
-          <a:prstGeom prst="rect">
-            <a:avLst/>
-          </a:prstGeom>
-          <a:noFill/>
-        </p:spPr>
-        <p:txBody>
-          <a:bodyPr wrap="square">
-            <a:spAutoFit/>
-          </a:bodyPr>
-          <a:lstStyle/>
-          <a:p>
-            <a:pPr algn="l">
-              <a:defRPr sz="1800" b="1">
-                <a:solidFill>
-                  <a:srgbClr val="1B2A4A"/>
-                </a:solidFill>
-                <a:latin typeface="Yu Gothic"/>
-              </a:defRPr>
-            </a:pPr>
-            <a:r>
-              <a:t>6月</a:t>
-            </a:r>
-          </a:p>
-        </p:txBody>
-      </p:sp>
-      <p:sp>
-        <p:nvSpPr>
-          <p:cNvPr id="33" name="TextBox 32"/>
-          <p:cNvSpPr txBox="1"/>
-          <p:nvPr/>
-        </p:nvSpPr>
-        <p:spPr>
-          <a:xfrm>
-            <a:off x="3657600" y="5193792"/>
-            <a:ext cx="7315200" cy="411480"/>
-          </a:xfrm>
-          <a:prstGeom prst="rect">
-            <a:avLst/>
-          </a:prstGeom>
-          <a:noFill/>
-        </p:spPr>
-        <p:txBody>
-          <a:bodyPr wrap="square">
-            <a:spAutoFit/>
-          </a:bodyPr>
-          <a:lstStyle/>
-          <a:p>
-            <a:pPr algn="l">
-              <a:defRPr sz="1800" b="0">
-                <a:solidFill>
-                  <a:srgbClr val="333333"/>
-                </a:solidFill>
-                <a:latin typeface="Yu Gothic"/>
-              </a:defRPr>
-            </a:pPr>
-            <a:r>
-              <a:t>第1回研修「オリエンテーション＆管理職の役割認識」</a:t>
+            <a:off x="1097280" y="2651760"/>
+            <a:ext cx="10058400" cy="411480"/>
+          </a:xfrm>
+          <a:prstGeom prst="rect">
+            <a:avLst/>
+          </a:prstGeom>
+          <a:noFill/>
+        </p:spPr>
+        <p:txBody>
+          <a:bodyPr wrap="square">
+            <a:spAutoFit/>
+          </a:bodyPr>
+          <a:lstStyle/>
+          <a:p>
+            <a:pPr algn="l">
+              <a:defRPr sz="1800" b="0"/>
+            </a:pPr>
+            <a:r>
+              <a:t>●  配布時期・配布方法の決定</a:t>
             </a:r>
           </a:p>
         </p:txBody>
@@ -5777,14 +4647,6 @@
 <file path=ppt/slides/slide14.xml><?xml version="1.0" encoding="utf-8"?>
 <p:sld xmlns:a="http://schemas.openxmlformats.org/drawingml/2006/main" xmlns:p="http://schemas.openxmlformats.org/presentationml/2006/main" xmlns:r="http://schemas.openxmlformats.org/officeDocument/2006/relationships">
   <p:cSld>
-    <p:bg>
-      <p:bgPr>
-        <a:solidFill>
-          <a:srgbClr val="FFFFFF"/>
-        </a:solidFill>
-        <a:effectLst/>
-      </p:bgPr>
-    </p:bg>
     <p:spTree>
       <p:nvGrpSpPr>
         <p:cNvPr id="1" name=""/>
@@ -5871,18 +4733,14 @@
           </a:fontRef>
         </p:style>
         <p:txBody>
-          <a:bodyPr rtlCol="0" anchor="ctr" wrap="none"/>
+          <a:bodyPr rtlCol="0" anchor="ctr"/>
           <a:lstStyle/>
           <a:p>
             <a:pPr algn="ctr">
-              <a:spcBef>
-                <a:spcPts val="600"/>
-              </a:spcBef>
               <a:defRPr sz="3600" b="1">
                 <a:solidFill>
                   <a:srgbClr val="FFFFFF"/>
                 </a:solidFill>
-                <a:latin typeface="Yu Gothic"/>
               </a:defRPr>
             </a:pPr>
             <a:r>
@@ -5914,15 +4772,10 @@
           <a:lstStyle/>
           <a:p>
             <a:pPr algn="l">
-              <a:defRPr sz="3000" b="1">
-                <a:solidFill>
-                  <a:srgbClr val="1B2A4A"/>
-                </a:solidFill>
-                <a:latin typeface="Yu Gothic"/>
-              </a:defRPr>
-            </a:pPr>
-            <a:r>
-              <a:t>その他・質疑応答</a:t>
+              <a:defRPr sz="3000" b="1"/>
+            </a:pPr>
+            <a:r>
+              <a:t>合宿・講師移動について</a:t>
             </a:r>
           </a:p>
         </p:txBody>
@@ -5993,15 +4846,10 @@
           <a:lstStyle/>
           <a:p>
             <a:pPr algn="l">
-              <a:defRPr sz="1800" b="0">
-                <a:solidFill>
-                  <a:srgbClr val="333333"/>
-                </a:solidFill>
-                <a:latin typeface="Yu Gothic"/>
-              </a:defRPr>
-            </a:pPr>
-            <a:r>
-              <a:t>●  研修当日の受付・準備（プロジェクター、ホワイトボード等）</a:t>
+              <a:defRPr sz="1800" b="0"/>
+            </a:pPr>
+            <a:r>
+              <a:t>●  合宿（第11回）の実施可否の最終判断</a:t>
             </a:r>
           </a:p>
         </p:txBody>
@@ -6029,15 +4877,10 @@
           <a:lstStyle/>
           <a:p>
             <a:pPr algn="l">
-              <a:defRPr sz="1800" b="0">
-                <a:solidFill>
-                  <a:srgbClr val="333333"/>
-                </a:solidFill>
-                <a:latin typeface="Yu Gothic"/>
-              </a:defRPr>
-            </a:pPr>
-            <a:r>
-              <a:t>●  写真撮影・記録の可否</a:t>
+              <a:defRPr sz="1800" b="0"/>
+            </a:pPr>
+            <a:r>
+              <a:t>●  候補地の検討（先方からの提案 or こちらから候補提示）</a:t>
             </a:r>
           </a:p>
         </p:txBody>
@@ -6065,15 +4908,10 @@
           <a:lstStyle/>
           <a:p>
             <a:pPr algn="l">
-              <a:defRPr sz="1800" b="0">
-                <a:solidFill>
-                  <a:srgbClr val="333333"/>
-                </a:solidFill>
-                <a:latin typeface="Yu Gothic"/>
-              </a:defRPr>
-            </a:pPr>
-            <a:r>
-              <a:t>●  緊急連絡先・窓口の確認</a:t>
+              <a:defRPr sz="1800" b="0"/>
+            </a:pPr>
+            <a:r>
+              <a:t>●  予算感の確認（宿泊費・会場費・食事代）</a:t>
             </a:r>
           </a:p>
         </p:txBody>
@@ -6101,15 +4939,177 @@
           <a:lstStyle/>
           <a:p>
             <a:pPr algn="l">
-              <a:defRPr sz="1800" b="0">
+              <a:defRPr sz="1800" b="0"/>
+            </a:pPr>
+            <a:r>
+              <a:t>●  1泊2日のスケジュール（DAY1: 9:00〜17:00 / DAY2: 8:30〜15:00）</a:t>
+            </a:r>
+          </a:p>
+        </p:txBody>
+      </p:sp>
+      <p:sp>
+        <p:nvSpPr>
+          <p:cNvPr id="10" name="TextBox 9"/>
+          <p:cNvSpPr txBox="1"/>
+          <p:nvPr/>
+        </p:nvSpPr>
+        <p:spPr>
+          <a:xfrm>
+            <a:off x="1097280" y="3566160"/>
+            <a:ext cx="10058400" cy="411480"/>
+          </a:xfrm>
+          <a:prstGeom prst="rect">
+            <a:avLst/>
+          </a:prstGeom>
+          <a:noFill/>
+        </p:spPr>
+        <p:txBody>
+          <a:bodyPr wrap="square">
+            <a:spAutoFit/>
+          </a:bodyPr>
+          <a:lstStyle/>
+          <a:p>
+            <a:pPr algn="l">
+              <a:defRPr sz="1800" b="0"/>
+            </a:pPr>
+            <a:r>
+              <a:t>●  移動手段（バス手配 or 各自 or 社用車）</a:t>
+            </a:r>
+          </a:p>
+        </p:txBody>
+      </p:sp>
+      <p:sp>
+        <p:nvSpPr>
+          <p:cNvPr id="11" name="TextBox 10"/>
+          <p:cNvSpPr txBox="1"/>
+          <p:nvPr/>
+        </p:nvSpPr>
+        <p:spPr>
+          <a:xfrm>
+            <a:off x="1097280" y="4023360"/>
+            <a:ext cx="10058400" cy="411480"/>
+          </a:xfrm>
+          <a:prstGeom prst="rect">
+            <a:avLst/>
+          </a:prstGeom>
+          <a:noFill/>
+        </p:spPr>
+        <p:txBody>
+          <a:bodyPr wrap="square">
+            <a:spAutoFit/>
+          </a:bodyPr>
+          <a:lstStyle/>
+          <a:p>
+            <a:pPr algn="l">
+              <a:defRPr sz="1800" b="0"/>
+            </a:pPr>
+            <a:r>
+              <a:t>●  講師の前泊について</a:t>
+            </a:r>
+          </a:p>
+        </p:txBody>
+      </p:sp>
+      <p:sp>
+        <p:nvSpPr>
+          <p:cNvPr id="12" name="TextBox 11"/>
+          <p:cNvSpPr txBox="1"/>
+          <p:nvPr/>
+        </p:nvSpPr>
+        <p:spPr>
+          <a:xfrm>
+            <a:off x="1645920" y="4480560"/>
+            <a:ext cx="9509760" cy="365760"/>
+          </a:xfrm>
+          <a:prstGeom prst="rect">
+            <a:avLst/>
+          </a:prstGeom>
+          <a:noFill/>
+        </p:spPr>
+        <p:txBody>
+          <a:bodyPr wrap="square">
+            <a:spAutoFit/>
+          </a:bodyPr>
+          <a:lstStyle/>
+          <a:p>
+            <a:pPr algn="l">
+              <a:defRPr sz="1500" b="0">
                 <a:solidFill>
-                  <a:srgbClr val="333333"/>
+                  <a:srgbClr val="666666"/>
                 </a:solidFill>
-                <a:latin typeface="Yu Gothic"/>
               </a:defRPr>
             </a:pPr>
             <a:r>
-              <a:t>●  次回の連絡タイミング</a:t>
+              <a:t>→  尾道で朝9時開始 → 移動トラブルを考慮し前泊させていただきたい</a:t>
+            </a:r>
+          </a:p>
+        </p:txBody>
+      </p:sp>
+      <p:sp>
+        <p:nvSpPr>
+          <p:cNvPr id="13" name="TextBox 12"/>
+          <p:cNvSpPr txBox="1"/>
+          <p:nvPr/>
+        </p:nvSpPr>
+        <p:spPr>
+          <a:xfrm>
+            <a:off x="1645920" y="4846320"/>
+            <a:ext cx="9509760" cy="365760"/>
+          </a:xfrm>
+          <a:prstGeom prst="rect">
+            <a:avLst/>
+          </a:prstGeom>
+          <a:noFill/>
+        </p:spPr>
+        <p:txBody>
+          <a:bodyPr wrap="square">
+            <a:spAutoFit/>
+          </a:bodyPr>
+          <a:lstStyle/>
+          <a:p>
+            <a:pPr algn="l">
+              <a:defRPr sz="1500" b="0">
+                <a:solidFill>
+                  <a:srgbClr val="666666"/>
+                </a:solidFill>
+              </a:defRPr>
+            </a:pPr>
+            <a:r>
+              <a:t>→  新幹線での移動を想定</a:t>
+            </a:r>
+          </a:p>
+        </p:txBody>
+      </p:sp>
+      <p:sp>
+        <p:nvSpPr>
+          <p:cNvPr id="14" name="TextBox 13"/>
+          <p:cNvSpPr txBox="1"/>
+          <p:nvPr/>
+        </p:nvSpPr>
+        <p:spPr>
+          <a:xfrm>
+            <a:off x="1645920" y="5212080"/>
+            <a:ext cx="9509760" cy="365760"/>
+          </a:xfrm>
+          <a:prstGeom prst="rect">
+            <a:avLst/>
+          </a:prstGeom>
+          <a:noFill/>
+        </p:spPr>
+        <p:txBody>
+          <a:bodyPr wrap="square">
+            <a:spAutoFit/>
+          </a:bodyPr>
+          <a:lstStyle/>
+          <a:p>
+            <a:pPr algn="l">
+              <a:defRPr sz="1500" b="0">
+                <a:solidFill>
+                  <a:srgbClr val="666666"/>
+                </a:solidFill>
+              </a:defRPr>
+            </a:pPr>
+            <a:r>
+              <a:t>→  前泊の可否・費用負担の確認</a:t>
             </a:r>
           </a:p>
         </p:txBody>
@@ -6125,14 +5125,6 @@
 <file path=ppt/slides/slide15.xml><?xml version="1.0" encoding="utf-8"?>
 <p:sld xmlns:a="http://schemas.openxmlformats.org/drawingml/2006/main" xmlns:p="http://schemas.openxmlformats.org/presentationml/2006/main" xmlns:r="http://schemas.openxmlformats.org/officeDocument/2006/relationships">
   <p:cSld>
-    <p:bg>
-      <p:bgPr>
-        <a:solidFill>
-          <a:srgbClr val="1B2A4A"/>
-        </a:solidFill>
-        <a:effectLst/>
-      </p:bgPr>
-    </p:bg>
     <p:spTree>
       <p:nvGrpSpPr>
         <p:cNvPr id="1" name=""/>
@@ -6148,8 +5140,8 @@
         </p:nvSpPr>
         <p:spPr>
           <a:xfrm>
-            <a:off x="0" y="2926080"/>
-            <a:ext cx="12191695" cy="54864"/>
+            <a:off x="0" y="0"/>
+            <a:ext cx="12191695" cy="73152"/>
           </a:xfrm>
           <a:prstGeom prst="rect">
             <a:avLst/>
@@ -6185,36 +5177,52 @@
       </p:sp>
       <p:sp>
         <p:nvSpPr>
-          <p:cNvPr id="3" name="TextBox 2"/>
-          <p:cNvSpPr txBox="1"/>
-          <p:nvPr/>
-        </p:nvSpPr>
-        <p:spPr>
-          <a:xfrm>
-            <a:off x="914400" y="3200400"/>
-            <a:ext cx="10332720" cy="914400"/>
-          </a:xfrm>
-          <a:prstGeom prst="rect">
-            <a:avLst/>
-          </a:prstGeom>
-          <a:noFill/>
-        </p:spPr>
-        <p:txBody>
-          <a:bodyPr wrap="square">
-            <a:spAutoFit/>
-          </a:bodyPr>
+          <p:cNvPr id="3" name="Rectangle 2"/>
+          <p:cNvSpPr/>
+          <p:nvPr/>
+        </p:nvSpPr>
+        <p:spPr>
+          <a:xfrm>
+            <a:off x="731520" y="457200"/>
+            <a:ext cx="822960" cy="822960"/>
+          </a:xfrm>
+          <a:prstGeom prst="rect">
+            <a:avLst/>
+          </a:prstGeom>
+          <a:solidFill>
+            <a:srgbClr val="2E86AB"/>
+          </a:solidFill>
+          <a:ln>
+            <a:noFill/>
+          </a:ln>
+        </p:spPr>
+        <p:style>
+          <a:lnRef idx="1">
+            <a:schemeClr val="accent1"/>
+          </a:lnRef>
+          <a:fillRef idx="3">
+            <a:schemeClr val="accent1"/>
+          </a:fillRef>
+          <a:effectRef idx="2">
+            <a:schemeClr val="accent1"/>
+          </a:effectRef>
+          <a:fontRef idx="minor">
+            <a:schemeClr val="lt1"/>
+          </a:fontRef>
+        </p:style>
+        <p:txBody>
+          <a:bodyPr rtlCol="0" anchor="ctr"/>
           <a:lstStyle/>
           <a:p>
             <a:pPr algn="ctr">
-              <a:defRPr sz="4200" b="1">
+              <a:defRPr sz="3600" b="1">
                 <a:solidFill>
                   <a:srgbClr val="FFFFFF"/>
                 </a:solidFill>
-                <a:latin typeface="Yu Gothic"/>
               </a:defRPr>
             </a:pPr>
             <a:r>
-              <a:t>ありがとうございました</a:t>
+              <a:t>13</a:t>
             </a:r>
           </a:p>
         </p:txBody>
@@ -6227,30 +5235,1000 @@
         </p:nvSpPr>
         <p:spPr>
           <a:xfrm>
-            <a:off x="914400" y="4206240"/>
-            <a:ext cx="10332720" cy="548640"/>
-          </a:xfrm>
-          <a:prstGeom prst="rect">
-            <a:avLst/>
-          </a:prstGeom>
-          <a:noFill/>
-        </p:spPr>
-        <p:txBody>
-          <a:bodyPr wrap="square">
-            <a:spAutoFit/>
-          </a:bodyPr>
+            <a:off x="1828800" y="502920"/>
+            <a:ext cx="9144000" cy="731520"/>
+          </a:xfrm>
+          <a:prstGeom prst="rect">
+            <a:avLst/>
+          </a:prstGeom>
+          <a:noFill/>
+        </p:spPr>
+        <p:txBody>
+          <a:bodyPr wrap="square">
+            <a:spAutoFit/>
+          </a:bodyPr>
+          <a:lstStyle/>
+          <a:p>
+            <a:pPr algn="l">
+              <a:defRPr sz="3000" b="1"/>
+            </a:pPr>
+            <a:r>
+              <a:t>上司向けオリエンテーション</a:t>
+            </a:r>
+          </a:p>
+        </p:txBody>
+      </p:sp>
+      <p:sp>
+        <p:nvSpPr>
+          <p:cNvPr id="5" name="Rectangle 4"/>
+          <p:cNvSpPr/>
+          <p:nvPr/>
+        </p:nvSpPr>
+        <p:spPr>
+          <a:xfrm>
+            <a:off x="731520" y="1463040"/>
+            <a:ext cx="10698480" cy="27432"/>
+          </a:xfrm>
+          <a:prstGeom prst="rect">
+            <a:avLst/>
+          </a:prstGeom>
+          <a:solidFill>
+            <a:srgbClr val="2E86AB"/>
+          </a:solidFill>
+          <a:ln>
+            <a:noFill/>
+          </a:ln>
+        </p:spPr>
+        <p:style>
+          <a:lnRef idx="1">
+            <a:schemeClr val="accent1"/>
+          </a:lnRef>
+          <a:fillRef idx="3">
+            <a:schemeClr val="accent1"/>
+          </a:fillRef>
+          <a:effectRef idx="2">
+            <a:schemeClr val="accent1"/>
+          </a:effectRef>
+          <a:fontRef idx="minor">
+            <a:schemeClr val="lt1"/>
+          </a:fontRef>
+        </p:style>
+        <p:txBody>
+          <a:bodyPr rtlCol="0" anchor="ctr"/>
+          <a:lstStyle/>
+          <a:p>
+            <a:pPr algn="ctr"/>
+          </a:p>
+        </p:txBody>
+      </p:sp>
+      <p:sp>
+        <p:nvSpPr>
+          <p:cNvPr id="6" name="TextBox 5"/>
+          <p:cNvSpPr txBox="1"/>
+          <p:nvPr/>
+        </p:nvSpPr>
+        <p:spPr>
+          <a:xfrm>
+            <a:off x="1097280" y="1737360"/>
+            <a:ext cx="10058400" cy="411480"/>
+          </a:xfrm>
+          <a:prstGeom prst="rect">
+            <a:avLst/>
+          </a:prstGeom>
+          <a:noFill/>
+        </p:spPr>
+        <p:txBody>
+          <a:bodyPr wrap="square">
+            <a:spAutoFit/>
+          </a:bodyPr>
+          <a:lstStyle/>
+          <a:p>
+            <a:pPr algn="l">
+              <a:defRPr sz="1800" b="0"/>
+            </a:pPr>
+            <a:r>
+              <a:t>●  4月中旬に30分・無料で実施予定</a:t>
+            </a:r>
+          </a:p>
+        </p:txBody>
+      </p:sp>
+      <p:sp>
+        <p:nvSpPr>
+          <p:cNvPr id="7" name="TextBox 6"/>
+          <p:cNvSpPr txBox="1"/>
+          <p:nvPr/>
+        </p:nvSpPr>
+        <p:spPr>
+          <a:xfrm>
+            <a:off x="1097280" y="2194560"/>
+            <a:ext cx="10058400" cy="411480"/>
+          </a:xfrm>
+          <a:prstGeom prst="rect">
+            <a:avLst/>
+          </a:prstGeom>
+          <a:noFill/>
+        </p:spPr>
+        <p:txBody>
+          <a:bodyPr wrap="square">
+            <a:spAutoFit/>
+          </a:bodyPr>
+          <a:lstStyle/>
+          <a:p>
+            <a:pPr algn="l">
+              <a:defRPr sz="1800" b="0"/>
+            </a:pPr>
+            <a:r>
+              <a:t>●  対象者：塾生の直属上司</a:t>
+            </a:r>
+          </a:p>
+        </p:txBody>
+      </p:sp>
+      <p:sp>
+        <p:nvSpPr>
+          <p:cNvPr id="8" name="TextBox 7"/>
+          <p:cNvSpPr txBox="1"/>
+          <p:nvPr/>
+        </p:nvSpPr>
+        <p:spPr>
+          <a:xfrm>
+            <a:off x="1097280" y="2651760"/>
+            <a:ext cx="10058400" cy="411480"/>
+          </a:xfrm>
+          <a:prstGeom prst="rect">
+            <a:avLst/>
+          </a:prstGeom>
+          <a:noFill/>
+        </p:spPr>
+        <p:txBody>
+          <a:bodyPr wrap="square">
+            <a:spAutoFit/>
+          </a:bodyPr>
+          <a:lstStyle/>
+          <a:p>
+            <a:pPr algn="l">
+              <a:defRPr sz="1800" b="0"/>
+            </a:pPr>
+            <a:r>
+              <a:t>●  日程候補の調整方法</a:t>
+            </a:r>
+          </a:p>
+        </p:txBody>
+      </p:sp>
+      <p:sp>
+        <p:nvSpPr>
+          <p:cNvPr id="9" name="TextBox 8"/>
+          <p:cNvSpPr txBox="1"/>
+          <p:nvPr/>
+        </p:nvSpPr>
+        <p:spPr>
+          <a:xfrm>
+            <a:off x="1097280" y="3108960"/>
+            <a:ext cx="10058400" cy="411480"/>
+          </a:xfrm>
+          <a:prstGeom prst="rect">
+            <a:avLst/>
+          </a:prstGeom>
+          <a:noFill/>
+        </p:spPr>
+        <p:txBody>
+          <a:bodyPr wrap="square">
+            <a:spAutoFit/>
+          </a:bodyPr>
+          <a:lstStyle/>
+          <a:p>
+            <a:pPr algn="l">
+              <a:defRPr sz="1800" b="0"/>
+            </a:pPr>
+            <a:r>
+              <a:t>●  オンライン or 対面の確認</a:t>
+            </a:r>
+          </a:p>
+        </p:txBody>
+      </p:sp>
+    </p:spTree>
+  </p:cSld>
+  <p:clrMapOvr>
+    <a:masterClrMapping/>
+  </p:clrMapOvr>
+</p:sld>
+</file>
+
+<file path=ppt/slides/slide16.xml><?xml version="1.0" encoding="utf-8"?>
+<p:sld xmlns:a="http://schemas.openxmlformats.org/drawingml/2006/main" xmlns:p="http://schemas.openxmlformats.org/presentationml/2006/main" xmlns:r="http://schemas.openxmlformats.org/officeDocument/2006/relationships">
+  <p:cSld>
+    <p:spTree>
+      <p:nvGrpSpPr>
+        <p:cNvPr id="1" name=""/>
+        <p:cNvGrpSpPr/>
+        <p:nvPr/>
+      </p:nvGrpSpPr>
+      <p:grpSpPr/>
+      <p:sp>
+        <p:nvSpPr>
+          <p:cNvPr id="2" name="Rectangle 1"/>
+          <p:cNvSpPr/>
+          <p:nvPr/>
+        </p:nvSpPr>
+        <p:spPr>
+          <a:xfrm>
+            <a:off x="0" y="0"/>
+            <a:ext cx="12191695" cy="73152"/>
+          </a:xfrm>
+          <a:prstGeom prst="rect">
+            <a:avLst/>
+          </a:prstGeom>
+          <a:solidFill>
+            <a:srgbClr val="2E86AB"/>
+          </a:solidFill>
+          <a:ln>
+            <a:noFill/>
+          </a:ln>
+        </p:spPr>
+        <p:style>
+          <a:lnRef idx="1">
+            <a:schemeClr val="accent1"/>
+          </a:lnRef>
+          <a:fillRef idx="3">
+            <a:schemeClr val="accent1"/>
+          </a:fillRef>
+          <a:effectRef idx="2">
+            <a:schemeClr val="accent1"/>
+          </a:effectRef>
+          <a:fontRef idx="minor">
+            <a:schemeClr val="lt1"/>
+          </a:fontRef>
+        </p:style>
+        <p:txBody>
+          <a:bodyPr rtlCol="0" anchor="ctr"/>
+          <a:lstStyle/>
+          <a:p>
+            <a:pPr algn="ctr"/>
+          </a:p>
+        </p:txBody>
+      </p:sp>
+      <p:sp>
+        <p:nvSpPr>
+          <p:cNvPr id="3" name="Rectangle 2"/>
+          <p:cNvSpPr/>
+          <p:nvPr/>
+        </p:nvSpPr>
+        <p:spPr>
+          <a:xfrm>
+            <a:off x="731520" y="457200"/>
+            <a:ext cx="822960" cy="822960"/>
+          </a:xfrm>
+          <a:prstGeom prst="rect">
+            <a:avLst/>
+          </a:prstGeom>
+          <a:solidFill>
+            <a:srgbClr val="2E86AB"/>
+          </a:solidFill>
+          <a:ln>
+            <a:noFill/>
+          </a:ln>
+        </p:spPr>
+        <p:style>
+          <a:lnRef idx="1">
+            <a:schemeClr val="accent1"/>
+          </a:lnRef>
+          <a:fillRef idx="3">
+            <a:schemeClr val="accent1"/>
+          </a:fillRef>
+          <a:effectRef idx="2">
+            <a:schemeClr val="accent1"/>
+          </a:effectRef>
+          <a:fontRef idx="minor">
+            <a:schemeClr val="lt1"/>
+          </a:fontRef>
+        </p:style>
+        <p:txBody>
+          <a:bodyPr rtlCol="0" anchor="ctr"/>
           <a:lstStyle/>
           <a:p>
             <a:pPr algn="ctr">
-              <a:defRPr sz="2000" b="0">
+              <a:defRPr sz="3600" b="1">
                 <a:solidFill>
-                  <a:srgbClr val="88AACC"/>
+                  <a:srgbClr val="FFFFFF"/>
                 </a:solidFill>
-                <a:latin typeface="Yu Gothic"/>
               </a:defRPr>
             </a:pPr>
             <a:r>
-              <a:t>株式会社えんのした</a:t>
+              <a:t>14</a:t>
+            </a:r>
+          </a:p>
+        </p:txBody>
+      </p:sp>
+      <p:sp>
+        <p:nvSpPr>
+          <p:cNvPr id="4" name="TextBox 3"/>
+          <p:cNvSpPr txBox="1"/>
+          <p:nvPr/>
+        </p:nvSpPr>
+        <p:spPr>
+          <a:xfrm>
+            <a:off x="1828800" y="502920"/>
+            <a:ext cx="9144000" cy="731520"/>
+          </a:xfrm>
+          <a:prstGeom prst="rect">
+            <a:avLst/>
+          </a:prstGeom>
+          <a:noFill/>
+        </p:spPr>
+        <p:txBody>
+          <a:bodyPr wrap="square">
+            <a:spAutoFit/>
+          </a:bodyPr>
+          <a:lstStyle/>
+          <a:p>
+            <a:pPr algn="l">
+              <a:defRPr sz="3000" b="1"/>
+            </a:pPr>
+            <a:r>
+              <a:t>今後のスケジュール確認</a:t>
+            </a:r>
+          </a:p>
+        </p:txBody>
+      </p:sp>
+      <p:sp>
+        <p:nvSpPr>
+          <p:cNvPr id="5" name="Rectangle 4"/>
+          <p:cNvSpPr/>
+          <p:nvPr/>
+        </p:nvSpPr>
+        <p:spPr>
+          <a:xfrm>
+            <a:off x="731520" y="1463040"/>
+            <a:ext cx="10698480" cy="27432"/>
+          </a:xfrm>
+          <a:prstGeom prst="rect">
+            <a:avLst/>
+          </a:prstGeom>
+          <a:solidFill>
+            <a:srgbClr val="2E86AB"/>
+          </a:solidFill>
+          <a:ln>
+            <a:noFill/>
+          </a:ln>
+        </p:spPr>
+        <p:style>
+          <a:lnRef idx="1">
+            <a:schemeClr val="accent1"/>
+          </a:lnRef>
+          <a:fillRef idx="3">
+            <a:schemeClr val="accent1"/>
+          </a:fillRef>
+          <a:effectRef idx="2">
+            <a:schemeClr val="accent1"/>
+          </a:effectRef>
+          <a:fontRef idx="minor">
+            <a:schemeClr val="lt1"/>
+          </a:fontRef>
+        </p:style>
+        <p:txBody>
+          <a:bodyPr rtlCol="0" anchor="ctr"/>
+          <a:lstStyle/>
+          <a:p>
+            <a:pPr algn="ctr"/>
+          </a:p>
+        </p:txBody>
+      </p:sp>
+      <p:sp>
+        <p:nvSpPr>
+          <p:cNvPr id="6" name="TextBox 5"/>
+          <p:cNvSpPr txBox="1"/>
+          <p:nvPr/>
+        </p:nvSpPr>
+        <p:spPr>
+          <a:xfrm>
+            <a:off x="1097280" y="1737360"/>
+            <a:ext cx="10058400" cy="411480"/>
+          </a:xfrm>
+          <a:prstGeom prst="rect">
+            <a:avLst/>
+          </a:prstGeom>
+          <a:noFill/>
+        </p:spPr>
+        <p:txBody>
+          <a:bodyPr wrap="square">
+            <a:spAutoFit/>
+          </a:bodyPr>
+          <a:lstStyle/>
+          <a:p>
+            <a:pPr algn="l">
+              <a:defRPr sz="1800" b="0"/>
+            </a:pPr>
+            <a:r>
+              <a:t>●  3月末：メンバー構成表の最終確定（事務局含む）</a:t>
+            </a:r>
+          </a:p>
+        </p:txBody>
+      </p:sp>
+      <p:sp>
+        <p:nvSpPr>
+          <p:cNvPr id="7" name="TextBox 6"/>
+          <p:cNvSpPr txBox="1"/>
+          <p:nvPr/>
+        </p:nvSpPr>
+        <p:spPr>
+          <a:xfrm>
+            <a:off x="1097280" y="2194560"/>
+            <a:ext cx="10058400" cy="411480"/>
+          </a:xfrm>
+          <a:prstGeom prst="rect">
+            <a:avLst/>
+          </a:prstGeom>
+          <a:noFill/>
+        </p:spPr>
+        <p:txBody>
+          <a:bodyPr wrap="square">
+            <a:spAutoFit/>
+          </a:bodyPr>
+          <a:lstStyle/>
+          <a:p>
+            <a:pPr algn="l">
+              <a:defRPr sz="1800" b="0"/>
+            </a:pPr>
+            <a:r>
+              <a:t>●  3月末：経営理念・役割行動の素案作成</a:t>
+            </a:r>
+          </a:p>
+        </p:txBody>
+      </p:sp>
+      <p:sp>
+        <p:nvSpPr>
+          <p:cNvPr id="8" name="TextBox 7"/>
+          <p:cNvSpPr txBox="1"/>
+          <p:nvPr/>
+        </p:nvSpPr>
+        <p:spPr>
+          <a:xfrm>
+            <a:off x="1097280" y="2651760"/>
+            <a:ext cx="10058400" cy="411480"/>
+          </a:xfrm>
+          <a:prstGeom prst="rect">
+            <a:avLst/>
+          </a:prstGeom>
+          <a:noFill/>
+        </p:spPr>
+        <p:txBody>
+          <a:bodyPr wrap="square">
+            <a:spAutoFit/>
+          </a:bodyPr>
+          <a:lstStyle/>
+          <a:p>
+            <a:pPr algn="l">
+              <a:defRPr sz="1800" b="0"/>
+            </a:pPr>
+            <a:r>
+              <a:t>●  4月上旬：振り返りシート最終版作成</a:t>
+            </a:r>
+          </a:p>
+        </p:txBody>
+      </p:sp>
+      <p:sp>
+        <p:nvSpPr>
+          <p:cNvPr id="9" name="TextBox 8"/>
+          <p:cNvSpPr txBox="1"/>
+          <p:nvPr/>
+        </p:nvSpPr>
+        <p:spPr>
+          <a:xfrm>
+            <a:off x="1097280" y="3108960"/>
+            <a:ext cx="10058400" cy="411480"/>
+          </a:xfrm>
+          <a:prstGeom prst="rect">
+            <a:avLst/>
+          </a:prstGeom>
+          <a:noFill/>
+        </p:spPr>
+        <p:txBody>
+          <a:bodyPr wrap="square">
+            <a:spAutoFit/>
+          </a:bodyPr>
+          <a:lstStyle/>
+          <a:p>
+            <a:pPr algn="l">
+              <a:defRPr sz="1800" b="0"/>
+            </a:pPr>
+            <a:r>
+              <a:t>●  4月上旬：課題図書の選定・発注</a:t>
+            </a:r>
+          </a:p>
+        </p:txBody>
+      </p:sp>
+      <p:sp>
+        <p:nvSpPr>
+          <p:cNvPr id="10" name="TextBox 9"/>
+          <p:cNvSpPr txBox="1"/>
+          <p:nvPr/>
+        </p:nvSpPr>
+        <p:spPr>
+          <a:xfrm>
+            <a:off x="1097280" y="3566160"/>
+            <a:ext cx="10058400" cy="411480"/>
+          </a:xfrm>
+          <a:prstGeom prst="rect">
+            <a:avLst/>
+          </a:prstGeom>
+          <a:noFill/>
+        </p:spPr>
+        <p:txBody>
+          <a:bodyPr wrap="square">
+            <a:spAutoFit/>
+          </a:bodyPr>
+          <a:lstStyle/>
+          <a:p>
+            <a:pPr algn="l">
+              <a:defRPr sz="1800" b="0"/>
+            </a:pPr>
+            <a:r>
+              <a:t>●  4月上旬：最終報告の基準・サンプル資料の送付</a:t>
+            </a:r>
+          </a:p>
+        </p:txBody>
+      </p:sp>
+      <p:sp>
+        <p:nvSpPr>
+          <p:cNvPr id="11" name="TextBox 10"/>
+          <p:cNvSpPr txBox="1"/>
+          <p:nvPr/>
+        </p:nvSpPr>
+        <p:spPr>
+          <a:xfrm>
+            <a:off x="1097280" y="4023360"/>
+            <a:ext cx="10058400" cy="411480"/>
+          </a:xfrm>
+          <a:prstGeom prst="rect">
+            <a:avLst/>
+          </a:prstGeom>
+          <a:noFill/>
+        </p:spPr>
+        <p:txBody>
+          <a:bodyPr wrap="square">
+            <a:spAutoFit/>
+          </a:bodyPr>
+          <a:lstStyle/>
+          <a:p>
+            <a:pPr algn="l">
+              <a:defRPr sz="1800" b="0"/>
+            </a:pPr>
+            <a:r>
+              <a:t>●  4月中旬：上司向けオリエンテーション実施</a:t>
+            </a:r>
+          </a:p>
+        </p:txBody>
+      </p:sp>
+      <p:sp>
+        <p:nvSpPr>
+          <p:cNvPr id="12" name="TextBox 11"/>
+          <p:cNvSpPr txBox="1"/>
+          <p:nvPr/>
+        </p:nvSpPr>
+        <p:spPr>
+          <a:xfrm>
+            <a:off x="1097280" y="4480560"/>
+            <a:ext cx="10058400" cy="411480"/>
+          </a:xfrm>
+          <a:prstGeom prst="rect">
+            <a:avLst/>
+          </a:prstGeom>
+          <a:noFill/>
+        </p:spPr>
+        <p:txBody>
+          <a:bodyPr wrap="square">
+            <a:spAutoFit/>
+          </a:bodyPr>
+          <a:lstStyle/>
+          <a:p>
+            <a:pPr algn="l">
+              <a:defRPr sz="1800" b="0"/>
+            </a:pPr>
+            <a:r>
+              <a:t>●  4月中旬：360度評価の設計・項目確定</a:t>
+            </a:r>
+          </a:p>
+        </p:txBody>
+      </p:sp>
+      <p:sp>
+        <p:nvSpPr>
+          <p:cNvPr id="13" name="TextBox 12"/>
+          <p:cNvSpPr txBox="1"/>
+          <p:nvPr/>
+        </p:nvSpPr>
+        <p:spPr>
+          <a:xfrm>
+            <a:off x="1097280" y="4937760"/>
+            <a:ext cx="10058400" cy="411480"/>
+          </a:xfrm>
+          <a:prstGeom prst="rect">
+            <a:avLst/>
+          </a:prstGeom>
+          <a:noFill/>
+        </p:spPr>
+        <p:txBody>
+          <a:bodyPr wrap="square">
+            <a:spAutoFit/>
+          </a:bodyPr>
+          <a:lstStyle/>
+          <a:p>
+            <a:pPr algn="l">
+              <a:defRPr sz="1800" b="0"/>
+            </a:pPr>
+            <a:r>
+              <a:t>●  5月上旬：第1回研修資料の完成</a:t>
+            </a:r>
+          </a:p>
+        </p:txBody>
+      </p:sp>
+      <p:sp>
+        <p:nvSpPr>
+          <p:cNvPr id="14" name="TextBox 13"/>
+          <p:cNvSpPr txBox="1"/>
+          <p:nvPr/>
+        </p:nvSpPr>
+        <p:spPr>
+          <a:xfrm>
+            <a:off x="1097280" y="5394960"/>
+            <a:ext cx="10058400" cy="411480"/>
+          </a:xfrm>
+          <a:prstGeom prst="rect">
+            <a:avLst/>
+          </a:prstGeom>
+          <a:noFill/>
+        </p:spPr>
+        <p:txBody>
+          <a:bodyPr wrap="square">
+            <a:spAutoFit/>
+          </a:bodyPr>
+          <a:lstStyle/>
+          <a:p>
+            <a:pPr algn="l">
+              <a:defRPr sz="1800" b="0"/>
+            </a:pPr>
+            <a:r>
+              <a:t>●  5月中旬：参加者への最終案内・事前課題送付</a:t>
+            </a:r>
+          </a:p>
+        </p:txBody>
+      </p:sp>
+      <p:sp>
+        <p:nvSpPr>
+          <p:cNvPr id="15" name="TextBox 14"/>
+          <p:cNvSpPr txBox="1"/>
+          <p:nvPr/>
+        </p:nvSpPr>
+        <p:spPr>
+          <a:xfrm>
+            <a:off x="1097280" y="5852160"/>
+            <a:ext cx="10058400" cy="411480"/>
+          </a:xfrm>
+          <a:prstGeom prst="rect">
+            <a:avLst/>
+          </a:prstGeom>
+          <a:noFill/>
+        </p:spPr>
+        <p:txBody>
+          <a:bodyPr wrap="square">
+            <a:spAutoFit/>
+          </a:bodyPr>
+          <a:lstStyle/>
+          <a:p>
+            <a:pPr algn="l">
+              <a:defRPr sz="1800" b="0"/>
+            </a:pPr>
+            <a:r>
+              <a:t>●  6月：第1回研修「オリエンテーション＆管理職の役割認識」</a:t>
+            </a:r>
+          </a:p>
+        </p:txBody>
+      </p:sp>
+    </p:spTree>
+  </p:cSld>
+  <p:clrMapOvr>
+    <a:masterClrMapping/>
+  </p:clrMapOvr>
+</p:sld>
+</file>
+
+<file path=ppt/slides/slide17.xml><?xml version="1.0" encoding="utf-8"?>
+<p:sld xmlns:a="http://schemas.openxmlformats.org/drawingml/2006/main" xmlns:p="http://schemas.openxmlformats.org/presentationml/2006/main" xmlns:r="http://schemas.openxmlformats.org/officeDocument/2006/relationships">
+  <p:cSld>
+    <p:spTree>
+      <p:nvGrpSpPr>
+        <p:cNvPr id="1" name=""/>
+        <p:cNvGrpSpPr/>
+        <p:nvPr/>
+      </p:nvGrpSpPr>
+      <p:grpSpPr/>
+      <p:sp>
+        <p:nvSpPr>
+          <p:cNvPr id="2" name="Rectangle 1"/>
+          <p:cNvSpPr/>
+          <p:nvPr/>
+        </p:nvSpPr>
+        <p:spPr>
+          <a:xfrm>
+            <a:off x="0" y="0"/>
+            <a:ext cx="12191695" cy="73152"/>
+          </a:xfrm>
+          <a:prstGeom prst="rect">
+            <a:avLst/>
+          </a:prstGeom>
+          <a:solidFill>
+            <a:srgbClr val="2E86AB"/>
+          </a:solidFill>
+          <a:ln>
+            <a:noFill/>
+          </a:ln>
+        </p:spPr>
+        <p:style>
+          <a:lnRef idx="1">
+            <a:schemeClr val="accent1"/>
+          </a:lnRef>
+          <a:fillRef idx="3">
+            <a:schemeClr val="accent1"/>
+          </a:fillRef>
+          <a:effectRef idx="2">
+            <a:schemeClr val="accent1"/>
+          </a:effectRef>
+          <a:fontRef idx="minor">
+            <a:schemeClr val="lt1"/>
+          </a:fontRef>
+        </p:style>
+        <p:txBody>
+          <a:bodyPr rtlCol="0" anchor="ctr"/>
+          <a:lstStyle/>
+          <a:p>
+            <a:pPr algn="ctr"/>
+          </a:p>
+        </p:txBody>
+      </p:sp>
+      <p:sp>
+        <p:nvSpPr>
+          <p:cNvPr id="3" name="Rectangle 2"/>
+          <p:cNvSpPr/>
+          <p:nvPr/>
+        </p:nvSpPr>
+        <p:spPr>
+          <a:xfrm>
+            <a:off x="731520" y="457200"/>
+            <a:ext cx="822960" cy="822960"/>
+          </a:xfrm>
+          <a:prstGeom prst="rect">
+            <a:avLst/>
+          </a:prstGeom>
+          <a:solidFill>
+            <a:srgbClr val="2E86AB"/>
+          </a:solidFill>
+          <a:ln>
+            <a:noFill/>
+          </a:ln>
+        </p:spPr>
+        <p:style>
+          <a:lnRef idx="1">
+            <a:schemeClr val="accent1"/>
+          </a:lnRef>
+          <a:fillRef idx="3">
+            <a:schemeClr val="accent1"/>
+          </a:fillRef>
+          <a:effectRef idx="2">
+            <a:schemeClr val="accent1"/>
+          </a:effectRef>
+          <a:fontRef idx="minor">
+            <a:schemeClr val="lt1"/>
+          </a:fontRef>
+        </p:style>
+        <p:txBody>
+          <a:bodyPr rtlCol="0" anchor="ctr"/>
+          <a:lstStyle/>
+          <a:p>
+            <a:pPr algn="ctr">
+              <a:defRPr sz="3600" b="1">
+                <a:solidFill>
+                  <a:srgbClr val="FFFFFF"/>
+                </a:solidFill>
+              </a:defRPr>
+            </a:pPr>
+            <a:r>
+              <a:t>15</a:t>
+            </a:r>
+          </a:p>
+        </p:txBody>
+      </p:sp>
+      <p:sp>
+        <p:nvSpPr>
+          <p:cNvPr id="4" name="TextBox 3"/>
+          <p:cNvSpPr txBox="1"/>
+          <p:nvPr/>
+        </p:nvSpPr>
+        <p:spPr>
+          <a:xfrm>
+            <a:off x="1828800" y="502920"/>
+            <a:ext cx="9144000" cy="731520"/>
+          </a:xfrm>
+          <a:prstGeom prst="rect">
+            <a:avLst/>
+          </a:prstGeom>
+          <a:noFill/>
+        </p:spPr>
+        <p:txBody>
+          <a:bodyPr wrap="square">
+            <a:spAutoFit/>
+          </a:bodyPr>
+          <a:lstStyle/>
+          <a:p>
+            <a:pPr algn="l">
+              <a:defRPr sz="3000" b="1"/>
+            </a:pPr>
+            <a:r>
+              <a:t>その他・質疑応答</a:t>
+            </a:r>
+          </a:p>
+        </p:txBody>
+      </p:sp>
+      <p:sp>
+        <p:nvSpPr>
+          <p:cNvPr id="5" name="Rectangle 4"/>
+          <p:cNvSpPr/>
+          <p:nvPr/>
+        </p:nvSpPr>
+        <p:spPr>
+          <a:xfrm>
+            <a:off x="731520" y="1463040"/>
+            <a:ext cx="10698480" cy="27432"/>
+          </a:xfrm>
+          <a:prstGeom prst="rect">
+            <a:avLst/>
+          </a:prstGeom>
+          <a:solidFill>
+            <a:srgbClr val="2E86AB"/>
+          </a:solidFill>
+          <a:ln>
+            <a:noFill/>
+          </a:ln>
+        </p:spPr>
+        <p:style>
+          <a:lnRef idx="1">
+            <a:schemeClr val="accent1"/>
+          </a:lnRef>
+          <a:fillRef idx="3">
+            <a:schemeClr val="accent1"/>
+          </a:fillRef>
+          <a:effectRef idx="2">
+            <a:schemeClr val="accent1"/>
+          </a:effectRef>
+          <a:fontRef idx="minor">
+            <a:schemeClr val="lt1"/>
+          </a:fontRef>
+        </p:style>
+        <p:txBody>
+          <a:bodyPr rtlCol="0" anchor="ctr"/>
+          <a:lstStyle/>
+          <a:p>
+            <a:pPr algn="ctr"/>
+          </a:p>
+        </p:txBody>
+      </p:sp>
+      <p:sp>
+        <p:nvSpPr>
+          <p:cNvPr id="6" name="TextBox 5"/>
+          <p:cNvSpPr txBox="1"/>
+          <p:nvPr/>
+        </p:nvSpPr>
+        <p:spPr>
+          <a:xfrm>
+            <a:off x="1097280" y="1737360"/>
+            <a:ext cx="10058400" cy="411480"/>
+          </a:xfrm>
+          <a:prstGeom prst="rect">
+            <a:avLst/>
+          </a:prstGeom>
+          <a:noFill/>
+        </p:spPr>
+        <p:txBody>
+          <a:bodyPr wrap="square">
+            <a:spAutoFit/>
+          </a:bodyPr>
+          <a:lstStyle/>
+          <a:p>
+            <a:pPr algn="l">
+              <a:defRPr sz="1800" b="0"/>
+            </a:pPr>
+            <a:r>
+              <a:t>●  研修当日の受付・準備（プロジェクター、ホワイトボード等）</a:t>
+            </a:r>
+          </a:p>
+        </p:txBody>
+      </p:sp>
+      <p:sp>
+        <p:nvSpPr>
+          <p:cNvPr id="7" name="TextBox 6"/>
+          <p:cNvSpPr txBox="1"/>
+          <p:nvPr/>
+        </p:nvSpPr>
+        <p:spPr>
+          <a:xfrm>
+            <a:off x="1097280" y="2194560"/>
+            <a:ext cx="10058400" cy="411480"/>
+          </a:xfrm>
+          <a:prstGeom prst="rect">
+            <a:avLst/>
+          </a:prstGeom>
+          <a:noFill/>
+        </p:spPr>
+        <p:txBody>
+          <a:bodyPr wrap="square">
+            <a:spAutoFit/>
+          </a:bodyPr>
+          <a:lstStyle/>
+          <a:p>
+            <a:pPr algn="l">
+              <a:defRPr sz="1800" b="0"/>
+            </a:pPr>
+            <a:r>
+              <a:t>●  写真撮影・記録の可否</a:t>
+            </a:r>
+          </a:p>
+        </p:txBody>
+      </p:sp>
+      <p:sp>
+        <p:nvSpPr>
+          <p:cNvPr id="8" name="TextBox 7"/>
+          <p:cNvSpPr txBox="1"/>
+          <p:nvPr/>
+        </p:nvSpPr>
+        <p:spPr>
+          <a:xfrm>
+            <a:off x="1097280" y="2651760"/>
+            <a:ext cx="10058400" cy="411480"/>
+          </a:xfrm>
+          <a:prstGeom prst="rect">
+            <a:avLst/>
+          </a:prstGeom>
+          <a:noFill/>
+        </p:spPr>
+        <p:txBody>
+          <a:bodyPr wrap="square">
+            <a:spAutoFit/>
+          </a:bodyPr>
+          <a:lstStyle/>
+          <a:p>
+            <a:pPr algn="l">
+              <a:defRPr sz="1800" b="0"/>
+            </a:pPr>
+            <a:r>
+              <a:t>●  緊急連絡先・窓口の確認</a:t>
+            </a:r>
+          </a:p>
+        </p:txBody>
+      </p:sp>
+      <p:sp>
+        <p:nvSpPr>
+          <p:cNvPr id="9" name="TextBox 8"/>
+          <p:cNvSpPr txBox="1"/>
+          <p:nvPr/>
+        </p:nvSpPr>
+        <p:spPr>
+          <a:xfrm>
+            <a:off x="1097280" y="3108960"/>
+            <a:ext cx="10058400" cy="411480"/>
+          </a:xfrm>
+          <a:prstGeom prst="rect">
+            <a:avLst/>
+          </a:prstGeom>
+          <a:noFill/>
+        </p:spPr>
+        <p:txBody>
+          <a:bodyPr wrap="square">
+            <a:spAutoFit/>
+          </a:bodyPr>
+          <a:lstStyle/>
+          <a:p>
+            <a:pPr algn="l">
+              <a:defRPr sz="1800" b="0"/>
+            </a:pPr>
+            <a:r>
+              <a:t>●  次回の連絡タイミング</a:t>
             </a:r>
           </a:p>
         </p:txBody>
@@ -6266,14 +6244,6 @@
 <file path=ppt/slides/slide2.xml><?xml version="1.0" encoding="utf-8"?>
 <p:sld xmlns:a="http://schemas.openxmlformats.org/drawingml/2006/main" xmlns:p="http://schemas.openxmlformats.org/presentationml/2006/main" xmlns:r="http://schemas.openxmlformats.org/officeDocument/2006/relationships">
   <p:cSld>
-    <p:bg>
-      <p:bgPr>
-        <a:solidFill>
-          <a:srgbClr val="FFFFFF"/>
-        </a:solidFill>
-        <a:effectLst/>
-      </p:bgPr>
-    </p:bg>
     <p:spTree>
       <p:nvGrpSpPr>
         <p:cNvPr id="1" name=""/>
@@ -6347,12 +6317,7 @@
           <a:lstStyle/>
           <a:p>
             <a:pPr algn="l">
-              <a:defRPr sz="3600" b="1">
-                <a:solidFill>
-                  <a:srgbClr val="1B2A4A"/>
-                </a:solidFill>
-                <a:latin typeface="Yu Gothic"/>
-              </a:defRPr>
+              <a:defRPr sz="3600" b="1"/>
             </a:pPr>
             <a:r>
               <a:t>本日のアジェンダ</a:t>
@@ -6447,7 +6412,6 @@
                 <a:solidFill>
                   <a:srgbClr val="FFFFFF"/>
                 </a:solidFill>
-                <a:latin typeface="Yu Gothic"/>
               </a:defRPr>
             </a:pPr>
             <a:r>
@@ -6479,15 +6443,10 @@
           <a:lstStyle/>
           <a:p>
             <a:pPr algn="l">
-              <a:defRPr sz="1800" b="0">
-                <a:solidFill>
-                  <a:srgbClr val="333333"/>
-                </a:solidFill>
-                <a:latin typeface="Yu Gothic"/>
-              </a:defRPr>
-            </a:pPr>
-            <a:r>
-              <a:t>日程の最終確定</a:t>
+              <a:defRPr sz="1800" b="0"/>
+            </a:pPr>
+            <a:r>
+              <a:t>取り組みの温度感確認</a:t>
             </a:r>
           </a:p>
         </p:txBody>
@@ -6519,11 +6478,10 @@
                 <a:solidFill>
                   <a:srgbClr val="666666"/>
                 </a:solidFill>
-                <a:latin typeface="Yu Gothic"/>
               </a:defRPr>
             </a:pPr>
             <a:r>
-              <a:t>10分</a:t>
+              <a:t>15分</a:t>
             </a:r>
           </a:p>
         </p:txBody>
@@ -6572,7 +6530,6 @@
                 <a:solidFill>
                   <a:srgbClr val="FFFFFF"/>
                 </a:solidFill>
-                <a:latin typeface="Yu Gothic"/>
               </a:defRPr>
             </a:pPr>
             <a:r>
@@ -6604,15 +6561,10 @@
           <a:lstStyle/>
           <a:p>
             <a:pPr algn="l">
-              <a:defRPr sz="1800" b="0">
-                <a:solidFill>
-                  <a:srgbClr val="333333"/>
-                </a:solidFill>
-                <a:latin typeface="Yu Gothic"/>
-              </a:defRPr>
-            </a:pPr>
-            <a:r>
-              <a:t>参加メンバーの確定</a:t>
+              <a:defRPr sz="1800" b="0"/>
+            </a:pPr>
+            <a:r>
+              <a:t>コンテンツの方向性確定</a:t>
             </a:r>
           </a:p>
         </p:txBody>
@@ -6644,11 +6596,10 @@
                 <a:solidFill>
                   <a:srgbClr val="666666"/>
                 </a:solidFill>
-                <a:latin typeface="Yu Gothic"/>
               </a:defRPr>
             </a:pPr>
             <a:r>
-              <a:t>15分</a:t>
+              <a:t>20分</a:t>
             </a:r>
           </a:p>
         </p:txBody>
@@ -6697,7 +6648,6 @@
                 <a:solidFill>
                   <a:srgbClr val="FFFFFF"/>
                 </a:solidFill>
-                <a:latin typeface="Yu Gothic"/>
               </a:defRPr>
             </a:pPr>
             <a:r>
@@ -6729,15 +6679,10 @@
           <a:lstStyle/>
           <a:p>
             <a:pPr algn="l">
-              <a:defRPr sz="1800" b="0">
-                <a:solidFill>
-                  <a:srgbClr val="333333"/>
-                </a:solidFill>
-                <a:latin typeface="Yu Gothic"/>
-              </a:defRPr>
-            </a:pPr>
-            <a:r>
-              <a:t>チーム編成の方針</a:t>
+              <a:defRPr sz="1800" b="0"/>
+            </a:pPr>
+            <a:r>
+              <a:t>経営理念・役割行動・360度評価</a:t>
             </a:r>
           </a:p>
         </p:txBody>
@@ -6769,11 +6714,10 @@
                 <a:solidFill>
                   <a:srgbClr val="666666"/>
                 </a:solidFill>
-                <a:latin typeface="Yu Gothic"/>
               </a:defRPr>
             </a:pPr>
             <a:r>
-              <a:t>10分</a:t>
+              <a:t>15分</a:t>
             </a:r>
           </a:p>
         </p:txBody>
@@ -6822,7 +6766,6 @@
                 <a:solidFill>
                   <a:srgbClr val="FFFFFF"/>
                 </a:solidFill>
-                <a:latin typeface="Yu Gothic"/>
               </a:defRPr>
             </a:pPr>
             <a:r>
@@ -6854,15 +6797,10 @@
           <a:lstStyle/>
           <a:p>
             <a:pPr algn="l">
-              <a:defRPr sz="1800" b="0">
-                <a:solidFill>
-                  <a:srgbClr val="333333"/>
-                </a:solidFill>
-                <a:latin typeface="Yu Gothic"/>
-              </a:defRPr>
-            </a:pPr>
-            <a:r>
-              <a:t>参加者のスキル確認</a:t>
+              <a:defRPr sz="1800" b="0"/>
+            </a:pPr>
+            <a:r>
+              <a:t>最終報告の基準・目標共有</a:t>
             </a:r>
           </a:p>
         </p:txBody>
@@ -6894,7 +6832,6 @@
                 <a:solidFill>
                   <a:srgbClr val="666666"/>
                 </a:solidFill>
-                <a:latin typeface="Yu Gothic"/>
               </a:defRPr>
             </a:pPr>
             <a:r>
@@ -6947,7 +6884,6 @@
                 <a:solidFill>
                   <a:srgbClr val="FFFFFF"/>
                 </a:solidFill>
-                <a:latin typeface="Yu Gothic"/>
               </a:defRPr>
             </a:pPr>
             <a:r>
@@ -6979,15 +6915,10 @@
           <a:lstStyle/>
           <a:p>
             <a:pPr algn="l">
-              <a:defRPr sz="1800" b="0">
-                <a:solidFill>
-                  <a:srgbClr val="333333"/>
-                </a:solidFill>
-                <a:latin typeface="Yu Gothic"/>
-              </a:defRPr>
-            </a:pPr>
-            <a:r>
-              <a:t>研修内容の詳細すり合わせ</a:t>
+              <a:defRPr sz="1800" b="0"/>
+            </a:pPr>
+            <a:r>
+              <a:t>日程の最終確定</a:t>
             </a:r>
           </a:p>
         </p:txBody>
@@ -7019,11 +6950,10 @@
                 <a:solidFill>
                   <a:srgbClr val="666666"/>
                 </a:solidFill>
-                <a:latin typeface="Yu Gothic"/>
               </a:defRPr>
             </a:pPr>
             <a:r>
-              <a:t>15分</a:t>
+              <a:t>10分</a:t>
             </a:r>
           </a:p>
         </p:txBody>
@@ -7072,7 +7002,6 @@
                 <a:solidFill>
                   <a:srgbClr val="FFFFFF"/>
                 </a:solidFill>
-                <a:latin typeface="Yu Gothic"/>
               </a:defRPr>
             </a:pPr>
             <a:r>
@@ -7104,15 +7033,10 @@
           <a:lstStyle/>
           <a:p>
             <a:pPr algn="l">
-              <a:defRPr sz="1800" b="0">
-                <a:solidFill>
-                  <a:srgbClr val="333333"/>
-                </a:solidFill>
-                <a:latin typeface="Yu Gothic"/>
-              </a:defRPr>
-            </a:pPr>
-            <a:r>
-              <a:t>課題図書について</a:t>
+              <a:defRPr sz="1800" b="0"/>
+            </a:pPr>
+            <a:r>
+              <a:t>参加メンバー・事務局の確定</a:t>
             </a:r>
           </a:p>
         </p:txBody>
@@ -7144,11 +7068,10 @@
                 <a:solidFill>
                   <a:srgbClr val="666666"/>
                 </a:solidFill>
-                <a:latin typeface="Yu Gothic"/>
               </a:defRPr>
             </a:pPr>
             <a:r>
-              <a:t>10分</a:t>
+              <a:t>15分</a:t>
             </a:r>
           </a:p>
         </p:txBody>
@@ -7161,7 +7084,7 @@
         </p:nvSpPr>
         <p:spPr>
           <a:xfrm>
-            <a:off x="6400800" y="1463040"/>
+            <a:off x="731520" y="4754880"/>
             <a:ext cx="457200" cy="457200"/>
           </a:xfrm>
           <a:prstGeom prst="rect">
@@ -7197,7 +7120,6 @@
                 <a:solidFill>
                   <a:srgbClr val="FFFFFF"/>
                 </a:solidFill>
-                <a:latin typeface="Yu Gothic"/>
               </a:defRPr>
             </a:pPr>
             <a:r>
@@ -7214,7 +7136,7 @@
         </p:nvSpPr>
         <p:spPr>
           <a:xfrm>
-            <a:off x="6995160" y="1508760"/>
+            <a:off x="1325880" y="4800600"/>
             <a:ext cx="3840480" cy="411480"/>
           </a:xfrm>
           <a:prstGeom prst="rect">
@@ -7229,15 +7151,10 @@
           <a:lstStyle/>
           <a:p>
             <a:pPr algn="l">
-              <a:defRPr sz="1800" b="0">
-                <a:solidFill>
-                  <a:srgbClr val="333333"/>
-                </a:solidFill>
-                <a:latin typeface="Yu Gothic"/>
-              </a:defRPr>
-            </a:pPr>
-            <a:r>
-              <a:t>振り返りシートの運用方法</a:t>
+              <a:defRPr sz="1800" b="0"/>
+            </a:pPr>
+            <a:r>
+              <a:t>チーム編成の方針</a:t>
             </a:r>
           </a:p>
         </p:txBody>
@@ -7250,7 +7167,7 @@
         </p:nvSpPr>
         <p:spPr>
           <a:xfrm>
-            <a:off x="10881360" y="1508760"/>
+            <a:off x="5212080" y="4800600"/>
             <a:ext cx="914400" cy="411480"/>
           </a:xfrm>
           <a:prstGeom prst="rect">
@@ -7269,7 +7186,6 @@
                 <a:solidFill>
                   <a:srgbClr val="666666"/>
                 </a:solidFill>
-                <a:latin typeface="Yu Gothic"/>
               </a:defRPr>
             </a:pPr>
             <a:r>
@@ -7286,7 +7202,7 @@
         </p:nvSpPr>
         <p:spPr>
           <a:xfrm>
-            <a:off x="6400800" y="2011680"/>
+            <a:off x="731520" y="5303520"/>
             <a:ext cx="457200" cy="457200"/>
           </a:xfrm>
           <a:prstGeom prst="rect">
@@ -7322,7 +7238,6 @@
                 <a:solidFill>
                   <a:srgbClr val="FFFFFF"/>
                 </a:solidFill>
-                <a:latin typeface="Yu Gothic"/>
               </a:defRPr>
             </a:pPr>
             <a:r>
@@ -7339,7 +7254,7 @@
         </p:nvSpPr>
         <p:spPr>
           <a:xfrm>
-            <a:off x="6995160" y="2057400"/>
+            <a:off x="1325880" y="5349240"/>
             <a:ext cx="3840480" cy="411480"/>
           </a:xfrm>
           <a:prstGeom prst="rect">
@@ -7354,15 +7269,10 @@
           <a:lstStyle/>
           <a:p>
             <a:pPr algn="l">
-              <a:defRPr sz="1800" b="0">
-                <a:solidFill>
-                  <a:srgbClr val="333333"/>
-                </a:solidFill>
-                <a:latin typeface="Yu Gothic"/>
-              </a:defRPr>
-            </a:pPr>
-            <a:r>
-              <a:t>案内書の確認</a:t>
+              <a:defRPr sz="1800" b="0"/>
+            </a:pPr>
+            <a:r>
+              <a:t>参加者のスキル確認</a:t>
             </a:r>
           </a:p>
         </p:txBody>
@@ -7375,7 +7285,7 @@
         </p:nvSpPr>
         <p:spPr>
           <a:xfrm>
-            <a:off x="10881360" y="2057400"/>
+            <a:off x="5212080" y="5349240"/>
             <a:ext cx="914400" cy="411480"/>
           </a:xfrm>
           <a:prstGeom prst="rect">
@@ -7394,11 +7304,10 @@
                 <a:solidFill>
                   <a:srgbClr val="666666"/>
                 </a:solidFill>
-                <a:latin typeface="Yu Gothic"/>
               </a:defRPr>
             </a:pPr>
             <a:r>
-              <a:t>5分</a:t>
+              <a:t>10分</a:t>
             </a:r>
           </a:p>
         </p:txBody>
@@ -7411,7 +7320,7 @@
         </p:nvSpPr>
         <p:spPr>
           <a:xfrm>
-            <a:off x="6400800" y="2560320"/>
+            <a:off x="6400800" y="1463040"/>
             <a:ext cx="457200" cy="457200"/>
           </a:xfrm>
           <a:prstGeom prst="rect">
@@ -7447,7 +7356,6 @@
                 <a:solidFill>
                   <a:srgbClr val="FFFFFF"/>
                 </a:solidFill>
-                <a:latin typeface="Yu Gothic"/>
               </a:defRPr>
             </a:pPr>
             <a:r>
@@ -7464,7 +7372,7 @@
         </p:nvSpPr>
         <p:spPr>
           <a:xfrm>
-            <a:off x="6995160" y="2606040"/>
+            <a:off x="6995160" y="1508760"/>
             <a:ext cx="3840480" cy="411480"/>
           </a:xfrm>
           <a:prstGeom prst="rect">
@@ -7479,15 +7387,10 @@
           <a:lstStyle/>
           <a:p>
             <a:pPr algn="l">
-              <a:defRPr sz="1800" b="0">
-                <a:solidFill>
-                  <a:srgbClr val="333333"/>
-                </a:solidFill>
-                <a:latin typeface="Yu Gothic"/>
-              </a:defRPr>
-            </a:pPr>
-            <a:r>
-              <a:t>合宿について（第11回）</a:t>
+              <a:defRPr sz="1800" b="0"/>
+            </a:pPr>
+            <a:r>
+              <a:t>課題図書について</a:t>
             </a:r>
           </a:p>
         </p:txBody>
@@ -7500,7 +7403,7 @@
         </p:nvSpPr>
         <p:spPr>
           <a:xfrm>
-            <a:off x="10881360" y="2606040"/>
+            <a:off x="10881360" y="1508760"/>
             <a:ext cx="914400" cy="411480"/>
           </a:xfrm>
           <a:prstGeom prst="rect">
@@ -7519,11 +7422,10 @@
                 <a:solidFill>
                   <a:srgbClr val="666666"/>
                 </a:solidFill>
-                <a:latin typeface="Yu Gothic"/>
               </a:defRPr>
             </a:pPr>
             <a:r>
-              <a:t>15分</a:t>
+              <a:t>10分</a:t>
             </a:r>
           </a:p>
         </p:txBody>
@@ -7536,7 +7438,7 @@
         </p:nvSpPr>
         <p:spPr>
           <a:xfrm>
-            <a:off x="6400800" y="3108960"/>
+            <a:off x="6400800" y="2011680"/>
             <a:ext cx="457200" cy="457200"/>
           </a:xfrm>
           <a:prstGeom prst="rect">
@@ -7572,7 +7474,6 @@
                 <a:solidFill>
                   <a:srgbClr val="FFFFFF"/>
                 </a:solidFill>
-                <a:latin typeface="Yu Gothic"/>
               </a:defRPr>
             </a:pPr>
             <a:r>
@@ -7589,7 +7490,7 @@
         </p:nvSpPr>
         <p:spPr>
           <a:xfrm>
-            <a:off x="6995160" y="3154680"/>
+            <a:off x="6995160" y="2057400"/>
             <a:ext cx="3840480" cy="411480"/>
           </a:xfrm>
           <a:prstGeom prst="rect">
@@ -7604,15 +7505,10 @@
           <a:lstStyle/>
           <a:p>
             <a:pPr algn="l">
-              <a:defRPr sz="1800" b="0">
-                <a:solidFill>
-                  <a:srgbClr val="333333"/>
-                </a:solidFill>
-                <a:latin typeface="Yu Gothic"/>
-              </a:defRPr>
-            </a:pPr>
-            <a:r>
-              <a:t>上司向けオリエンテーション</a:t>
+              <a:defRPr sz="1800" b="0"/>
+            </a:pPr>
+            <a:r>
+              <a:t>振り返りシートの運用方法</a:t>
             </a:r>
           </a:p>
         </p:txBody>
@@ -7625,7 +7521,7 @@
         </p:nvSpPr>
         <p:spPr>
           <a:xfrm>
-            <a:off x="10881360" y="3154680"/>
+            <a:off x="10881360" y="2057400"/>
             <a:ext cx="914400" cy="411480"/>
           </a:xfrm>
           <a:prstGeom prst="rect">
@@ -7644,11 +7540,10 @@
                 <a:solidFill>
                   <a:srgbClr val="666666"/>
                 </a:solidFill>
-                <a:latin typeface="Yu Gothic"/>
               </a:defRPr>
             </a:pPr>
             <a:r>
-              <a:t>5分</a:t>
+              <a:t>10分</a:t>
             </a:r>
           </a:p>
         </p:txBody>
@@ -7661,7 +7556,7 @@
         </p:nvSpPr>
         <p:spPr>
           <a:xfrm>
-            <a:off x="6400800" y="3657600"/>
+            <a:off x="6400800" y="2560320"/>
             <a:ext cx="457200" cy="457200"/>
           </a:xfrm>
           <a:prstGeom prst="rect">
@@ -7697,7 +7592,6 @@
                 <a:solidFill>
                   <a:srgbClr val="FFFFFF"/>
                 </a:solidFill>
-                <a:latin typeface="Yu Gothic"/>
               </a:defRPr>
             </a:pPr>
             <a:r>
@@ -7714,7 +7608,7 @@
         </p:nvSpPr>
         <p:spPr>
           <a:xfrm>
-            <a:off x="6995160" y="3703320"/>
+            <a:off x="6995160" y="2606040"/>
             <a:ext cx="3840480" cy="411480"/>
           </a:xfrm>
           <a:prstGeom prst="rect">
@@ -7729,15 +7623,10 @@
           <a:lstStyle/>
           <a:p>
             <a:pPr algn="l">
-              <a:defRPr sz="1800" b="0">
-                <a:solidFill>
-                  <a:srgbClr val="333333"/>
-                </a:solidFill>
-                <a:latin typeface="Yu Gothic"/>
-              </a:defRPr>
-            </a:pPr>
-            <a:r>
-              <a:t>今後のスケジュール確認</a:t>
+              <a:defRPr sz="1800" b="0"/>
+            </a:pPr>
+            <a:r>
+              <a:t>案内書の確認</a:t>
             </a:r>
           </a:p>
         </p:txBody>
@@ -7750,7 +7639,7 @@
         </p:nvSpPr>
         <p:spPr>
           <a:xfrm>
-            <a:off x="10881360" y="3703320"/>
+            <a:off x="10881360" y="2606040"/>
             <a:ext cx="914400" cy="411480"/>
           </a:xfrm>
           <a:prstGeom prst="rect">
@@ -7769,7 +7658,6 @@
                 <a:solidFill>
                   <a:srgbClr val="666666"/>
                 </a:solidFill>
-                <a:latin typeface="Yu Gothic"/>
               </a:defRPr>
             </a:pPr>
             <a:r>
@@ -7786,7 +7674,7 @@
         </p:nvSpPr>
         <p:spPr>
           <a:xfrm>
-            <a:off x="6400800" y="4206240"/>
+            <a:off x="6400800" y="3108960"/>
             <a:ext cx="457200" cy="457200"/>
           </a:xfrm>
           <a:prstGeom prst="rect">
@@ -7822,7 +7710,6 @@
                 <a:solidFill>
                   <a:srgbClr val="FFFFFF"/>
                 </a:solidFill>
-                <a:latin typeface="Yu Gothic"/>
               </a:defRPr>
             </a:pPr>
             <a:r>
@@ -7839,7 +7726,7 @@
         </p:nvSpPr>
         <p:spPr>
           <a:xfrm>
-            <a:off x="6995160" y="4251960"/>
+            <a:off x="6995160" y="3154680"/>
             <a:ext cx="3840480" cy="411480"/>
           </a:xfrm>
           <a:prstGeom prst="rect">
@@ -7854,15 +7741,10 @@
           <a:lstStyle/>
           <a:p>
             <a:pPr algn="l">
-              <a:defRPr sz="1800" b="0">
-                <a:solidFill>
-                  <a:srgbClr val="333333"/>
-                </a:solidFill>
-                <a:latin typeface="Yu Gothic"/>
-              </a:defRPr>
-            </a:pPr>
-            <a:r>
-              <a:t>その他・質疑応答</a:t>
+              <a:defRPr sz="1800" b="0"/>
+            </a:pPr>
+            <a:r>
+              <a:t>合宿・講師移動について</a:t>
             </a:r>
           </a:p>
         </p:txBody>
@@ -7875,7 +7757,7 @@
         </p:nvSpPr>
         <p:spPr>
           <a:xfrm>
-            <a:off x="10881360" y="4251960"/>
+            <a:off x="10881360" y="3154680"/>
             <a:ext cx="914400" cy="411480"/>
           </a:xfrm>
           <a:prstGeom prst="rect">
@@ -7894,10 +7776,127 @@
                 <a:solidFill>
                   <a:srgbClr val="666666"/>
                 </a:solidFill>
-                <a:latin typeface="Yu Gothic"/>
               </a:defRPr>
             </a:pPr>
             <a:r>
+              <a:t>15分</a:t>
+            </a:r>
+          </a:p>
+        </p:txBody>
+      </p:sp>
+      <p:sp>
+        <p:nvSpPr>
+          <p:cNvPr id="41" name="Rectangle 40"/>
+          <p:cNvSpPr/>
+          <p:nvPr/>
+        </p:nvSpPr>
+        <p:spPr>
+          <a:xfrm>
+            <a:off x="6400800" y="3657600"/>
+            <a:ext cx="457200" cy="457200"/>
+          </a:xfrm>
+          <a:prstGeom prst="rect">
+            <a:avLst/>
+          </a:prstGeom>
+          <a:solidFill>
+            <a:srgbClr val="2E86AB"/>
+          </a:solidFill>
+          <a:ln>
+            <a:noFill/>
+          </a:ln>
+        </p:spPr>
+        <p:style>
+          <a:lnRef idx="1">
+            <a:schemeClr val="accent1"/>
+          </a:lnRef>
+          <a:fillRef idx="3">
+            <a:schemeClr val="accent1"/>
+          </a:fillRef>
+          <a:effectRef idx="2">
+            <a:schemeClr val="accent1"/>
+          </a:effectRef>
+          <a:fontRef idx="minor">
+            <a:schemeClr val="lt1"/>
+          </a:fontRef>
+        </p:style>
+        <p:txBody>
+          <a:bodyPr rtlCol="0" anchor="ctr"/>
+          <a:lstStyle/>
+          <a:p>
+            <a:pPr algn="ctr">
+              <a:defRPr sz="1600" b="1">
+                <a:solidFill>
+                  <a:srgbClr val="FFFFFF"/>
+                </a:solidFill>
+              </a:defRPr>
+            </a:pPr>
+            <a:r>
+              <a:t>13</a:t>
+            </a:r>
+          </a:p>
+        </p:txBody>
+      </p:sp>
+      <p:sp>
+        <p:nvSpPr>
+          <p:cNvPr id="42" name="TextBox 41"/>
+          <p:cNvSpPr txBox="1"/>
+          <p:nvPr/>
+        </p:nvSpPr>
+        <p:spPr>
+          <a:xfrm>
+            <a:off x="6995160" y="3703320"/>
+            <a:ext cx="3840480" cy="411480"/>
+          </a:xfrm>
+          <a:prstGeom prst="rect">
+            <a:avLst/>
+          </a:prstGeom>
+          <a:noFill/>
+        </p:spPr>
+        <p:txBody>
+          <a:bodyPr wrap="square">
+            <a:spAutoFit/>
+          </a:bodyPr>
+          <a:lstStyle/>
+          <a:p>
+            <a:pPr algn="l">
+              <a:defRPr sz="1800" b="0"/>
+            </a:pPr>
+            <a:r>
+              <a:t>上司向けオリエンテーション</a:t>
+            </a:r>
+          </a:p>
+        </p:txBody>
+      </p:sp>
+      <p:sp>
+        <p:nvSpPr>
+          <p:cNvPr id="43" name="TextBox 42"/>
+          <p:cNvSpPr txBox="1"/>
+          <p:nvPr/>
+        </p:nvSpPr>
+        <p:spPr>
+          <a:xfrm>
+            <a:off x="10881360" y="3703320"/>
+            <a:ext cx="914400" cy="411480"/>
+          </a:xfrm>
+          <a:prstGeom prst="rect">
+            <a:avLst/>
+          </a:prstGeom>
+          <a:noFill/>
+        </p:spPr>
+        <p:txBody>
+          <a:bodyPr wrap="square">
+            <a:spAutoFit/>
+          </a:bodyPr>
+          <a:lstStyle/>
+          <a:p>
+            <a:pPr algn="r">
+              <a:defRPr sz="1400" b="0">
+                <a:solidFill>
+                  <a:srgbClr val="666666"/>
+                </a:solidFill>
+              </a:defRPr>
+            </a:pPr>
+            <a:r>
               <a:t>5分</a:t>
             </a:r>
           </a:p>
@@ -7905,7 +7904,243 @@
       </p:sp>
       <p:sp>
         <p:nvSpPr>
-          <p:cNvPr id="41" name="TextBox 40"/>
+          <p:cNvPr id="44" name="Rectangle 43"/>
+          <p:cNvSpPr/>
+          <p:nvPr/>
+        </p:nvSpPr>
+        <p:spPr>
+          <a:xfrm>
+            <a:off x="6400800" y="4206240"/>
+            <a:ext cx="457200" cy="457200"/>
+          </a:xfrm>
+          <a:prstGeom prst="rect">
+            <a:avLst/>
+          </a:prstGeom>
+          <a:solidFill>
+            <a:srgbClr val="2E86AB"/>
+          </a:solidFill>
+          <a:ln>
+            <a:noFill/>
+          </a:ln>
+        </p:spPr>
+        <p:style>
+          <a:lnRef idx="1">
+            <a:schemeClr val="accent1"/>
+          </a:lnRef>
+          <a:fillRef idx="3">
+            <a:schemeClr val="accent1"/>
+          </a:fillRef>
+          <a:effectRef idx="2">
+            <a:schemeClr val="accent1"/>
+          </a:effectRef>
+          <a:fontRef idx="minor">
+            <a:schemeClr val="lt1"/>
+          </a:fontRef>
+        </p:style>
+        <p:txBody>
+          <a:bodyPr rtlCol="0" anchor="ctr"/>
+          <a:lstStyle/>
+          <a:p>
+            <a:pPr algn="ctr">
+              <a:defRPr sz="1600" b="1">
+                <a:solidFill>
+                  <a:srgbClr val="FFFFFF"/>
+                </a:solidFill>
+              </a:defRPr>
+            </a:pPr>
+            <a:r>
+              <a:t>14</a:t>
+            </a:r>
+          </a:p>
+        </p:txBody>
+      </p:sp>
+      <p:sp>
+        <p:nvSpPr>
+          <p:cNvPr id="45" name="TextBox 44"/>
+          <p:cNvSpPr txBox="1"/>
+          <p:nvPr/>
+        </p:nvSpPr>
+        <p:spPr>
+          <a:xfrm>
+            <a:off x="6995160" y="4251960"/>
+            <a:ext cx="3840480" cy="411480"/>
+          </a:xfrm>
+          <a:prstGeom prst="rect">
+            <a:avLst/>
+          </a:prstGeom>
+          <a:noFill/>
+        </p:spPr>
+        <p:txBody>
+          <a:bodyPr wrap="square">
+            <a:spAutoFit/>
+          </a:bodyPr>
+          <a:lstStyle/>
+          <a:p>
+            <a:pPr algn="l">
+              <a:defRPr sz="1800" b="0"/>
+            </a:pPr>
+            <a:r>
+              <a:t>今後のスケジュール確認</a:t>
+            </a:r>
+          </a:p>
+        </p:txBody>
+      </p:sp>
+      <p:sp>
+        <p:nvSpPr>
+          <p:cNvPr id="46" name="TextBox 45"/>
+          <p:cNvSpPr txBox="1"/>
+          <p:nvPr/>
+        </p:nvSpPr>
+        <p:spPr>
+          <a:xfrm>
+            <a:off x="10881360" y="4251960"/>
+            <a:ext cx="914400" cy="411480"/>
+          </a:xfrm>
+          <a:prstGeom prst="rect">
+            <a:avLst/>
+          </a:prstGeom>
+          <a:noFill/>
+        </p:spPr>
+        <p:txBody>
+          <a:bodyPr wrap="square">
+            <a:spAutoFit/>
+          </a:bodyPr>
+          <a:lstStyle/>
+          <a:p>
+            <a:pPr algn="r">
+              <a:defRPr sz="1400" b="0">
+                <a:solidFill>
+                  <a:srgbClr val="666666"/>
+                </a:solidFill>
+              </a:defRPr>
+            </a:pPr>
+            <a:r>
+              <a:t>5分</a:t>
+            </a:r>
+          </a:p>
+        </p:txBody>
+      </p:sp>
+      <p:sp>
+        <p:nvSpPr>
+          <p:cNvPr id="47" name="Rectangle 46"/>
+          <p:cNvSpPr/>
+          <p:nvPr/>
+        </p:nvSpPr>
+        <p:spPr>
+          <a:xfrm>
+            <a:off x="6400800" y="4754880"/>
+            <a:ext cx="457200" cy="457200"/>
+          </a:xfrm>
+          <a:prstGeom prst="rect">
+            <a:avLst/>
+          </a:prstGeom>
+          <a:solidFill>
+            <a:srgbClr val="2E86AB"/>
+          </a:solidFill>
+          <a:ln>
+            <a:noFill/>
+          </a:ln>
+        </p:spPr>
+        <p:style>
+          <a:lnRef idx="1">
+            <a:schemeClr val="accent1"/>
+          </a:lnRef>
+          <a:fillRef idx="3">
+            <a:schemeClr val="accent1"/>
+          </a:fillRef>
+          <a:effectRef idx="2">
+            <a:schemeClr val="accent1"/>
+          </a:effectRef>
+          <a:fontRef idx="minor">
+            <a:schemeClr val="lt1"/>
+          </a:fontRef>
+        </p:style>
+        <p:txBody>
+          <a:bodyPr rtlCol="0" anchor="ctr"/>
+          <a:lstStyle/>
+          <a:p>
+            <a:pPr algn="ctr">
+              <a:defRPr sz="1600" b="1">
+                <a:solidFill>
+                  <a:srgbClr val="FFFFFF"/>
+                </a:solidFill>
+              </a:defRPr>
+            </a:pPr>
+            <a:r>
+              <a:t>15</a:t>
+            </a:r>
+          </a:p>
+        </p:txBody>
+      </p:sp>
+      <p:sp>
+        <p:nvSpPr>
+          <p:cNvPr id="48" name="TextBox 47"/>
+          <p:cNvSpPr txBox="1"/>
+          <p:nvPr/>
+        </p:nvSpPr>
+        <p:spPr>
+          <a:xfrm>
+            <a:off x="6995160" y="4800600"/>
+            <a:ext cx="3840480" cy="411480"/>
+          </a:xfrm>
+          <a:prstGeom prst="rect">
+            <a:avLst/>
+          </a:prstGeom>
+          <a:noFill/>
+        </p:spPr>
+        <p:txBody>
+          <a:bodyPr wrap="square">
+            <a:spAutoFit/>
+          </a:bodyPr>
+          <a:lstStyle/>
+          <a:p>
+            <a:pPr algn="l">
+              <a:defRPr sz="1800" b="0"/>
+            </a:pPr>
+            <a:r>
+              <a:t>その他・質疑応答</a:t>
+            </a:r>
+          </a:p>
+        </p:txBody>
+      </p:sp>
+      <p:sp>
+        <p:nvSpPr>
+          <p:cNvPr id="49" name="TextBox 48"/>
+          <p:cNvSpPr txBox="1"/>
+          <p:nvPr/>
+        </p:nvSpPr>
+        <p:spPr>
+          <a:xfrm>
+            <a:off x="10881360" y="4800600"/>
+            <a:ext cx="914400" cy="411480"/>
+          </a:xfrm>
+          <a:prstGeom prst="rect">
+            <a:avLst/>
+          </a:prstGeom>
+          <a:noFill/>
+        </p:spPr>
+        <p:txBody>
+          <a:bodyPr wrap="square">
+            <a:spAutoFit/>
+          </a:bodyPr>
+          <a:lstStyle/>
+          <a:p>
+            <a:pPr algn="r">
+              <a:defRPr sz="1400" b="0">
+                <a:solidFill>
+                  <a:srgbClr val="666666"/>
+                </a:solidFill>
+              </a:defRPr>
+            </a:pPr>
+            <a:r>
+              <a:t>5分</a:t>
+            </a:r>
+          </a:p>
+        </p:txBody>
+      </p:sp>
+      <p:sp>
+        <p:nvSpPr>
+          <p:cNvPr id="50" name="TextBox 49"/>
           <p:cNvSpPr txBox="1"/>
           <p:nvPr/>
         </p:nvSpPr>
@@ -7926,15 +8161,10 @@
           <a:lstStyle/>
           <a:p>
             <a:pPr algn="r">
-              <a:defRPr sz="1600" b="1">
-                <a:solidFill>
-                  <a:srgbClr val="2E86AB"/>
-                </a:solidFill>
-                <a:latin typeface="Yu Gothic"/>
-              </a:defRPr>
-            </a:pPr>
-            <a:r>
-              <a:t>所要時間目安：約2時間</a:t>
+              <a:defRPr sz="1600" b="1"/>
+            </a:pPr>
+            <a:r>
+              <a:t>所要時間目安：約2時間40分</a:t>
             </a:r>
           </a:p>
         </p:txBody>
@@ -7950,14 +8180,6 @@
 <file path=ppt/slides/slide3.xml><?xml version="1.0" encoding="utf-8"?>
 <p:sld xmlns:a="http://schemas.openxmlformats.org/drawingml/2006/main" xmlns:p="http://schemas.openxmlformats.org/presentationml/2006/main" xmlns:r="http://schemas.openxmlformats.org/officeDocument/2006/relationships">
   <p:cSld>
-    <p:bg>
-      <p:bgPr>
-        <a:solidFill>
-          <a:srgbClr val="FFFFFF"/>
-        </a:solidFill>
-        <a:effectLst/>
-      </p:bgPr>
-    </p:bg>
     <p:spTree>
       <p:nvGrpSpPr>
         <p:cNvPr id="1" name=""/>
@@ -8044,18 +8266,14 @@
           </a:fontRef>
         </p:style>
         <p:txBody>
-          <a:bodyPr rtlCol="0" anchor="ctr" wrap="none"/>
+          <a:bodyPr rtlCol="0" anchor="ctr"/>
           <a:lstStyle/>
           <a:p>
             <a:pPr algn="ctr">
-              <a:spcBef>
-                <a:spcPts val="600"/>
-              </a:spcBef>
               <a:defRPr sz="3600" b="1">
                 <a:solidFill>
                   <a:srgbClr val="FFFFFF"/>
                 </a:solidFill>
-                <a:latin typeface="Yu Gothic"/>
               </a:defRPr>
             </a:pPr>
             <a:r>
@@ -8087,15 +8305,10 @@
           <a:lstStyle/>
           <a:p>
             <a:pPr algn="l">
-              <a:defRPr sz="3000" b="1">
-                <a:solidFill>
-                  <a:srgbClr val="1B2A4A"/>
-                </a:solidFill>
-                <a:latin typeface="Yu Gothic"/>
-              </a:defRPr>
-            </a:pPr>
-            <a:r>
-              <a:t>日程の最終確定</a:t>
+              <a:defRPr sz="3000" b="1"/>
+            </a:pPr>
+            <a:r>
+              <a:t>取り組みの温度感確認</a:t>
             </a:r>
           </a:p>
         </p:txBody>
@@ -8166,15 +8379,10 @@
           <a:lstStyle/>
           <a:p>
             <a:pPr algn="l">
-              <a:defRPr sz="1800" b="0">
-                <a:solidFill>
-                  <a:srgbClr val="333333"/>
-                </a:solidFill>
-                <a:latin typeface="Yu Gothic"/>
-              </a:defRPr>
-            </a:pPr>
-            <a:r>
-              <a:t>●  先方から回答いただいた確定日程の最終確認</a:t>
+              <a:defRPr sz="1800" b="0"/>
+            </a:pPr>
+            <a:r>
+              <a:t>●  参加する方々（塾生・コーディネーター）の反応・期待感はどうか</a:t>
             </a:r>
           </a:p>
         </p:txBody>
@@ -8202,15 +8410,10 @@
           <a:lstStyle/>
           <a:p>
             <a:pPr algn="l">
-              <a:defRPr sz="1800" b="0">
-                <a:solidFill>
-                  <a:srgbClr val="333333"/>
-                </a:solidFill>
-                <a:latin typeface="Yu Gothic"/>
-              </a:defRPr>
-            </a:pPr>
-            <a:r>
-              <a:t>●  各回の曜日・間隔に無理がないか確認（約1ヶ月間隔が目安）</a:t>
+              <a:defRPr sz="1800" b="0"/>
+            </a:pPr>
+            <a:r>
+              <a:t>●  社長をはじめとした幹部の皆様方の、本取り組みに対する熱量</a:t>
             </a:r>
           </a:p>
         </p:txBody>
@@ -8238,15 +8441,76 @@
           <a:lstStyle/>
           <a:p>
             <a:pPr algn="l">
-              <a:defRPr sz="1800" b="0">
+              <a:defRPr sz="1800" b="0"/>
+            </a:pPr>
+            <a:r>
+              <a:t>●  1年目の方針確認</a:t>
+            </a:r>
+          </a:p>
+        </p:txBody>
+      </p:sp>
+      <p:sp>
+        <p:nvSpPr>
+          <p:cNvPr id="9" name="TextBox 8"/>
+          <p:cNvSpPr txBox="1"/>
+          <p:nvPr/>
+        </p:nvSpPr>
+        <p:spPr>
+          <a:xfrm>
+            <a:off x="1645920" y="3108960"/>
+            <a:ext cx="9509760" cy="365760"/>
+          </a:xfrm>
+          <a:prstGeom prst="rect">
+            <a:avLst/>
+          </a:prstGeom>
+          <a:noFill/>
+        </p:spPr>
+        <p:txBody>
+          <a:bodyPr wrap="square">
+            <a:spAutoFit/>
+          </a:bodyPr>
+          <a:lstStyle/>
+          <a:p>
+            <a:pPr algn="l">
+              <a:defRPr sz="1500" b="0">
                 <a:solidFill>
-                  <a:srgbClr val="333333"/>
+                  <a:srgbClr val="666666"/>
                 </a:solidFill>
-                <a:latin typeface="Yu Gothic"/>
               </a:defRPr>
             </a:pPr>
             <a:r>
-              <a:t>●  各回の会場（社内会議室 or 外部施設）の確保状況</a:t>
+              <a:t>→  がっつり深くやるのか、まずは薄く広くやるのか</a:t>
+            </a:r>
+          </a:p>
+        </p:txBody>
+      </p:sp>
+      <p:sp>
+        <p:nvSpPr>
+          <p:cNvPr id="10" name="TextBox 9"/>
+          <p:cNvSpPr txBox="1"/>
+          <p:nvPr/>
+        </p:nvSpPr>
+        <p:spPr>
+          <a:xfrm>
+            <a:off x="1097280" y="3474720"/>
+            <a:ext cx="10058400" cy="411480"/>
+          </a:xfrm>
+          <a:prstGeom prst="rect">
+            <a:avLst/>
+          </a:prstGeom>
+          <a:noFill/>
+        </p:spPr>
+        <p:txBody>
+          <a:bodyPr wrap="square">
+            <a:spAutoFit/>
+          </a:bodyPr>
+          <a:lstStyle/>
+          <a:p>
+            <a:pPr algn="l">
+              <a:defRPr sz="1800" b="0"/>
+            </a:pPr>
+            <a:r>
+              <a:t>●  上記を踏まえた研修全体のトーン設定</a:t>
             </a:r>
           </a:p>
         </p:txBody>
@@ -8262,14 +8526,6 @@
 <file path=ppt/slides/slide4.xml><?xml version="1.0" encoding="utf-8"?>
 <p:sld xmlns:a="http://schemas.openxmlformats.org/drawingml/2006/main" xmlns:p="http://schemas.openxmlformats.org/presentationml/2006/main" xmlns:r="http://schemas.openxmlformats.org/officeDocument/2006/relationships">
   <p:cSld>
-    <p:bg>
-      <p:bgPr>
-        <a:solidFill>
-          <a:srgbClr val="FFFFFF"/>
-        </a:solidFill>
-        <a:effectLst/>
-      </p:bgPr>
-    </p:bg>
     <p:spTree>
       <p:nvGrpSpPr>
         <p:cNvPr id="1" name=""/>
@@ -8356,18 +8612,14 @@
           </a:fontRef>
         </p:style>
         <p:txBody>
-          <a:bodyPr rtlCol="0" anchor="ctr" wrap="none"/>
+          <a:bodyPr rtlCol="0" anchor="ctr"/>
           <a:lstStyle/>
           <a:p>
             <a:pPr algn="ctr">
-              <a:spcBef>
-                <a:spcPts val="600"/>
-              </a:spcBef>
               <a:defRPr sz="3600" b="1">
                 <a:solidFill>
                   <a:srgbClr val="FFFFFF"/>
                 </a:solidFill>
-                <a:latin typeface="Yu Gothic"/>
               </a:defRPr>
             </a:pPr>
             <a:r>
@@ -8399,15 +8651,10 @@
           <a:lstStyle/>
           <a:p>
             <a:pPr algn="l">
-              <a:defRPr sz="3000" b="1">
-                <a:solidFill>
-                  <a:srgbClr val="1B2A4A"/>
-                </a:solidFill>
-                <a:latin typeface="Yu Gothic"/>
-              </a:defRPr>
-            </a:pPr>
-            <a:r>
-              <a:t>参加メンバーの確定</a:t>
+              <a:defRPr sz="3000" b="1"/>
+            </a:pPr>
+            <a:r>
+              <a:t>コンテンツの方向性確定</a:t>
             </a:r>
           </a:p>
         </p:txBody>
@@ -8478,15 +8725,10 @@
           <a:lstStyle/>
           <a:p>
             <a:pPr algn="l">
-              <a:defRPr sz="1800" b="0">
-                <a:solidFill>
-                  <a:srgbClr val="333333"/>
-                </a:solidFill>
-                <a:latin typeface="Yu Gothic"/>
-              </a:defRPr>
-            </a:pPr>
-            <a:r>
-              <a:t>●  塾長（1名）の選任</a:t>
+              <a:defRPr sz="1800" b="0"/>
+            </a:pPr>
+            <a:r>
+              <a:t>●  全12回カリキュラムの概要説明・認識合わせ</a:t>
             </a:r>
           </a:p>
         </p:txBody>
@@ -8499,7 +8741,38 @@
         </p:nvSpPr>
         <p:spPr>
           <a:xfrm>
-            <a:off x="1645920" y="2194560"/>
+            <a:off x="1097280" y="2194560"/>
+            <a:ext cx="10058400" cy="411480"/>
+          </a:xfrm>
+          <a:prstGeom prst="rect">
+            <a:avLst/>
+          </a:prstGeom>
+          <a:noFill/>
+        </p:spPr>
+        <p:txBody>
+          <a:bodyPr wrap="square">
+            <a:spAutoFit/>
+          </a:bodyPr>
+          <a:lstStyle/>
+          <a:p>
+            <a:pPr algn="l">
+              <a:defRPr sz="1800" b="0"/>
+            </a:pPr>
+            <a:r>
+              <a:t>●  現状の流れに沿うか、より経営寄りの内容にシフトするか</a:t>
+            </a:r>
+          </a:p>
+        </p:txBody>
+      </p:sp>
+      <p:sp>
+        <p:nvSpPr>
+          <p:cNvPr id="8" name="TextBox 7"/>
+          <p:cNvSpPr txBox="1"/>
+          <p:nvPr/>
+        </p:nvSpPr>
+        <p:spPr>
+          <a:xfrm>
+            <a:off x="1645920" y="2651760"/>
             <a:ext cx="9509760" cy="365760"/>
           </a:xfrm>
           <a:prstGeom prst="rect">
@@ -8518,47 +8791,10 @@
                 <a:solidFill>
                   <a:srgbClr val="666666"/>
                 </a:solidFill>
-                <a:latin typeface="Yu Gothic"/>
               </a:defRPr>
             </a:pPr>
             <a:r>
-              <a:t>→  経営層・役員クラス</a:t>
-            </a:r>
-          </a:p>
-        </p:txBody>
-      </p:sp>
-      <p:sp>
-        <p:nvSpPr>
-          <p:cNvPr id="8" name="TextBox 7"/>
-          <p:cNvSpPr txBox="1"/>
-          <p:nvPr/>
-        </p:nvSpPr>
-        <p:spPr>
-          <a:xfrm>
-            <a:off x="1645920" y="2560320"/>
-            <a:ext cx="9509760" cy="365760"/>
-          </a:xfrm>
-          <a:prstGeom prst="rect">
-            <a:avLst/>
-          </a:prstGeom>
-          <a:noFill/>
-        </p:spPr>
-        <p:txBody>
-          <a:bodyPr wrap="square">
-            <a:spAutoFit/>
-          </a:bodyPr>
-          <a:lstStyle/>
-          <a:p>
-            <a:pPr algn="l">
-              <a:defRPr sz="1500" b="0">
-                <a:solidFill>
-                  <a:srgbClr val="666666"/>
-                </a:solidFill>
-                <a:latin typeface="Yu Gothic"/>
-              </a:defRPr>
-            </a:pPr>
-            <a:r>
-              <a:t>→  参加可能な回にオブザーブ出席</a:t>
+              <a:t>→  経営寄りにする場合：会社の財務（BS/PL等）を研修コンテンツに組み込む</a:t>
             </a:r>
           </a:p>
         </p:txBody>
@@ -8571,7 +8807,7 @@
         </p:nvSpPr>
         <p:spPr>
           <a:xfrm>
-            <a:off x="1097280" y="2926080"/>
+            <a:off x="1097280" y="3017520"/>
             <a:ext cx="10058400" cy="411480"/>
           </a:xfrm>
           <a:prstGeom prst="rect">
@@ -8586,15 +8822,10 @@
           <a:lstStyle/>
           <a:p>
             <a:pPr algn="l">
-              <a:defRPr sz="1800" b="0">
-                <a:solidFill>
-                  <a:srgbClr val="333333"/>
-                </a:solidFill>
-                <a:latin typeface="Yu Gothic"/>
-              </a:defRPr>
-            </a:pPr>
-            <a:r>
-              <a:t>●  コーディネーター（4名）の人選確認</a:t>
+              <a:defRPr sz="1800" b="0"/>
+            </a:pPr>
+            <a:r>
+              <a:t>●  先方が特に重視したいテーマ・期待する成果</a:t>
             </a:r>
           </a:p>
         </p:txBody>
@@ -8607,30 +8838,25 @@
         </p:nvSpPr>
         <p:spPr>
           <a:xfrm>
-            <a:off x="1645920" y="3383280"/>
-            <a:ext cx="9509760" cy="365760"/>
-          </a:xfrm>
-          <a:prstGeom prst="rect">
-            <a:avLst/>
-          </a:prstGeom>
-          <a:noFill/>
-        </p:spPr>
-        <p:txBody>
-          <a:bodyPr wrap="square">
-            <a:spAutoFit/>
-          </a:bodyPr>
-          <a:lstStyle/>
-          <a:p>
-            <a:pPr algn="l">
-              <a:defRPr sz="1500" b="0">
-                <a:solidFill>
-                  <a:srgbClr val="666666"/>
-                </a:solidFill>
-                <a:latin typeface="Yu Gothic"/>
-              </a:defRPr>
-            </a:pPr>
-            <a:r>
-              <a:t>→  部長クラス</a:t>
+            <a:off x="1097280" y="3474720"/>
+            <a:ext cx="10058400" cy="411480"/>
+          </a:xfrm>
+          <a:prstGeom prst="rect">
+            <a:avLst/>
+          </a:prstGeom>
+          <a:noFill/>
+        </p:spPr>
+        <p:txBody>
+          <a:bodyPr wrap="square">
+            <a:spAutoFit/>
+          </a:bodyPr>
+          <a:lstStyle/>
+          <a:p>
+            <a:pPr algn="l">
+              <a:defRPr sz="1800" b="0"/>
+            </a:pPr>
+            <a:r>
+              <a:t>●  各回の内容に対する要望・カスタマイズの有無</a:t>
             </a:r>
           </a:p>
         </p:txBody>
@@ -8643,43 +8869,7 @@
         </p:nvSpPr>
         <p:spPr>
           <a:xfrm>
-            <a:off x="1645920" y="3749040"/>
-            <a:ext cx="9509760" cy="365760"/>
-          </a:xfrm>
-          <a:prstGeom prst="rect">
-            <a:avLst/>
-          </a:prstGeom>
-          <a:noFill/>
-        </p:spPr>
-        <p:txBody>
-          <a:bodyPr wrap="square">
-            <a:spAutoFit/>
-          </a:bodyPr>
-          <a:lstStyle/>
-          <a:p>
-            <a:pPr algn="l">
-              <a:defRPr sz="1500" b="0">
-                <a:solidFill>
-                  <a:srgbClr val="666666"/>
-                </a:solidFill>
-                <a:latin typeface="Yu Gothic"/>
-              </a:defRPr>
-            </a:pPr>
-            <a:r>
-              <a:t>→  各チームのリーダー役として塾生3名を担当</a:t>
-            </a:r>
-          </a:p>
-        </p:txBody>
-      </p:sp>
-      <p:sp>
-        <p:nvSpPr>
-          <p:cNvPr id="12" name="TextBox 11"/>
-          <p:cNvSpPr txBox="1"/>
-          <p:nvPr/>
-        </p:nvSpPr>
-        <p:spPr>
-          <a:xfrm>
-            <a:off x="1097280" y="4114800"/>
+            <a:off x="1097280" y="3931920"/>
             <a:ext cx="10058400" cy="411480"/>
           </a:xfrm>
           <a:prstGeom prst="rect">
@@ -8694,123 +8884,10 @@
           <a:lstStyle/>
           <a:p>
             <a:pPr algn="l">
-              <a:defRPr sz="1800" b="0">
-                <a:solidFill>
-                  <a:srgbClr val="333333"/>
-                </a:solidFill>
-                <a:latin typeface="Yu Gothic"/>
-              </a:defRPr>
-            </a:pPr>
-            <a:r>
-              <a:t>●  塾生（12名）の人選確認</a:t>
-            </a:r>
-          </a:p>
-        </p:txBody>
-      </p:sp>
-      <p:sp>
-        <p:nvSpPr>
-          <p:cNvPr id="13" name="TextBox 12"/>
-          <p:cNvSpPr txBox="1"/>
-          <p:nvPr/>
-        </p:nvSpPr>
-        <p:spPr>
-          <a:xfrm>
-            <a:off x="1645920" y="4572000"/>
-            <a:ext cx="9509760" cy="365760"/>
-          </a:xfrm>
-          <a:prstGeom prst="rect">
-            <a:avLst/>
-          </a:prstGeom>
-          <a:noFill/>
-        </p:spPr>
-        <p:txBody>
-          <a:bodyPr wrap="square">
-            <a:spAutoFit/>
-          </a:bodyPr>
-          <a:lstStyle/>
-          <a:p>
-            <a:pPr algn="l">
-              <a:defRPr sz="1500" b="0">
-                <a:solidFill>
-                  <a:srgbClr val="666666"/>
-                </a:solidFill>
-                <a:latin typeface="Yu Gothic"/>
-              </a:defRPr>
-            </a:pPr>
-            <a:r>
-              <a:t>→  課長・次長クラス（将来の部長候補）</a:t>
-            </a:r>
-          </a:p>
-        </p:txBody>
-      </p:sp>
-      <p:sp>
-        <p:nvSpPr>
-          <p:cNvPr id="14" name="TextBox 13"/>
-          <p:cNvSpPr txBox="1"/>
-          <p:nvPr/>
-        </p:nvSpPr>
-        <p:spPr>
-          <a:xfrm>
-            <a:off x="1097280" y="4937760"/>
-            <a:ext cx="10058400" cy="411480"/>
-          </a:xfrm>
-          <a:prstGeom prst="rect">
-            <a:avLst/>
-          </a:prstGeom>
-          <a:noFill/>
-        </p:spPr>
-        <p:txBody>
-          <a:bodyPr wrap="square">
-            <a:spAutoFit/>
-          </a:bodyPr>
-          <a:lstStyle/>
-          <a:p>
-            <a:pPr algn="l">
-              <a:defRPr sz="1800" b="0">
-                <a:solidFill>
-                  <a:srgbClr val="333333"/>
-                </a:solidFill>
-                <a:latin typeface="Yu Gothic"/>
-              </a:defRPr>
-            </a:pPr>
-            <a:r>
-              <a:t>●  メンバー構成表の記入・返送の期日確認</a:t>
-            </a:r>
-          </a:p>
-        </p:txBody>
-      </p:sp>
-      <p:sp>
-        <p:nvSpPr>
-          <p:cNvPr id="15" name="TextBox 14"/>
-          <p:cNvSpPr txBox="1"/>
-          <p:nvPr/>
-        </p:nvSpPr>
-        <p:spPr>
-          <a:xfrm>
-            <a:off x="1097280" y="5394960"/>
-            <a:ext cx="10058400" cy="411480"/>
-          </a:xfrm>
-          <a:prstGeom prst="rect">
-            <a:avLst/>
-          </a:prstGeom>
-          <a:noFill/>
-        </p:spPr>
-        <p:txBody>
-          <a:bodyPr wrap="square">
-            <a:spAutoFit/>
-          </a:bodyPr>
-          <a:lstStyle/>
-          <a:p>
-            <a:pPr algn="l">
-              <a:defRPr sz="1800" b="0">
-                <a:solidFill>
-                  <a:srgbClr val="333333"/>
-                </a:solidFill>
-                <a:latin typeface="Yu Gothic"/>
-              </a:defRPr>
-            </a:pPr>
-            <a:r>
-              <a:t>●  各塾生の特徴・スキル・育成課題のヒアリング</a:t>
+              <a:defRPr sz="1800" b="0"/>
+            </a:pPr>
+            <a:r>
+              <a:t>●  上記の確認をもって、コンテンツを確定させる</a:t>
             </a:r>
           </a:p>
         </p:txBody>
@@ -8826,14 +8903,6 @@
 <file path=ppt/slides/slide5.xml><?xml version="1.0" encoding="utf-8"?>
 <p:sld xmlns:a="http://schemas.openxmlformats.org/drawingml/2006/main" xmlns:p="http://schemas.openxmlformats.org/presentationml/2006/main" xmlns:r="http://schemas.openxmlformats.org/officeDocument/2006/relationships">
   <p:cSld>
-    <p:bg>
-      <p:bgPr>
-        <a:solidFill>
-          <a:srgbClr val="FFFFFF"/>
-        </a:solidFill>
-        <a:effectLst/>
-      </p:bgPr>
-    </p:bg>
     <p:spTree>
       <p:nvGrpSpPr>
         <p:cNvPr id="1" name=""/>
@@ -8920,18 +8989,14 @@
           </a:fontRef>
         </p:style>
         <p:txBody>
-          <a:bodyPr rtlCol="0" anchor="ctr" wrap="none"/>
+          <a:bodyPr rtlCol="0" anchor="ctr"/>
           <a:lstStyle/>
           <a:p>
             <a:pPr algn="ctr">
-              <a:spcBef>
-                <a:spcPts val="600"/>
-              </a:spcBef>
               <a:defRPr sz="3600" b="1">
                 <a:solidFill>
                   <a:srgbClr val="FFFFFF"/>
                 </a:solidFill>
-                <a:latin typeface="Yu Gothic"/>
               </a:defRPr>
             </a:pPr>
             <a:r>
@@ -8963,15 +9028,10 @@
           <a:lstStyle/>
           <a:p>
             <a:pPr algn="l">
-              <a:defRPr sz="3000" b="1">
-                <a:solidFill>
-                  <a:srgbClr val="1B2A4A"/>
-                </a:solidFill>
-                <a:latin typeface="Yu Gothic"/>
-              </a:defRPr>
-            </a:pPr>
-            <a:r>
-              <a:t>チーム編成の方針</a:t>
+              <a:defRPr sz="3000" b="1"/>
+            </a:pPr>
+            <a:r>
+              <a:t>経営理念・役割行動・360度評価</a:t>
             </a:r>
           </a:p>
         </p:txBody>
@@ -9042,15 +9102,10 @@
           <a:lstStyle/>
           <a:p>
             <a:pPr algn="l">
-              <a:defRPr sz="1800" b="0">
-                <a:solidFill>
-                  <a:srgbClr val="333333"/>
-                </a:solidFill>
-                <a:latin typeface="Yu Gothic"/>
-              </a:defRPr>
-            </a:pPr>
-            <a:r>
-              <a:t>●  4チーム × 3名の編成方針（部署・年齢・スキルのバランス）</a:t>
+              <a:defRPr sz="1800" b="0"/>
+            </a:pPr>
+            <a:r>
+              <a:t>●  経営理念の確認・共有</a:t>
             </a:r>
           </a:p>
         </p:txBody>
@@ -9078,28 +9133,58 @@
           <a:lstStyle/>
           <a:p>
             <a:pPr algn="l">
-              <a:defRPr sz="1800" b="0">
+              <a:defRPr sz="1800" b="0"/>
+            </a:pPr>
+            <a:r>
+              <a:t>●  管理者に求められる役割行動の定義</a:t>
+            </a:r>
+          </a:p>
+        </p:txBody>
+      </p:sp>
+      <p:sp>
+        <p:nvSpPr>
+          <p:cNvPr id="8" name="TextBox 7"/>
+          <p:cNvSpPr txBox="1"/>
+          <p:nvPr/>
+        </p:nvSpPr>
+        <p:spPr>
+          <a:xfrm>
+            <a:off x="1645920" y="2651760"/>
+            <a:ext cx="9509760" cy="365760"/>
+          </a:xfrm>
+          <a:prstGeom prst="rect">
+            <a:avLst/>
+          </a:prstGeom>
+          <a:noFill/>
+        </p:spPr>
+        <p:txBody>
+          <a:bodyPr wrap="square">
+            <a:spAutoFit/>
+          </a:bodyPr>
+          <a:lstStyle/>
+          <a:p>
+            <a:pPr algn="l">
+              <a:defRPr sz="1500" b="0">
                 <a:solidFill>
-                  <a:srgbClr val="333333"/>
+                  <a:srgbClr val="666666"/>
                 </a:solidFill>
-                <a:latin typeface="Yu Gothic"/>
               </a:defRPr>
             </a:pPr>
             <a:r>
-              <a:t>●  コーディネーターと塾生の組み合わせの考え方</a:t>
-            </a:r>
-          </a:p>
-        </p:txBody>
-      </p:sp>
-      <p:sp>
-        <p:nvSpPr>
-          <p:cNvPr id="8" name="TextBox 7"/>
-          <p:cNvSpPr txBox="1"/>
-          <p:nvPr/>
-        </p:nvSpPr>
-        <p:spPr>
-          <a:xfrm>
-            <a:off x="1097280" y="2651760"/>
+              <a:t>→  経営理念から落とし込んだ具体的な行動指標を設定</a:t>
+            </a:r>
+          </a:p>
+        </p:txBody>
+      </p:sp>
+      <p:sp>
+        <p:nvSpPr>
+          <p:cNvPr id="9" name="TextBox 8"/>
+          <p:cNvSpPr txBox="1"/>
+          <p:nvPr/>
+        </p:nvSpPr>
+        <p:spPr>
+          <a:xfrm>
+            <a:off x="1097280" y="3017520"/>
             <a:ext cx="10058400" cy="411480"/>
           </a:xfrm>
           <a:prstGeom prst="rect">
@@ -9114,15 +9199,76 @@
           <a:lstStyle/>
           <a:p>
             <a:pPr algn="l">
-              <a:defRPr sz="1800" b="0">
+              <a:defRPr sz="1800" b="0"/>
+            </a:pPr>
+            <a:r>
+              <a:t>●  役割行動を基にした360度評価への接続</a:t>
+            </a:r>
+          </a:p>
+        </p:txBody>
+      </p:sp>
+      <p:sp>
+        <p:nvSpPr>
+          <p:cNvPr id="10" name="TextBox 9"/>
+          <p:cNvSpPr txBox="1"/>
+          <p:nvPr/>
+        </p:nvSpPr>
+        <p:spPr>
+          <a:xfrm>
+            <a:off x="1645920" y="3474720"/>
+            <a:ext cx="9509760" cy="365760"/>
+          </a:xfrm>
+          <a:prstGeom prst="rect">
+            <a:avLst/>
+          </a:prstGeom>
+          <a:noFill/>
+        </p:spPr>
+        <p:txBody>
+          <a:bodyPr wrap="square">
+            <a:spAutoFit/>
+          </a:bodyPr>
+          <a:lstStyle/>
+          <a:p>
+            <a:pPr algn="l">
+              <a:defRPr sz="1500" b="0">
                 <a:solidFill>
-                  <a:srgbClr val="333333"/>
+                  <a:srgbClr val="666666"/>
                 </a:solidFill>
-                <a:latin typeface="Yu Gothic"/>
               </a:defRPr>
             </a:pPr>
             <a:r>
-              <a:t>●  編成案はえんのした側で作成し、後日ご提示でよいか確認</a:t>
+              <a:t>→  評価項目の設計方針・実施時期の確認</a:t>
+            </a:r>
+          </a:p>
+        </p:txBody>
+      </p:sp>
+      <p:sp>
+        <p:nvSpPr>
+          <p:cNvPr id="11" name="TextBox 10"/>
+          <p:cNvSpPr txBox="1"/>
+          <p:nvPr/>
+        </p:nvSpPr>
+        <p:spPr>
+          <a:xfrm>
+            <a:off x="1097280" y="3840480"/>
+            <a:ext cx="10058400" cy="411480"/>
+          </a:xfrm>
+          <a:prstGeom prst="rect">
+            <a:avLst/>
+          </a:prstGeom>
+          <a:noFill/>
+        </p:spPr>
+        <p:txBody>
+          <a:bodyPr wrap="square">
+            <a:spAutoFit/>
+          </a:bodyPr>
+          <a:lstStyle/>
+          <a:p>
+            <a:pPr algn="l">
+              <a:defRPr sz="1800" b="0"/>
+            </a:pPr>
+            <a:r>
+              <a:t>●  研修プログラム全体を通じた評価の位置づけ</a:t>
             </a:r>
           </a:p>
         </p:txBody>
@@ -9138,14 +9284,6 @@
 <file path=ppt/slides/slide6.xml><?xml version="1.0" encoding="utf-8"?>
 <p:sld xmlns:a="http://schemas.openxmlformats.org/drawingml/2006/main" xmlns:p="http://schemas.openxmlformats.org/presentationml/2006/main" xmlns:r="http://schemas.openxmlformats.org/officeDocument/2006/relationships">
   <p:cSld>
-    <p:bg>
-      <p:bgPr>
-        <a:solidFill>
-          <a:srgbClr val="FFFFFF"/>
-        </a:solidFill>
-        <a:effectLst/>
-      </p:bgPr>
-    </p:bg>
     <p:spTree>
       <p:nvGrpSpPr>
         <p:cNvPr id="1" name=""/>
@@ -9232,18 +9370,14 @@
           </a:fontRef>
         </p:style>
         <p:txBody>
-          <a:bodyPr rtlCol="0" anchor="ctr" wrap="none"/>
+          <a:bodyPr rtlCol="0" anchor="ctr"/>
           <a:lstStyle/>
           <a:p>
             <a:pPr algn="ctr">
-              <a:spcBef>
-                <a:spcPts val="600"/>
-              </a:spcBef>
               <a:defRPr sz="3600" b="1">
                 <a:solidFill>
                   <a:srgbClr val="FFFFFF"/>
                 </a:solidFill>
-                <a:latin typeface="Yu Gothic"/>
               </a:defRPr>
             </a:pPr>
             <a:r>
@@ -9275,15 +9409,10 @@
           <a:lstStyle/>
           <a:p>
             <a:pPr algn="l">
-              <a:defRPr sz="3000" b="1">
-                <a:solidFill>
-                  <a:srgbClr val="1B2A4A"/>
-                </a:solidFill>
-                <a:latin typeface="Yu Gothic"/>
-              </a:defRPr>
-            </a:pPr>
-            <a:r>
-              <a:t>参加者のスキル確認</a:t>
+              <a:defRPr sz="3000" b="1"/>
+            </a:pPr>
+            <a:r>
+              <a:t>最終報告の基準・目標共有</a:t>
             </a:r>
           </a:p>
         </p:txBody>
@@ -9354,15 +9483,10 @@
           <a:lstStyle/>
           <a:p>
             <a:pPr algn="l">
-              <a:defRPr sz="1800" b="0">
-                <a:solidFill>
-                  <a:srgbClr val="333333"/>
-                </a:solidFill>
-                <a:latin typeface="Yu Gothic"/>
-              </a:defRPr>
-            </a:pPr>
-            <a:r>
-              <a:t>●  塾生のPCスキル（特にPowerPoint）のレベル感</a:t>
+              <a:defRPr sz="1800" b="0"/>
+            </a:pPr>
+            <a:r>
+              <a:t>●  最終報告（第12回）の評価基準を提示</a:t>
             </a:r>
           </a:p>
         </p:txBody>
@@ -9375,30 +9499,25 @@
         </p:nvSpPr>
         <p:spPr>
           <a:xfrm>
-            <a:off x="1645920" y="2194560"/>
-            <a:ext cx="9509760" cy="365760"/>
-          </a:xfrm>
-          <a:prstGeom prst="rect">
-            <a:avLst/>
-          </a:prstGeom>
-          <a:noFill/>
-        </p:spPr>
-        <p:txBody>
-          <a:bodyPr wrap="square">
-            <a:spAutoFit/>
-          </a:bodyPr>
-          <a:lstStyle/>
-          <a:p>
-            <a:pPr algn="l">
-              <a:defRPr sz="1500" b="0">
-                <a:solidFill>
-                  <a:srgbClr val="666666"/>
-                </a:solidFill>
-                <a:latin typeface="Yu Gothic"/>
-              </a:defRPr>
-            </a:pPr>
-            <a:r>
-              <a:t>→  第6回「プレゼンテーション技術」の内容レベル調整に反映</a:t>
+            <a:off x="1097280" y="2194560"/>
+            <a:ext cx="10058400" cy="411480"/>
+          </a:xfrm>
+          <a:prstGeom prst="rect">
+            <a:avLst/>
+          </a:prstGeom>
+          <a:noFill/>
+        </p:spPr>
+        <p:txBody>
+          <a:bodyPr wrap="square">
+            <a:spAutoFit/>
+          </a:bodyPr>
+          <a:lstStyle/>
+          <a:p>
+            <a:pPr algn="l">
+              <a:defRPr sz="1800" b="0"/>
+            </a:pPr>
+            <a:r>
+              <a:t>●  他社の最終報告イメージ（サンプル）を共有</a:t>
             </a:r>
           </a:p>
         </p:txBody>
@@ -9411,7 +9530,7 @@
         </p:nvSpPr>
         <p:spPr>
           <a:xfrm>
-            <a:off x="1097280" y="2560320"/>
+            <a:off x="1097280" y="2651760"/>
             <a:ext cx="10058400" cy="411480"/>
           </a:xfrm>
           <a:prstGeom prst="rect">
@@ -9426,15 +9545,10 @@
           <a:lstStyle/>
           <a:p>
             <a:pPr algn="l">
-              <a:defRPr sz="1800" b="0">
-                <a:solidFill>
-                  <a:srgbClr val="333333"/>
-                </a:solidFill>
-                <a:latin typeface="Yu Gothic"/>
-              </a:defRPr>
-            </a:pPr>
-            <a:r>
-              <a:t>●  Excel・Word等の基本スキルの把握</a:t>
+              <a:defRPr sz="1800" b="0"/>
+            </a:pPr>
+            <a:r>
+              <a:t>●  自社でこの内容・レベルを目指してよいか確認</a:t>
             </a:r>
           </a:p>
         </p:txBody>
@@ -9447,7 +9561,7 @@
         </p:nvSpPr>
         <p:spPr>
           <a:xfrm>
-            <a:off x="1097280" y="3017520"/>
+            <a:off x="1097280" y="3108960"/>
             <a:ext cx="10058400" cy="411480"/>
           </a:xfrm>
           <a:prstGeom prst="rect">
@@ -9462,15 +9576,10 @@
           <a:lstStyle/>
           <a:p>
             <a:pPr algn="l">
-              <a:defRPr sz="1800" b="0">
-                <a:solidFill>
-                  <a:srgbClr val="333333"/>
-                </a:solidFill>
-                <a:latin typeface="Yu Gothic"/>
-              </a:defRPr>
-            </a:pPr>
-            <a:r>
-              <a:t>●  プレゼンテーション経験の有無</a:t>
+              <a:defRPr sz="1800" b="0"/>
+            </a:pPr>
+            <a:r>
+              <a:t>●  確認の上で、基準とサンプルを塾生に展開する流れの合意</a:t>
             </a:r>
           </a:p>
         </p:txBody>
@@ -9486,14 +9595,6 @@
 <file path=ppt/slides/slide7.xml><?xml version="1.0" encoding="utf-8"?>
 <p:sld xmlns:a="http://schemas.openxmlformats.org/drawingml/2006/main" xmlns:p="http://schemas.openxmlformats.org/presentationml/2006/main" xmlns:r="http://schemas.openxmlformats.org/officeDocument/2006/relationships">
   <p:cSld>
-    <p:bg>
-      <p:bgPr>
-        <a:solidFill>
-          <a:srgbClr val="FFFFFF"/>
-        </a:solidFill>
-        <a:effectLst/>
-      </p:bgPr>
-    </p:bg>
     <p:spTree>
       <p:nvGrpSpPr>
         <p:cNvPr id="1" name=""/>
@@ -9580,18 +9681,14 @@
           </a:fontRef>
         </p:style>
         <p:txBody>
-          <a:bodyPr rtlCol="0" anchor="ctr" wrap="none"/>
+          <a:bodyPr rtlCol="0" anchor="ctr"/>
           <a:lstStyle/>
           <a:p>
             <a:pPr algn="ctr">
-              <a:spcBef>
-                <a:spcPts val="600"/>
-              </a:spcBef>
               <a:defRPr sz="3600" b="1">
                 <a:solidFill>
                   <a:srgbClr val="FFFFFF"/>
                 </a:solidFill>
-                <a:latin typeface="Yu Gothic"/>
               </a:defRPr>
             </a:pPr>
             <a:r>
@@ -9623,15 +9720,10 @@
           <a:lstStyle/>
           <a:p>
             <a:pPr algn="l">
-              <a:defRPr sz="3000" b="1">
-                <a:solidFill>
-                  <a:srgbClr val="1B2A4A"/>
-                </a:solidFill>
-                <a:latin typeface="Yu Gothic"/>
-              </a:defRPr>
-            </a:pPr>
-            <a:r>
-              <a:t>研修内容の詳細すり合わせ</a:t>
+              <a:defRPr sz="3000" b="1"/>
+            </a:pPr>
+            <a:r>
+              <a:t>日程の最終確定</a:t>
             </a:r>
           </a:p>
         </p:txBody>
@@ -9702,15 +9794,10 @@
           <a:lstStyle/>
           <a:p>
             <a:pPr algn="l">
-              <a:defRPr sz="1800" b="0">
-                <a:solidFill>
-                  <a:srgbClr val="333333"/>
-                </a:solidFill>
-                <a:latin typeface="Yu Gothic"/>
-              </a:defRPr>
-            </a:pPr>
-            <a:r>
-              <a:t>●  全12回カリキュラムの概要説明・認識合わせ</a:t>
+              <a:defRPr sz="1800" b="0"/>
+            </a:pPr>
+            <a:r>
+              <a:t>●  先方から回答いただいた確定日程の最終確認</a:t>
             </a:r>
           </a:p>
         </p:txBody>
@@ -9738,15 +9825,10 @@
           <a:lstStyle/>
           <a:p>
             <a:pPr algn="l">
-              <a:defRPr sz="1800" b="0">
-                <a:solidFill>
-                  <a:srgbClr val="333333"/>
-                </a:solidFill>
-                <a:latin typeface="Yu Gothic"/>
-              </a:defRPr>
-            </a:pPr>
-            <a:r>
-              <a:t>●  先方が特に重視したいテーマ・期待する成果</a:t>
+              <a:defRPr sz="1800" b="0"/>
+            </a:pPr>
+            <a:r>
+              <a:t>●  各回の曜日・間隔に無理がないか確認（約1ヶ月間隔が目安）</a:t>
             </a:r>
           </a:p>
         </p:txBody>
@@ -9774,51 +9856,10 @@
           <a:lstStyle/>
           <a:p>
             <a:pPr algn="l">
-              <a:defRPr sz="1800" b="0">
-                <a:solidFill>
-                  <a:srgbClr val="333333"/>
-                </a:solidFill>
-                <a:latin typeface="Yu Gothic"/>
-              </a:defRPr>
-            </a:pPr>
-            <a:r>
-              <a:t>●  各回の内容に対する要望・カスタマイズの有無</a:t>
-            </a:r>
-          </a:p>
-        </p:txBody>
-      </p:sp>
-      <p:sp>
-        <p:nvSpPr>
-          <p:cNvPr id="9" name="TextBox 8"/>
-          <p:cNvSpPr txBox="1"/>
-          <p:nvPr/>
-        </p:nvSpPr>
-        <p:spPr>
-          <a:xfrm>
-            <a:off x="1097280" y="3108960"/>
-            <a:ext cx="10058400" cy="411480"/>
-          </a:xfrm>
-          <a:prstGeom prst="rect">
-            <a:avLst/>
-          </a:prstGeom>
-          <a:noFill/>
-        </p:spPr>
-        <p:txBody>
-          <a:bodyPr wrap="square">
-            <a:spAutoFit/>
-          </a:bodyPr>
-          <a:lstStyle/>
-          <a:p>
-            <a:pPr algn="l">
-              <a:defRPr sz="1800" b="0">
-                <a:solidFill>
-                  <a:srgbClr val="333333"/>
-                </a:solidFill>
-                <a:latin typeface="Yu Gothic"/>
-              </a:defRPr>
-            </a:pPr>
-            <a:r>
-              <a:t>●  研修のゴールイメージの共有</a:t>
+              <a:defRPr sz="1800" b="0"/>
+            </a:pPr>
+            <a:r>
+              <a:t>●  各回の会場（社内会議室 or 外部施設）の確保状況</a:t>
             </a:r>
           </a:p>
         </p:txBody>
@@ -9834,14 +9875,6 @@
 <file path=ppt/slides/slide8.xml><?xml version="1.0" encoding="utf-8"?>
 <p:sld xmlns:a="http://schemas.openxmlformats.org/drawingml/2006/main" xmlns:p="http://schemas.openxmlformats.org/presentationml/2006/main" xmlns:r="http://schemas.openxmlformats.org/officeDocument/2006/relationships">
   <p:cSld>
-    <p:bg>
-      <p:bgPr>
-        <a:solidFill>
-          <a:srgbClr val="FFFFFF"/>
-        </a:solidFill>
-        <a:effectLst/>
-      </p:bgPr>
-    </p:bg>
     <p:spTree>
       <p:nvGrpSpPr>
         <p:cNvPr id="1" name=""/>
@@ -9928,18 +9961,14 @@
           </a:fontRef>
         </p:style>
         <p:txBody>
-          <a:bodyPr rtlCol="0" anchor="ctr" wrap="none"/>
+          <a:bodyPr rtlCol="0" anchor="ctr"/>
           <a:lstStyle/>
           <a:p>
             <a:pPr algn="ctr">
-              <a:spcBef>
-                <a:spcPts val="600"/>
-              </a:spcBef>
               <a:defRPr sz="3600" b="1">
                 <a:solidFill>
                   <a:srgbClr val="FFFFFF"/>
                 </a:solidFill>
-                <a:latin typeface="Yu Gothic"/>
               </a:defRPr>
             </a:pPr>
             <a:r>
@@ -9971,15 +10000,10 @@
           <a:lstStyle/>
           <a:p>
             <a:pPr algn="l">
-              <a:defRPr sz="3000" b="1">
-                <a:solidFill>
-                  <a:srgbClr val="1B2A4A"/>
-                </a:solidFill>
-                <a:latin typeface="Yu Gothic"/>
-              </a:defRPr>
-            </a:pPr>
-            <a:r>
-              <a:t>課題図書について</a:t>
+              <a:defRPr sz="3000" b="1"/>
+            </a:pPr>
+            <a:r>
+              <a:t>参加メンバー・事務局の確定</a:t>
             </a:r>
           </a:p>
         </p:txBody>
@@ -10050,28 +10074,128 @@
           <a:lstStyle/>
           <a:p>
             <a:pPr algn="l">
-              <a:defRPr sz="1800" b="0">
+              <a:defRPr sz="1800" b="0"/>
+            </a:pPr>
+            <a:r>
+              <a:t>●  事務局の選定</a:t>
+            </a:r>
+          </a:p>
+        </p:txBody>
+      </p:sp>
+      <p:sp>
+        <p:nvSpPr>
+          <p:cNvPr id="7" name="TextBox 6"/>
+          <p:cNvSpPr txBox="1"/>
+          <p:nvPr/>
+        </p:nvSpPr>
+        <p:spPr>
+          <a:xfrm>
+            <a:off x="1645920" y="2194560"/>
+            <a:ext cx="9509760" cy="365760"/>
+          </a:xfrm>
+          <a:prstGeom prst="rect">
+            <a:avLst/>
+          </a:prstGeom>
+          <a:noFill/>
+        </p:spPr>
+        <p:txBody>
+          <a:bodyPr wrap="square">
+            <a:spAutoFit/>
+          </a:bodyPr>
+          <a:lstStyle/>
+          <a:p>
+            <a:pPr algn="l">
+              <a:defRPr sz="1500" b="0">
                 <a:solidFill>
-                  <a:srgbClr val="333333"/>
+                  <a:srgbClr val="666666"/>
                 </a:solidFill>
-                <a:latin typeface="Yu Gothic"/>
               </a:defRPr>
             </a:pPr>
             <a:r>
-              <a:t>●  課題図書の提示可否（4回分程度を想定）</a:t>
-            </a:r>
-          </a:p>
-        </p:txBody>
-      </p:sp>
-      <p:sp>
-        <p:nvSpPr>
-          <p:cNvPr id="7" name="TextBox 6"/>
-          <p:cNvSpPr txBox="1"/>
-          <p:nvPr/>
-        </p:nvSpPr>
-        <p:spPr>
-          <a:xfrm>
-            <a:off x="1097280" y="2194560"/>
+              <a:t>→  社内で事務局担当者を決めていただきたい</a:t>
+            </a:r>
+          </a:p>
+        </p:txBody>
+      </p:sp>
+      <p:sp>
+        <p:nvSpPr>
+          <p:cNvPr id="8" name="TextBox 7"/>
+          <p:cNvSpPr txBox="1"/>
+          <p:nvPr/>
+        </p:nvSpPr>
+        <p:spPr>
+          <a:xfrm>
+            <a:off x="1645920" y="2560320"/>
+            <a:ext cx="9509760" cy="365760"/>
+          </a:xfrm>
+          <a:prstGeom prst="rect">
+            <a:avLst/>
+          </a:prstGeom>
+          <a:noFill/>
+        </p:spPr>
+        <p:txBody>
+          <a:bodyPr wrap="square">
+            <a:spAutoFit/>
+          </a:bodyPr>
+          <a:lstStyle/>
+          <a:p>
+            <a:pPr algn="l">
+              <a:defRPr sz="1500" b="0">
+                <a:solidFill>
+                  <a:srgbClr val="666666"/>
+                </a:solidFill>
+              </a:defRPr>
+            </a:pPr>
+            <a:r>
+              <a:t>→  連絡窓口・日程調整・資料配布等の実務を担当</a:t>
+            </a:r>
+          </a:p>
+        </p:txBody>
+      </p:sp>
+      <p:sp>
+        <p:nvSpPr>
+          <p:cNvPr id="9" name="TextBox 8"/>
+          <p:cNvSpPr txBox="1"/>
+          <p:nvPr/>
+        </p:nvSpPr>
+        <p:spPr>
+          <a:xfrm>
+            <a:off x="1645920" y="2926080"/>
+            <a:ext cx="9509760" cy="365760"/>
+          </a:xfrm>
+          <a:prstGeom prst="rect">
+            <a:avLst/>
+          </a:prstGeom>
+          <a:noFill/>
+        </p:spPr>
+        <p:txBody>
+          <a:bodyPr wrap="square">
+            <a:spAutoFit/>
+          </a:bodyPr>
+          <a:lstStyle/>
+          <a:p>
+            <a:pPr algn="l">
+              <a:defRPr sz="1500" b="0">
+                <a:solidFill>
+                  <a:srgbClr val="666666"/>
+                </a:solidFill>
+              </a:defRPr>
+            </a:pPr>
+            <a:r>
+              <a:t>→  メンバー構成表に事務局を追加</a:t>
+            </a:r>
+          </a:p>
+        </p:txBody>
+      </p:sp>
+      <p:sp>
+        <p:nvSpPr>
+          <p:cNvPr id="10" name="TextBox 9"/>
+          <p:cNvSpPr txBox="1"/>
+          <p:nvPr/>
+        </p:nvSpPr>
+        <p:spPr>
+          <a:xfrm>
+            <a:off x="1097280" y="3291840"/>
             <a:ext cx="10058400" cy="411480"/>
           </a:xfrm>
           <a:prstGeom prst="rect">
@@ -10086,28 +10210,93 @@
           <a:lstStyle/>
           <a:p>
             <a:pPr algn="l">
-              <a:defRPr sz="1800" b="0">
+              <a:defRPr sz="1800" b="0"/>
+            </a:pPr>
+            <a:r>
+              <a:t>●  塾長（1名）の選任</a:t>
+            </a:r>
+          </a:p>
+        </p:txBody>
+      </p:sp>
+      <p:sp>
+        <p:nvSpPr>
+          <p:cNvPr id="11" name="TextBox 10"/>
+          <p:cNvSpPr txBox="1"/>
+          <p:nvPr/>
+        </p:nvSpPr>
+        <p:spPr>
+          <a:xfrm>
+            <a:off x="1645920" y="3749040"/>
+            <a:ext cx="9509760" cy="365760"/>
+          </a:xfrm>
+          <a:prstGeom prst="rect">
+            <a:avLst/>
+          </a:prstGeom>
+          <a:noFill/>
+        </p:spPr>
+        <p:txBody>
+          <a:bodyPr wrap="square">
+            <a:spAutoFit/>
+          </a:bodyPr>
+          <a:lstStyle/>
+          <a:p>
+            <a:pPr algn="l">
+              <a:defRPr sz="1500" b="0">
                 <a:solidFill>
-                  <a:srgbClr val="333333"/>
+                  <a:srgbClr val="666666"/>
                 </a:solidFill>
-                <a:latin typeface="Yu Gothic"/>
               </a:defRPr>
             </a:pPr>
             <a:r>
-              <a:t>●  どのタイミングで指定するか</a:t>
-            </a:r>
-          </a:p>
-        </p:txBody>
-      </p:sp>
-      <p:sp>
-        <p:nvSpPr>
-          <p:cNvPr id="8" name="TextBox 7"/>
-          <p:cNvSpPr txBox="1"/>
-          <p:nvPr/>
-        </p:nvSpPr>
-        <p:spPr>
-          <a:xfrm>
-            <a:off x="1097280" y="2651760"/>
+              <a:t>→  経営層・役員クラス</a:t>
+            </a:r>
+          </a:p>
+        </p:txBody>
+      </p:sp>
+      <p:sp>
+        <p:nvSpPr>
+          <p:cNvPr id="12" name="TextBox 11"/>
+          <p:cNvSpPr txBox="1"/>
+          <p:nvPr/>
+        </p:nvSpPr>
+        <p:spPr>
+          <a:xfrm>
+            <a:off x="1645920" y="4114800"/>
+            <a:ext cx="9509760" cy="365760"/>
+          </a:xfrm>
+          <a:prstGeom prst="rect">
+            <a:avLst/>
+          </a:prstGeom>
+          <a:noFill/>
+        </p:spPr>
+        <p:txBody>
+          <a:bodyPr wrap="square">
+            <a:spAutoFit/>
+          </a:bodyPr>
+          <a:lstStyle/>
+          <a:p>
+            <a:pPr algn="l">
+              <a:defRPr sz="1500" b="0">
+                <a:solidFill>
+                  <a:srgbClr val="666666"/>
+                </a:solidFill>
+              </a:defRPr>
+            </a:pPr>
+            <a:r>
+              <a:t>→  参加可能な回にオブザーブ出席</a:t>
+            </a:r>
+          </a:p>
+        </p:txBody>
+      </p:sp>
+      <p:sp>
+        <p:nvSpPr>
+          <p:cNvPr id="13" name="TextBox 12"/>
+          <p:cNvSpPr txBox="1"/>
+          <p:nvPr/>
+        </p:nvSpPr>
+        <p:spPr>
+          <a:xfrm>
+            <a:off x="1097280" y="4480560"/>
             <a:ext cx="10058400" cy="411480"/>
           </a:xfrm>
           <a:prstGeom prst="rect">
@@ -10122,28 +10311,93 @@
           <a:lstStyle/>
           <a:p>
             <a:pPr algn="l">
-              <a:defRPr sz="1800" b="0">
+              <a:defRPr sz="1800" b="0"/>
+            </a:pPr>
+            <a:r>
+              <a:t>●  コーディネーター（4名）の人選確認</a:t>
+            </a:r>
+          </a:p>
+        </p:txBody>
+      </p:sp>
+      <p:sp>
+        <p:nvSpPr>
+          <p:cNvPr id="14" name="TextBox 13"/>
+          <p:cNvSpPr txBox="1"/>
+          <p:nvPr/>
+        </p:nvSpPr>
+        <p:spPr>
+          <a:xfrm>
+            <a:off x="1645920" y="4937760"/>
+            <a:ext cx="9509760" cy="365760"/>
+          </a:xfrm>
+          <a:prstGeom prst="rect">
+            <a:avLst/>
+          </a:prstGeom>
+          <a:noFill/>
+        </p:spPr>
+        <p:txBody>
+          <a:bodyPr wrap="square">
+            <a:spAutoFit/>
+          </a:bodyPr>
+          <a:lstStyle/>
+          <a:p>
+            <a:pPr algn="l">
+              <a:defRPr sz="1500" b="0">
                 <a:solidFill>
-                  <a:srgbClr val="333333"/>
+                  <a:srgbClr val="666666"/>
                 </a:solidFill>
-                <a:latin typeface="Yu Gothic"/>
               </a:defRPr>
             </a:pPr>
             <a:r>
-              <a:t>●  選書はえんのした側で行い、先方承認の流れでよいか</a:t>
-            </a:r>
-          </a:p>
-        </p:txBody>
-      </p:sp>
-      <p:sp>
-        <p:nvSpPr>
-          <p:cNvPr id="9" name="TextBox 8"/>
-          <p:cNvSpPr txBox="1"/>
-          <p:nvPr/>
-        </p:nvSpPr>
-        <p:spPr>
-          <a:xfrm>
-            <a:off x="1097280" y="3108960"/>
+              <a:t>→  部長クラス</a:t>
+            </a:r>
+          </a:p>
+        </p:txBody>
+      </p:sp>
+      <p:sp>
+        <p:nvSpPr>
+          <p:cNvPr id="15" name="TextBox 14"/>
+          <p:cNvSpPr txBox="1"/>
+          <p:nvPr/>
+        </p:nvSpPr>
+        <p:spPr>
+          <a:xfrm>
+            <a:off x="1645920" y="5303520"/>
+            <a:ext cx="9509760" cy="365760"/>
+          </a:xfrm>
+          <a:prstGeom prst="rect">
+            <a:avLst/>
+          </a:prstGeom>
+          <a:noFill/>
+        </p:spPr>
+        <p:txBody>
+          <a:bodyPr wrap="square">
+            <a:spAutoFit/>
+          </a:bodyPr>
+          <a:lstStyle/>
+          <a:p>
+            <a:pPr algn="l">
+              <a:defRPr sz="1500" b="0">
+                <a:solidFill>
+                  <a:srgbClr val="666666"/>
+                </a:solidFill>
+              </a:defRPr>
+            </a:pPr>
+            <a:r>
+              <a:t>→  各チームのリーダー役として塾生3名を担当</a:t>
+            </a:r>
+          </a:p>
+        </p:txBody>
+      </p:sp>
+      <p:sp>
+        <p:nvSpPr>
+          <p:cNvPr id="16" name="TextBox 15"/>
+          <p:cNvSpPr txBox="1"/>
+          <p:nvPr/>
+        </p:nvSpPr>
+        <p:spPr>
+          <a:xfrm>
+            <a:off x="1097280" y="5669280"/>
             <a:ext cx="10058400" cy="411480"/>
           </a:xfrm>
           <a:prstGeom prst="rect">
@@ -10158,15 +10412,76 @@
           <a:lstStyle/>
           <a:p>
             <a:pPr algn="l">
-              <a:defRPr sz="1800" b="0">
+              <a:defRPr sz="1800" b="0"/>
+            </a:pPr>
+            <a:r>
+              <a:t>●  塾生（12名）の人選確認</a:t>
+            </a:r>
+          </a:p>
+        </p:txBody>
+      </p:sp>
+      <p:sp>
+        <p:nvSpPr>
+          <p:cNvPr id="17" name="TextBox 16"/>
+          <p:cNvSpPr txBox="1"/>
+          <p:nvPr/>
+        </p:nvSpPr>
+        <p:spPr>
+          <a:xfrm>
+            <a:off x="1645920" y="6126480"/>
+            <a:ext cx="9509760" cy="365760"/>
+          </a:xfrm>
+          <a:prstGeom prst="rect">
+            <a:avLst/>
+          </a:prstGeom>
+          <a:noFill/>
+        </p:spPr>
+        <p:txBody>
+          <a:bodyPr wrap="square">
+            <a:spAutoFit/>
+          </a:bodyPr>
+          <a:lstStyle/>
+          <a:p>
+            <a:pPr algn="l">
+              <a:defRPr sz="1500" b="0">
                 <a:solidFill>
-                  <a:srgbClr val="333333"/>
+                  <a:srgbClr val="666666"/>
                 </a:solidFill>
-                <a:latin typeface="Yu Gothic"/>
               </a:defRPr>
             </a:pPr>
             <a:r>
-              <a:t>●  購入・配布の方法（会社負担 or 個人負担）</a:t>
+              <a:t>→  課長・次長クラス（将来の部長候補）</a:t>
+            </a:r>
+          </a:p>
+        </p:txBody>
+      </p:sp>
+      <p:sp>
+        <p:nvSpPr>
+          <p:cNvPr id="18" name="TextBox 17"/>
+          <p:cNvSpPr txBox="1"/>
+          <p:nvPr/>
+        </p:nvSpPr>
+        <p:spPr>
+          <a:xfrm>
+            <a:off x="1097280" y="6492240"/>
+            <a:ext cx="10058400" cy="411480"/>
+          </a:xfrm>
+          <a:prstGeom prst="rect">
+            <a:avLst/>
+          </a:prstGeom>
+          <a:noFill/>
+        </p:spPr>
+        <p:txBody>
+          <a:bodyPr wrap="square">
+            <a:spAutoFit/>
+          </a:bodyPr>
+          <a:lstStyle/>
+          <a:p>
+            <a:pPr algn="l">
+              <a:defRPr sz="1800" b="0"/>
+            </a:pPr>
+            <a:r>
+              <a:t>●  メンバー構成表の記入・返送の期日確認</a:t>
             </a:r>
           </a:p>
         </p:txBody>
@@ -10182,14 +10497,6 @@
 <file path=ppt/slides/slide9.xml><?xml version="1.0" encoding="utf-8"?>
 <p:sld xmlns:a="http://schemas.openxmlformats.org/drawingml/2006/main" xmlns:p="http://schemas.openxmlformats.org/presentationml/2006/main" xmlns:r="http://schemas.openxmlformats.org/officeDocument/2006/relationships">
   <p:cSld>
-    <p:bg>
-      <p:bgPr>
-        <a:solidFill>
-          <a:srgbClr val="FFFFFF"/>
-        </a:solidFill>
-        <a:effectLst/>
-      </p:bgPr>
-    </p:bg>
     <p:spTree>
       <p:nvGrpSpPr>
         <p:cNvPr id="1" name=""/>
@@ -10276,18 +10583,14 @@
           </a:fontRef>
         </p:style>
         <p:txBody>
-          <a:bodyPr rtlCol="0" anchor="ctr" wrap="none"/>
+          <a:bodyPr rtlCol="0" anchor="ctr"/>
           <a:lstStyle/>
           <a:p>
             <a:pPr algn="ctr">
-              <a:spcBef>
-                <a:spcPts val="600"/>
-              </a:spcBef>
               <a:defRPr sz="3600" b="1">
                 <a:solidFill>
                   <a:srgbClr val="FFFFFF"/>
                 </a:solidFill>
-                <a:latin typeface="Yu Gothic"/>
               </a:defRPr>
             </a:pPr>
             <a:r>
@@ -10319,15 +10622,10 @@
           <a:lstStyle/>
           <a:p>
             <a:pPr algn="l">
-              <a:defRPr sz="3000" b="1">
-                <a:solidFill>
-                  <a:srgbClr val="1B2A4A"/>
-                </a:solidFill>
-                <a:latin typeface="Yu Gothic"/>
-              </a:defRPr>
-            </a:pPr>
-            <a:r>
-              <a:t>振り返りシートの運用方法</a:t>
+              <a:defRPr sz="3000" b="1"/>
+            </a:pPr>
+            <a:r>
+              <a:t>チーム編成の方針</a:t>
             </a:r>
           </a:p>
         </p:txBody>
@@ -10398,15 +10696,10 @@
           <a:lstStyle/>
           <a:p>
             <a:pPr algn="l">
-              <a:defRPr sz="1800" b="0">
-                <a:solidFill>
-                  <a:srgbClr val="333333"/>
-                </a:solidFill>
-                <a:latin typeface="Yu Gothic"/>
-              </a:defRPr>
-            </a:pPr>
-            <a:r>
-              <a:t>●  振り返りシート（A3 Excel）の内容確認</a:t>
+              <a:defRPr sz="1800" b="0"/>
+            </a:pPr>
+            <a:r>
+              <a:t>●  4チーム×3名の編成方針（部署・年齢・スキルのバランス）</a:t>
             </a:r>
           </a:p>
         </p:txBody>
@@ -10434,15 +10727,10 @@
           <a:lstStyle/>
           <a:p>
             <a:pPr algn="l">
-              <a:defRPr sz="1800" b="0">
-                <a:solidFill>
-                  <a:srgbClr val="333333"/>
-                </a:solidFill>
-                <a:latin typeface="Yu Gothic"/>
-              </a:defRPr>
-            </a:pPr>
-            <a:r>
-              <a:t>●  運用フロー</a:t>
+              <a:defRPr sz="1800" b="0"/>
+            </a:pPr>
+            <a:r>
+              <a:t>●  コーディネーターと塾生の組み合わせの考え方</a:t>
             </a:r>
           </a:p>
         </p:txBody>
@@ -10455,79 +10743,7 @@
         </p:nvSpPr>
         <p:spPr>
           <a:xfrm>
-            <a:off x="1645920" y="2651760"/>
-            <a:ext cx="9509760" cy="365760"/>
-          </a:xfrm>
-          <a:prstGeom prst="rect">
-            <a:avLst/>
-          </a:prstGeom>
-          <a:noFill/>
-        </p:spPr>
-        <p:txBody>
-          <a:bodyPr wrap="square">
-            <a:spAutoFit/>
-          </a:bodyPr>
-          <a:lstStyle/>
-          <a:p>
-            <a:pPr algn="l">
-              <a:defRPr sz="1500" b="0">
-                <a:solidFill>
-                  <a:srgbClr val="666666"/>
-                </a:solidFill>
-                <a:latin typeface="Yu Gothic"/>
-              </a:defRPr>
-            </a:pPr>
-            <a:r>
-              <a:t>→  研修当日：学びの振り返り＋実践計画を記入</a:t>
-            </a:r>
-          </a:p>
-        </p:txBody>
-      </p:sp>
-      <p:sp>
-        <p:nvSpPr>
-          <p:cNvPr id="9" name="TextBox 8"/>
-          <p:cNvSpPr txBox="1"/>
-          <p:nvPr/>
-        </p:nvSpPr>
-        <p:spPr>
-          <a:xfrm>
-            <a:off x="1645920" y="3017520"/>
-            <a:ext cx="9509760" cy="365760"/>
-          </a:xfrm>
-          <a:prstGeom prst="rect">
-            <a:avLst/>
-          </a:prstGeom>
-          <a:noFill/>
-        </p:spPr>
-        <p:txBody>
-          <a:bodyPr wrap="square">
-            <a:spAutoFit/>
-          </a:bodyPr>
-          <a:lstStyle/>
-          <a:p>
-            <a:pPr algn="l">
-              <a:defRPr sz="1500" b="0">
-                <a:solidFill>
-                  <a:srgbClr val="666666"/>
-                </a:solidFill>
-                <a:latin typeface="Yu Gothic"/>
-              </a:defRPr>
-            </a:pPr>
-            <a:r>
-              <a:t>→  研修後〜次回まで：実践→実践後の振り返りを記入</a:t>
-            </a:r>
-          </a:p>
-        </p:txBody>
-      </p:sp>
-      <p:sp>
-        <p:nvSpPr>
-          <p:cNvPr id="10" name="TextBox 9"/>
-          <p:cNvSpPr txBox="1"/>
-          <p:nvPr/>
-        </p:nvSpPr>
-        <p:spPr>
-          <a:xfrm>
-            <a:off x="1097280" y="3383280"/>
+            <a:off x="1097280" y="2651760"/>
             <a:ext cx="10058400" cy="411480"/>
           </a:xfrm>
           <a:prstGeom prst="rect">
@@ -10542,123 +10758,10 @@
           <a:lstStyle/>
           <a:p>
             <a:pPr algn="l">
-              <a:defRPr sz="1800" b="0">
-                <a:solidFill>
-                  <a:srgbClr val="333333"/>
-                </a:solidFill>
-                <a:latin typeface="Yu Gothic"/>
-              </a:defRPr>
-            </a:pPr>
-            <a:r>
-              <a:t>●  上司確認の仕組み</a:t>
-            </a:r>
-          </a:p>
-        </p:txBody>
-      </p:sp>
-      <p:sp>
-        <p:nvSpPr>
-          <p:cNvPr id="11" name="TextBox 10"/>
-          <p:cNvSpPr txBox="1"/>
-          <p:nvPr/>
-        </p:nvSpPr>
-        <p:spPr>
-          <a:xfrm>
-            <a:off x="1645920" y="3840480"/>
-            <a:ext cx="9509760" cy="365760"/>
-          </a:xfrm>
-          <a:prstGeom prst="rect">
-            <a:avLst/>
-          </a:prstGeom>
-          <a:noFill/>
-        </p:spPr>
-        <p:txBody>
-          <a:bodyPr wrap="square">
-            <a:spAutoFit/>
-          </a:bodyPr>
-          <a:lstStyle/>
-          <a:p>
-            <a:pPr algn="l">
-              <a:defRPr sz="1500" b="0">
-                <a:solidFill>
-                  <a:srgbClr val="666666"/>
-                </a:solidFill>
-                <a:latin typeface="Yu Gothic"/>
-              </a:defRPr>
-            </a:pPr>
-            <a:r>
-              <a:t>→  確認者：直属上司 or コーディネーター？</a:t>
-            </a:r>
-          </a:p>
-        </p:txBody>
-      </p:sp>
-      <p:sp>
-        <p:nvSpPr>
-          <p:cNvPr id="12" name="TextBox 11"/>
-          <p:cNvSpPr txBox="1"/>
-          <p:nvPr/>
-        </p:nvSpPr>
-        <p:spPr>
-          <a:xfrm>
-            <a:off x="1645920" y="4206240"/>
-            <a:ext cx="9509760" cy="365760"/>
-          </a:xfrm>
-          <a:prstGeom prst="rect">
-            <a:avLst/>
-          </a:prstGeom>
-          <a:noFill/>
-        </p:spPr>
-        <p:txBody>
-          <a:bodyPr wrap="square">
-            <a:spAutoFit/>
-          </a:bodyPr>
-          <a:lstStyle/>
-          <a:p>
-            <a:pPr algn="l">
-              <a:defRPr sz="1500" b="0">
-                <a:solidFill>
-                  <a:srgbClr val="666666"/>
-                </a:solidFill>
-                <a:latin typeface="Yu Gothic"/>
-              </a:defRPr>
-            </a:pPr>
-            <a:r>
-              <a:t>→  フィードバックのタイミング・方法</a:t>
-            </a:r>
-          </a:p>
-        </p:txBody>
-      </p:sp>
-      <p:sp>
-        <p:nvSpPr>
-          <p:cNvPr id="13" name="TextBox 12"/>
-          <p:cNvSpPr txBox="1"/>
-          <p:nvPr/>
-        </p:nvSpPr>
-        <p:spPr>
-          <a:xfrm>
-            <a:off x="1097280" y="4572000"/>
-            <a:ext cx="10058400" cy="411480"/>
-          </a:xfrm>
-          <a:prstGeom prst="rect">
-            <a:avLst/>
-          </a:prstGeom>
-          <a:noFill/>
-        </p:spPr>
-        <p:txBody>
-          <a:bodyPr wrap="square">
-            <a:spAutoFit/>
-          </a:bodyPr>
-          <a:lstStyle/>
-          <a:p>
-            <a:pPr algn="l">
-              <a:defRPr sz="1800" b="0">
-                <a:solidFill>
-                  <a:srgbClr val="333333"/>
-                </a:solidFill>
-                <a:latin typeface="Yu Gothic"/>
-              </a:defRPr>
-            </a:pPr>
-            <a:r>
-              <a:t>●  提出・回収の方法（紙 or データ）</a:t>
+              <a:defRPr sz="1800" b="0"/>
+            </a:pPr>
+            <a:r>
+              <a:t>●  編成案はこちらで作成し、後日提示でよいか</a:t>
             </a:r>
           </a:p>
         </p:txBody>

--- a/clients/大晃産業/03_日程調整/【アジェンダ】20260323_打合せ.pptx
+++ b/clients/大晃産業/03_日程調整/【アジェンダ】20260323_打合せ.pptx
@@ -6682,7 +6682,7 @@
               <a:defRPr sz="1800" b="0"/>
             </a:pPr>
             <a:r>
-              <a:t>経営理念・役割行動・360度評価</a:t>
+              <a:t>360度評価の進め方</a:t>
             </a:r>
           </a:p>
         </p:txBody>
@@ -9031,7 +9031,7 @@
               <a:defRPr sz="3000" b="1"/>
             </a:pPr>
             <a:r>
-              <a:t>経営理念・役割行動・360度評価</a:t>
+              <a:t>360度評価の進め方</a:t>
             </a:r>
           </a:p>
         </p:txBody>
@@ -9087,25 +9087,25 @@
         </p:nvSpPr>
         <p:spPr>
           <a:xfrm>
-            <a:off x="1097280" y="1737360"/>
-            <a:ext cx="10058400" cy="411480"/>
-          </a:xfrm>
-          <a:prstGeom prst="rect">
-            <a:avLst/>
-          </a:prstGeom>
-          <a:noFill/>
-        </p:spPr>
-        <p:txBody>
-          <a:bodyPr wrap="square">
-            <a:spAutoFit/>
-          </a:bodyPr>
-          <a:lstStyle/>
-          <a:p>
-            <a:pPr algn="l">
-              <a:defRPr sz="1800" b="0"/>
-            </a:pPr>
-            <a:r>
-              <a:t>●  経営理念の確認・共有</a:t>
+            <a:off x="1097280" y="1650000"/>
+            <a:ext cx="10058400" cy="380000"/>
+          </a:xfrm>
+          <a:prstGeom prst="rect">
+            <a:avLst/>
+          </a:prstGeom>
+          <a:noFill/>
+        </p:spPr>
+        <p:txBody>
+          <a:bodyPr wrap="square">
+            <a:spAutoFit/>
+          </a:bodyPr>
+          <a:lstStyle/>
+          <a:p>
+            <a:pPr algn="l">
+              <a:defRPr sz="1700" b="0"/>
+            </a:pPr>
+            <a:r>
+              <a:t>●  現状、経営理念・役割行動・人事評価制度が未整備であることを前提に</a:t>
             </a:r>
           </a:p>
         </p:txBody>
@@ -9118,25 +9118,25 @@
         </p:nvSpPr>
         <p:spPr>
           <a:xfrm>
-            <a:off x="1097280" y="2194560"/>
-            <a:ext cx="10058400" cy="411480"/>
-          </a:xfrm>
-          <a:prstGeom prst="rect">
-            <a:avLst/>
-          </a:prstGeom>
-          <a:noFill/>
-        </p:spPr>
-        <p:txBody>
-          <a:bodyPr wrap="square">
-            <a:spAutoFit/>
-          </a:bodyPr>
-          <a:lstStyle/>
-          <a:p>
-            <a:pPr algn="l">
-              <a:defRPr sz="1800" b="0"/>
-            </a:pPr>
-            <a:r>
-              <a:t>●  管理者に求められる役割行動の定義</a:t>
+            <a:off x="1097280" y="2040000"/>
+            <a:ext cx="10058400" cy="380000"/>
+          </a:xfrm>
+          <a:prstGeom prst="rect">
+            <a:avLst/>
+          </a:prstGeom>
+          <a:noFill/>
+        </p:spPr>
+        <p:txBody>
+          <a:bodyPr wrap="square">
+            <a:spAutoFit/>
+          </a:bodyPr>
+          <a:lstStyle/>
+          <a:p>
+            <a:pPr algn="l">
+              <a:defRPr sz="1700" b="0"/>
+            </a:pPr>
+            <a:r>
+              <a:t>●  提案：研修コンピテンシー項目を360度評価の指標として活用</a:t>
             </a:r>
           </a:p>
         </p:txBody>
@@ -9149,29 +9149,29 @@
         </p:nvSpPr>
         <p:spPr>
           <a:xfrm>
-            <a:off x="1645920" y="2651760"/>
-            <a:ext cx="9509760" cy="365760"/>
-          </a:xfrm>
-          <a:prstGeom prst="rect">
-            <a:avLst/>
-          </a:prstGeom>
-          <a:noFill/>
-        </p:spPr>
-        <p:txBody>
-          <a:bodyPr wrap="square">
-            <a:spAutoFit/>
-          </a:bodyPr>
-          <a:lstStyle/>
-          <a:p>
-            <a:pPr algn="l">
-              <a:defRPr sz="1500" b="0">
+            <a:off x="1645920" y="2430000"/>
+            <a:ext cx="9509760" cy="340000"/>
+          </a:xfrm>
+          <a:prstGeom prst="rect">
+            <a:avLst/>
+          </a:prstGeom>
+          <a:noFill/>
+        </p:spPr>
+        <p:txBody>
+          <a:bodyPr wrap="square">
+            <a:spAutoFit/>
+          </a:bodyPr>
+          <a:lstStyle/>
+          <a:p>
+            <a:pPr algn="l">
+              <a:defRPr sz="1400" b="0">
                 <a:solidFill>
                   <a:srgbClr val="666666"/>
                 </a:solidFill>
               </a:defRPr>
             </a:pPr>
             <a:r>
-              <a:t>→  経営理念から落とし込んだ具体的な行動指標を設定</a:t>
+              <a:t>→  研修で学ぶ内容と評価が直結し、塾生の成長を可視化できる</a:t>
             </a:r>
           </a:p>
         </p:txBody>
@@ -9184,25 +9184,25 @@
         </p:nvSpPr>
         <p:spPr>
           <a:xfrm>
-            <a:off x="1097280" y="3017520"/>
-            <a:ext cx="10058400" cy="411480"/>
-          </a:xfrm>
-          <a:prstGeom prst="rect">
-            <a:avLst/>
-          </a:prstGeom>
-          <a:noFill/>
-        </p:spPr>
-        <p:txBody>
-          <a:bodyPr wrap="square">
-            <a:spAutoFit/>
-          </a:bodyPr>
-          <a:lstStyle/>
-          <a:p>
-            <a:pPr algn="l">
-              <a:defRPr sz="1800" b="0"/>
-            </a:pPr>
-            <a:r>
-              <a:t>●  役割行動を基にした360度評価への接続</a:t>
+            <a:off x="1097280" y="2750000"/>
+            <a:ext cx="10058400" cy="380000"/>
+          </a:xfrm>
+          <a:prstGeom prst="rect">
+            <a:avLst/>
+          </a:prstGeom>
+          <a:noFill/>
+        </p:spPr>
+        <p:txBody>
+          <a:bodyPr wrap="square">
+            <a:spAutoFit/>
+          </a:bodyPr>
+          <a:lstStyle/>
+          <a:p>
+            <a:pPr algn="l">
+              <a:defRPr sz="1700" b="0"/>
+            </a:pPr>
+            <a:r>
+              <a:t>●  コンピテンシー評価項目（3カテゴリ・19項目）の確認</a:t>
             </a:r>
           </a:p>
         </p:txBody>
@@ -9215,29 +9215,29 @@
         </p:nvSpPr>
         <p:spPr>
           <a:xfrm>
-            <a:off x="1645920" y="3474720"/>
-            <a:ext cx="9509760" cy="365760"/>
-          </a:xfrm>
-          <a:prstGeom prst="rect">
-            <a:avLst/>
-          </a:prstGeom>
-          <a:noFill/>
-        </p:spPr>
-        <p:txBody>
-          <a:bodyPr wrap="square">
-            <a:spAutoFit/>
-          </a:bodyPr>
-          <a:lstStyle/>
-          <a:p>
-            <a:pPr algn="l">
-              <a:defRPr sz="1500" b="0">
+            <a:off x="1645920" y="3140000"/>
+            <a:ext cx="9509760" cy="340000"/>
+          </a:xfrm>
+          <a:prstGeom prst="rect">
+            <a:avLst/>
+          </a:prstGeom>
+          <a:noFill/>
+        </p:spPr>
+        <p:txBody>
+          <a:bodyPr wrap="square">
+            <a:spAutoFit/>
+          </a:bodyPr>
+          <a:lstStyle/>
+          <a:p>
+            <a:pPr algn="l">
+              <a:defRPr sz="1400" b="0">
                 <a:solidFill>
                   <a:srgbClr val="666666"/>
                 </a:solidFill>
               </a:defRPr>
             </a:pPr>
             <a:r>
-              <a:t>→  評価項目の設計方針・実施時期の確認</a:t>
+              <a:t>→  思考的側面（6項目）：情報把握力／問題分析力／課題設定力／計画策定力／プロセス管理力／決断力</a:t>
             </a:r>
           </a:p>
         </p:txBody>
@@ -9250,25 +9250,126 @@
         </p:nvSpPr>
         <p:spPr>
           <a:xfrm>
-            <a:off x="1097280" y="3840480"/>
-            <a:ext cx="10058400" cy="411480"/>
-          </a:xfrm>
-          <a:prstGeom prst="rect">
-            <a:avLst/>
-          </a:prstGeom>
-          <a:noFill/>
-        </p:spPr>
-        <p:txBody>
-          <a:bodyPr wrap="square">
-            <a:spAutoFit/>
-          </a:bodyPr>
-          <a:lstStyle/>
-          <a:p>
-            <a:pPr algn="l">
-              <a:defRPr sz="1800" b="0"/>
-            </a:pPr>
-            <a:r>
-              <a:t>●  研修プログラム全体を通じた評価の位置づけ</a:t>
+            <a:off x="1645920" y="3460000"/>
+            <a:ext cx="9509760" cy="340000"/>
+          </a:xfrm>
+          <a:prstGeom prst="rect">
+            <a:avLst/>
+          </a:prstGeom>
+          <a:noFill/>
+        </p:spPr>
+        <p:txBody>
+          <a:bodyPr wrap="square">
+            <a:spAutoFit/>
+          </a:bodyPr>
+          <a:lstStyle/>
+          <a:p>
+            <a:pPr algn="l">
+              <a:defRPr sz="1400" b="0">
+                <a:solidFill>
+                  <a:srgbClr val="666666"/>
+                </a:solidFill>
+              </a:defRPr>
+            </a:pPr>
+            <a:r>
+              <a:t>→  対人的側面（7項目）：ヒアリングスキル／プレゼンテーションスキル／対人感受性／指導育成力／組織活性化力／方向づけする力／自己開示能力</a:t>
+            </a:r>
+          </a:p>
+        </p:txBody>
+      </p:sp>
+      <p:sp>
+        <p:nvSpPr>
+          <p:cNvPr id="12" name="TextBox 11"/>
+          <p:cNvSpPr txBox="1"/>
+          <p:nvPr/>
+        </p:nvSpPr>
+        <p:spPr>
+          <a:xfrm>
+            <a:off x="1645920" y="3780000"/>
+            <a:ext cx="9509760" cy="340000"/>
+          </a:xfrm>
+          <a:prstGeom prst="rect">
+            <a:avLst/>
+          </a:prstGeom>
+          <a:noFill/>
+        </p:spPr>
+        <p:txBody>
+          <a:bodyPr wrap="square">
+            <a:spAutoFit/>
+          </a:bodyPr>
+          <a:lstStyle/>
+          <a:p>
+            <a:pPr algn="l">
+              <a:defRPr sz="1400" b="0">
+                <a:solidFill>
+                  <a:srgbClr val="666666"/>
+                </a:solidFill>
+              </a:defRPr>
+            </a:pPr>
+            <a:r>
+              <a:t>→  総合（6項目）：自律一貫性／柔軟性／バイタリティ／ストレス耐性／革新性／倫理観</a:t>
+            </a:r>
+          </a:p>
+        </p:txBody>
+      </p:sp>
+      <p:sp>
+        <p:nvSpPr>
+          <p:cNvPr id="13" name="TextBox 12"/>
+          <p:cNvSpPr txBox="1"/>
+          <p:nvPr/>
+        </p:nvSpPr>
+        <p:spPr>
+          <a:xfrm>
+            <a:off x="1097280" y="4100000"/>
+            <a:ext cx="10058400" cy="380000"/>
+          </a:xfrm>
+          <a:prstGeom prst="rect">
+            <a:avLst/>
+          </a:prstGeom>
+          <a:noFill/>
+        </p:spPr>
+        <p:txBody>
+          <a:bodyPr wrap="square">
+            <a:spAutoFit/>
+          </a:bodyPr>
+          <a:lstStyle/>
+          <a:p>
+            <a:pPr algn="l">
+              <a:defRPr sz="1700" b="0"/>
+            </a:pPr>
+            <a:r>
+              <a:t>●  評価の実施時期：研修開始前（6月）と研修終了後（翌年6月）の2回を想定</a:t>
+            </a:r>
+          </a:p>
+        </p:txBody>
+      </p:sp>
+      <p:sp>
+        <p:nvSpPr>
+          <p:cNvPr id="14" name="TextBox 13"/>
+          <p:cNvSpPr txBox="1"/>
+          <p:nvPr/>
+        </p:nvSpPr>
+        <p:spPr>
+          <a:xfrm>
+            <a:off x="1097280" y="4490000"/>
+            <a:ext cx="10058400" cy="380000"/>
+          </a:xfrm>
+          <a:prstGeom prst="rect">
+            <a:avLst/>
+          </a:prstGeom>
+          <a:noFill/>
+        </p:spPr>
+        <p:txBody>
+          <a:bodyPr wrap="square">
+            <a:spAutoFit/>
+          </a:bodyPr>
+          <a:lstStyle/>
+          <a:p>
+            <a:pPr algn="l">
+              <a:defRPr sz="1700" b="0"/>
+            </a:pPr>
+            <a:r>
+              <a:t>●  評価者の範囲：上司・同僚・部下（＋自己評価）</a:t>
             </a:r>
           </a:p>
         </p:txBody>

--- a/clients/大晃産業/03_日程調整/【アジェンダ】20260323_打合せ.pptx
+++ b/clients/大晃産業/03_日程調整/【アジェンダ】20260323_打合せ.pptx
@@ -9569,25 +9569,25 @@
         </p:nvSpPr>
         <p:spPr>
           <a:xfrm>
-            <a:off x="1097280" y="1737360"/>
-            <a:ext cx="10058400" cy="411480"/>
-          </a:xfrm>
-          <a:prstGeom prst="rect">
-            <a:avLst/>
-          </a:prstGeom>
-          <a:noFill/>
-        </p:spPr>
-        <p:txBody>
-          <a:bodyPr wrap="square">
-            <a:spAutoFit/>
-          </a:bodyPr>
-          <a:lstStyle/>
-          <a:p>
-            <a:pPr algn="l">
-              <a:defRPr sz="1800" b="0"/>
-            </a:pPr>
-            <a:r>
-              <a:t>●  最終報告（第12回）の評価基準を提示</a:t>
+            <a:off x="1097280" y="1650000"/>
+            <a:ext cx="10058400" cy="370000"/>
+          </a:xfrm>
+          <a:prstGeom prst="rect">
+            <a:avLst/>
+          </a:prstGeom>
+          <a:noFill/>
+        </p:spPr>
+        <p:txBody>
+          <a:bodyPr wrap="square">
+            <a:spAutoFit/>
+          </a:bodyPr>
+          <a:lstStyle/>
+          <a:p>
+            <a:pPr algn="l">
+              <a:defRPr sz="1700" b="0"/>
+            </a:pPr>
+            <a:r>
+              <a:t>●  最終報告（第12回）の評価基準を提示（添付資料あり）</a:t>
             </a:r>
           </a:p>
         </p:txBody>
@@ -9600,25 +9600,25 @@
         </p:nvSpPr>
         <p:spPr>
           <a:xfrm>
-            <a:off x="1097280" y="2194560"/>
-            <a:ext cx="10058400" cy="411480"/>
-          </a:xfrm>
-          <a:prstGeom prst="rect">
-            <a:avLst/>
-          </a:prstGeom>
-          <a:noFill/>
-        </p:spPr>
-        <p:txBody>
-          <a:bodyPr wrap="square">
-            <a:spAutoFit/>
-          </a:bodyPr>
-          <a:lstStyle/>
-          <a:p>
-            <a:pPr algn="l">
-              <a:defRPr sz="1800" b="0"/>
-            </a:pPr>
-            <a:r>
-              <a:t>●  他社の最終報告イメージ（サンプル）を共有</a:t>
+            <a:off x="1097280" y="2030000"/>
+            <a:ext cx="10058400" cy="370000"/>
+          </a:xfrm>
+          <a:prstGeom prst="rect">
+            <a:avLst/>
+          </a:prstGeom>
+          <a:noFill/>
+        </p:spPr>
+        <p:txBody>
+          <a:bodyPr wrap="square">
+            <a:spAutoFit/>
+          </a:bodyPr>
+          <a:lstStyle/>
+          <a:p>
+            <a:pPr algn="l">
+              <a:defRPr sz="1700" b="0"/>
+            </a:pPr>
+            <a:r>
+              <a:t>●  他社事例の評価基準（5カテゴリ・24項目）を参考として共有</a:t>
             </a:r>
           </a:p>
         </p:txBody>
@@ -9631,22 +9631,197 @@
         </p:nvSpPr>
         <p:spPr>
           <a:xfrm>
-            <a:off x="1097280" y="2651760"/>
-            <a:ext cx="10058400" cy="411480"/>
-          </a:xfrm>
-          <a:prstGeom prst="rect">
-            <a:avLst/>
-          </a:prstGeom>
-          <a:noFill/>
-        </p:spPr>
-        <p:txBody>
-          <a:bodyPr wrap="square">
-            <a:spAutoFit/>
-          </a:bodyPr>
-          <a:lstStyle/>
-          <a:p>
-            <a:pPr algn="l">
-              <a:defRPr sz="1800" b="0"/>
+            <a:off x="1645920" y="2410000"/>
+            <a:ext cx="9509760" cy="320000"/>
+          </a:xfrm>
+          <a:prstGeom prst="rect">
+            <a:avLst/>
+          </a:prstGeom>
+          <a:noFill/>
+        </p:spPr>
+        <p:txBody>
+          <a:bodyPr wrap="square">
+            <a:spAutoFit/>
+          </a:bodyPr>
+          <a:lstStyle/>
+          <a:p>
+            <a:pPr algn="l">
+              <a:defRPr sz="1300" b="0">
+                <a:solidFill>
+                  <a:srgbClr val="666666"/>
+                </a:solidFill>
+              </a:defRPr>
+            </a:pPr>
+            <a:r>
+              <a:t>→  I  目指す姿の設定：期待に対する関心度／想いの強さ／目標の明確さ／目標設定の速さ</a:t>
+            </a:r>
+          </a:p>
+        </p:txBody>
+      </p:sp>
+      <p:sp>
+        <p:nvSpPr>
+          <p:cNvPr id="9" name="TextBox 8"/>
+          <p:cNvSpPr txBox="1"/>
+          <p:nvPr/>
+        </p:nvSpPr>
+        <p:spPr>
+          <a:xfrm>
+            <a:off x="1645920" y="2720000"/>
+            <a:ext cx="9509760" cy="320000"/>
+          </a:xfrm>
+          <a:prstGeom prst="rect">
+            <a:avLst/>
+          </a:prstGeom>
+          <a:noFill/>
+        </p:spPr>
+        <p:txBody>
+          <a:bodyPr wrap="square">
+            <a:spAutoFit/>
+          </a:bodyPr>
+          <a:lstStyle/>
+          <a:p>
+            <a:pPr algn="l">
+              <a:defRPr sz="1300" b="0">
+                <a:solidFill>
+                  <a:srgbClr val="666666"/>
+                </a:solidFill>
+              </a:defRPr>
+            </a:pPr>
+            <a:r>
+              <a:t>→  II  現状の把握：論点の適切さ／問題点の妥当性／原因追及の妥当性／データの収集や活用の程度</a:t>
+            </a:r>
+          </a:p>
+        </p:txBody>
+      </p:sp>
+      <p:sp>
+        <p:nvSpPr>
+          <p:cNvPr id="10" name="TextBox 9"/>
+          <p:cNvSpPr txBox="1"/>
+          <p:nvPr/>
+        </p:nvSpPr>
+        <p:spPr>
+          <a:xfrm>
+            <a:off x="1645920" y="3030000"/>
+            <a:ext cx="9509760" cy="320000"/>
+          </a:xfrm>
+          <a:prstGeom prst="rect">
+            <a:avLst/>
+          </a:prstGeom>
+          <a:noFill/>
+        </p:spPr>
+        <p:txBody>
+          <a:bodyPr wrap="square">
+            <a:spAutoFit/>
+          </a:bodyPr>
+          <a:lstStyle/>
+          <a:p>
+            <a:pPr algn="l">
+              <a:defRPr sz="1300" b="0">
+                <a:solidFill>
+                  <a:srgbClr val="666666"/>
+                </a:solidFill>
+              </a:defRPr>
+            </a:pPr>
+            <a:r>
+              <a:t>→  III  打ち手の設定：打ち手の数の多さ／優先順位の意識の程度／計画性の程度</a:t>
+            </a:r>
+          </a:p>
+        </p:txBody>
+      </p:sp>
+      <p:sp>
+        <p:nvSpPr>
+          <p:cNvPr id="11" name="TextBox 10"/>
+          <p:cNvSpPr txBox="1"/>
+          <p:nvPr/>
+        </p:nvSpPr>
+        <p:spPr>
+          <a:xfrm>
+            <a:off x="1645920" y="3340000"/>
+            <a:ext cx="9509760" cy="320000"/>
+          </a:xfrm>
+          <a:prstGeom prst="rect">
+            <a:avLst/>
+          </a:prstGeom>
+          <a:noFill/>
+        </p:spPr>
+        <p:txBody>
+          <a:bodyPr wrap="square">
+            <a:spAutoFit/>
+          </a:bodyPr>
+          <a:lstStyle/>
+          <a:p>
+            <a:pPr algn="l">
+              <a:defRPr sz="1300" b="0">
+                <a:solidFill>
+                  <a:srgbClr val="666666"/>
+                </a:solidFill>
+              </a:defRPr>
+            </a:pPr>
+            <a:r>
+              <a:t>→  IV  コンピテンシーの発揮：行動の種類の多さ／省察の程度／成果</a:t>
+            </a:r>
+          </a:p>
+        </p:txBody>
+      </p:sp>
+      <p:sp>
+        <p:nvSpPr>
+          <p:cNvPr id="12" name="TextBox 11"/>
+          <p:cNvSpPr txBox="1"/>
+          <p:nvPr/>
+        </p:nvSpPr>
+        <p:spPr>
+          <a:xfrm>
+            <a:off x="1645920" y="3650000"/>
+            <a:ext cx="9509760" cy="320000"/>
+          </a:xfrm>
+          <a:prstGeom prst="rect">
+            <a:avLst/>
+          </a:prstGeom>
+          <a:noFill/>
+        </p:spPr>
+        <p:txBody>
+          <a:bodyPr wrap="square">
+            <a:spAutoFit/>
+          </a:bodyPr>
+          <a:lstStyle/>
+          <a:p>
+            <a:pPr algn="l">
+              <a:defRPr sz="1300" b="0">
+                <a:solidFill>
+                  <a:srgbClr val="666666"/>
+                </a:solidFill>
+              </a:defRPr>
+            </a:pPr>
+            <a:r>
+              <a:t>→  V  成果の発表：準備の程度／スライドの出来栄え／実演時の出来栄え／フィードバックの受容度</a:t>
+            </a:r>
+          </a:p>
+        </p:txBody>
+      </p:sp>
+      <p:sp>
+        <p:nvSpPr>
+          <p:cNvPr id="13" name="TextBox 12"/>
+          <p:cNvSpPr txBox="1"/>
+          <p:nvPr/>
+        </p:nvSpPr>
+        <p:spPr>
+          <a:xfrm>
+            <a:off x="1097280" y="4020000"/>
+            <a:ext cx="10058400" cy="370000"/>
+          </a:xfrm>
+          <a:prstGeom prst="rect">
+            <a:avLst/>
+          </a:prstGeom>
+          <a:noFill/>
+        </p:spPr>
+        <p:txBody>
+          <a:bodyPr wrap="square">
+            <a:spAutoFit/>
+          </a:bodyPr>
+          <a:lstStyle/>
+          <a:p>
+            <a:pPr algn="l">
+              <a:defRPr sz="1700" b="0"/>
             </a:pPr>
             <a:r>
               <a:t>●  自社でこの内容・レベルを目指してよいか確認</a:t>
@@ -9656,28 +9831,28 @@
       </p:sp>
       <p:sp>
         <p:nvSpPr>
-          <p:cNvPr id="9" name="TextBox 8"/>
-          <p:cNvSpPr txBox="1"/>
-          <p:nvPr/>
-        </p:nvSpPr>
-        <p:spPr>
-          <a:xfrm>
-            <a:off x="1097280" y="3108960"/>
-            <a:ext cx="10058400" cy="411480"/>
-          </a:xfrm>
-          <a:prstGeom prst="rect">
-            <a:avLst/>
-          </a:prstGeom>
-          <a:noFill/>
-        </p:spPr>
-        <p:txBody>
-          <a:bodyPr wrap="square">
-            <a:spAutoFit/>
-          </a:bodyPr>
-          <a:lstStyle/>
-          <a:p>
-            <a:pPr algn="l">
-              <a:defRPr sz="1800" b="0"/>
+          <p:cNvPr id="14" name="TextBox 13"/>
+          <p:cNvSpPr txBox="1"/>
+          <p:nvPr/>
+        </p:nvSpPr>
+        <p:spPr>
+          <a:xfrm>
+            <a:off x="1097280" y="4400000"/>
+            <a:ext cx="10058400" cy="370000"/>
+          </a:xfrm>
+          <a:prstGeom prst="rect">
+            <a:avLst/>
+          </a:prstGeom>
+          <a:noFill/>
+        </p:spPr>
+        <p:txBody>
+          <a:bodyPr wrap="square">
+            <a:spAutoFit/>
+          </a:bodyPr>
+          <a:lstStyle/>
+          <a:p>
+            <a:pPr algn="l">
+              <a:defRPr sz="1700" b="0"/>
             </a:pPr>
             <a:r>
               <a:t>●  確認の上で、基準とサンプルを塾生に展開する流れの合意</a:t>

--- a/clients/大晃産業/03_日程調整/【アジェンダ】20260323_打合せ.pptx
+++ b/clients/大晃産業/03_日程調整/【アジェンダ】20260323_打合せ.pptx
@@ -9088,7 +9088,7 @@
         <p:spPr>
           <a:xfrm>
             <a:off x="1097280" y="1650000"/>
-            <a:ext cx="10058400" cy="380000"/>
+            <a:ext cx="10058400" cy="370000"/>
           </a:xfrm>
           <a:prstGeom prst="rect">
             <a:avLst/>
@@ -9118,8 +9118,8 @@
         </p:nvSpPr>
         <p:spPr>
           <a:xfrm>
-            <a:off x="1097280" y="2040000"/>
-            <a:ext cx="10058400" cy="380000"/>
+            <a:off x="1097280" y="2020000"/>
+            <a:ext cx="10058400" cy="370000"/>
           </a:xfrm>
           <a:prstGeom prst="rect">
             <a:avLst/>
@@ -9149,29 +9149,29 @@
         </p:nvSpPr>
         <p:spPr>
           <a:xfrm>
-            <a:off x="1645920" y="2430000"/>
-            <a:ext cx="9509760" cy="340000"/>
-          </a:xfrm>
-          <a:prstGeom prst="rect">
-            <a:avLst/>
-          </a:prstGeom>
-          <a:noFill/>
-        </p:spPr>
-        <p:txBody>
-          <a:bodyPr wrap="square">
-            <a:spAutoFit/>
-          </a:bodyPr>
-          <a:lstStyle/>
-          <a:p>
-            <a:pPr algn="l">
-              <a:defRPr sz="1400" b="0">
+            <a:off x="1645920" y="2390000"/>
+            <a:ext cx="9509760" cy="310000"/>
+          </a:xfrm>
+          <a:prstGeom prst="rect">
+            <a:avLst/>
+          </a:prstGeom>
+          <a:noFill/>
+        </p:spPr>
+        <p:txBody>
+          <a:bodyPr wrap="square">
+            <a:spAutoFit/>
+          </a:bodyPr>
+          <a:lstStyle/>
+          <a:p>
+            <a:pPr algn="l">
+              <a:defRPr sz="1300" b="0">
                 <a:solidFill>
                   <a:srgbClr val="666666"/>
                 </a:solidFill>
               </a:defRPr>
             </a:pPr>
             <a:r>
-              <a:t>→  研修で学ぶ内容と評価が直結し、塾生の成長を可視化できる</a:t>
+              <a:t>→  A. 分析・構想力：情報把握力／問題分析力／課題設定力</a:t>
             </a:r>
           </a:p>
         </p:txBody>
@@ -9184,130 +9184,134 @@
         </p:nvSpPr>
         <p:spPr>
           <a:xfrm>
-            <a:off x="1097280" y="2750000"/>
-            <a:ext cx="10058400" cy="380000"/>
-          </a:xfrm>
-          <a:prstGeom prst="rect">
-            <a:avLst/>
-          </a:prstGeom>
-          <a:noFill/>
-        </p:spPr>
-        <p:txBody>
-          <a:bodyPr wrap="square">
-            <a:spAutoFit/>
-          </a:bodyPr>
-          <a:lstStyle/>
-          <a:p>
-            <a:pPr algn="l">
-              <a:defRPr sz="1700" b="0"/>
-            </a:pPr>
-            <a:r>
-              <a:t>●  コンピテンシー評価項目（3カテゴリ・19項目）の確認</a:t>
-            </a:r>
-          </a:p>
-        </p:txBody>
-      </p:sp>
-      <p:sp>
-        <p:nvSpPr>
-          <p:cNvPr id="10" name="TextBox 9"/>
-          <p:cNvSpPr txBox="1"/>
-          <p:nvPr/>
-        </p:nvSpPr>
-        <p:spPr>
-          <a:xfrm>
-            <a:off x="1645920" y="3140000"/>
-            <a:ext cx="9509760" cy="340000"/>
-          </a:xfrm>
-          <a:prstGeom prst="rect">
-            <a:avLst/>
-          </a:prstGeom>
-          <a:noFill/>
-        </p:spPr>
-        <p:txBody>
-          <a:bodyPr wrap="square">
-            <a:spAutoFit/>
-          </a:bodyPr>
-          <a:lstStyle/>
-          <a:p>
-            <a:pPr algn="l">
-              <a:defRPr sz="1400" b="0">
+            <a:off x="1645920" y="2690000"/>
+            <a:ext cx="9509760" cy="310000"/>
+          </a:xfrm>
+          <a:prstGeom prst="rect">
+            <a:avLst/>
+          </a:prstGeom>
+          <a:noFill/>
+        </p:spPr>
+        <p:txBody>
+          <a:bodyPr wrap="square">
+            <a:spAutoFit/>
+          </a:bodyPr>
+          <a:lstStyle/>
+          <a:p>
+            <a:pPr algn="l">
+              <a:defRPr sz="1300" b="0">
                 <a:solidFill>
                   <a:srgbClr val="666666"/>
                 </a:solidFill>
               </a:defRPr>
             </a:pPr>
             <a:r>
-              <a:t>→  思考的側面（6項目）：情報把握力／問題分析力／課題設定力／計画策定力／プロセス管理力／決断力</a:t>
-            </a:r>
-          </a:p>
-        </p:txBody>
-      </p:sp>
-      <p:sp>
-        <p:nvSpPr>
-          <p:cNvPr id="11" name="TextBox 10"/>
-          <p:cNvSpPr txBox="1"/>
-          <p:nvPr/>
-        </p:nvSpPr>
-        <p:spPr>
-          <a:xfrm>
-            <a:off x="1645920" y="3460000"/>
-            <a:ext cx="9509760" cy="340000"/>
-          </a:xfrm>
-          <a:prstGeom prst="rect">
-            <a:avLst/>
-          </a:prstGeom>
-          <a:noFill/>
-        </p:spPr>
-        <p:txBody>
-          <a:bodyPr wrap="square">
-            <a:spAutoFit/>
-          </a:bodyPr>
-          <a:lstStyle/>
-          <a:p>
-            <a:pPr algn="l">
-              <a:defRPr sz="1400" b="0">
+              <a:t>→  B. 実行・推進力：計画策定力／プロセス管理力／決断力</a:t>
+            </a:r>
+          </a:p>
+        </p:txBody>
+      </p:sp>
+      <p:sp>
+        <p:nvSpPr>
+          <p:cNvPr id="10" name="TextBox 9"/>
+          <p:cNvSpPr txBox="1"/>
+          <p:nvPr/>
+        </p:nvSpPr>
+        <p:spPr>
+          <a:xfrm>
+            <a:off x="1645920" y="2990000"/>
+            <a:ext cx="9509760" cy="310000"/>
+          </a:xfrm>
+          <a:prstGeom prst="rect">
+            <a:avLst/>
+          </a:prstGeom>
+          <a:noFill/>
+        </p:spPr>
+        <p:txBody>
+          <a:bodyPr wrap="square">
+            <a:spAutoFit/>
+          </a:bodyPr>
+          <a:lstStyle/>
+          <a:p>
+            <a:pPr algn="l">
+              <a:defRPr sz="1300" b="0">
                 <a:solidFill>
                   <a:srgbClr val="666666"/>
                 </a:solidFill>
               </a:defRPr>
             </a:pPr>
             <a:r>
-              <a:t>→  対人的側面（7項目）：ヒアリングスキル／プレゼンテーションスキル／対人感受性／指導育成力／組織活性化力／方向づけする力／自己開示能力</a:t>
-            </a:r>
-          </a:p>
-        </p:txBody>
-      </p:sp>
-      <p:sp>
-        <p:nvSpPr>
-          <p:cNvPr id="12" name="TextBox 11"/>
-          <p:cNvSpPr txBox="1"/>
-          <p:nvPr/>
-        </p:nvSpPr>
-        <p:spPr>
-          <a:xfrm>
-            <a:off x="1645920" y="3780000"/>
-            <a:ext cx="9509760" cy="340000"/>
-          </a:xfrm>
-          <a:prstGeom prst="rect">
-            <a:avLst/>
-          </a:prstGeom>
-          <a:noFill/>
-        </p:spPr>
-        <p:txBody>
-          <a:bodyPr wrap="square">
-            <a:spAutoFit/>
-          </a:bodyPr>
-          <a:lstStyle/>
-          <a:p>
-            <a:pPr algn="l">
-              <a:defRPr sz="1400" b="0">
+              <a:t>→  C. 対話・共感力：ヒアリングスキル／プレゼンテーションスキル／対人感受性／自己開示能力</a:t>
+            </a:r>
+          </a:p>
+        </p:txBody>
+      </p:sp>
+      <p:sp>
+        <p:nvSpPr>
+          <p:cNvPr id="11" name="TextBox 10"/>
+          <p:cNvSpPr txBox="1"/>
+          <p:nvPr/>
+        </p:nvSpPr>
+        <p:spPr>
+          <a:xfrm>
+            <a:off x="1645920" y="3290000"/>
+            <a:ext cx="9509760" cy="310000"/>
+          </a:xfrm>
+          <a:prstGeom prst="rect">
+            <a:avLst/>
+          </a:prstGeom>
+          <a:noFill/>
+        </p:spPr>
+        <p:txBody>
+          <a:bodyPr wrap="square">
+            <a:spAutoFit/>
+          </a:bodyPr>
+          <a:lstStyle/>
+          <a:p>
+            <a:pPr algn="l">
+              <a:defRPr sz="1300" b="0">
                 <a:solidFill>
                   <a:srgbClr val="666666"/>
                 </a:solidFill>
               </a:defRPr>
             </a:pPr>
             <a:r>
-              <a:t>→  総合（6項目）：自律一貫性／柔軟性／バイタリティ／ストレス耐性／革新性／倫理観</a:t>
+              <a:t>→  D. 組織牽引力：指導育成力／組織活性化力／方向づけする力</a:t>
+            </a:r>
+          </a:p>
+        </p:txBody>
+      </p:sp>
+      <p:sp>
+        <p:nvSpPr>
+          <p:cNvPr id="12" name="TextBox 11"/>
+          <p:cNvSpPr txBox="1"/>
+          <p:nvPr/>
+        </p:nvSpPr>
+        <p:spPr>
+          <a:xfrm>
+            <a:off x="1645920" y="3590000"/>
+            <a:ext cx="9509760" cy="310000"/>
+          </a:xfrm>
+          <a:prstGeom prst="rect">
+            <a:avLst/>
+          </a:prstGeom>
+          <a:noFill/>
+        </p:spPr>
+        <p:txBody>
+          <a:bodyPr wrap="square">
+            <a:spAutoFit/>
+          </a:bodyPr>
+          <a:lstStyle/>
+          <a:p>
+            <a:pPr algn="l">
+              <a:defRPr sz="1300" b="0">
+                <a:solidFill>
+                  <a:srgbClr val="666666"/>
+                </a:solidFill>
+              </a:defRPr>
+            </a:pPr>
+            <a:r>
+              <a:t>→  E. 自己基盤力：自律一貫性／ストレス耐性／倫理観</a:t>
             </a:r>
           </a:p>
         </p:txBody>
@@ -9320,8 +9324,43 @@
         </p:nvSpPr>
         <p:spPr>
           <a:xfrm>
-            <a:off x="1097280" y="4100000"/>
-            <a:ext cx="10058400" cy="380000"/>
+            <a:off x="1645920" y="3890000"/>
+            <a:ext cx="9509760" cy="310000"/>
+          </a:xfrm>
+          <a:prstGeom prst="rect">
+            <a:avLst/>
+          </a:prstGeom>
+          <a:noFill/>
+        </p:spPr>
+        <p:txBody>
+          <a:bodyPr wrap="square">
+            <a:spAutoFit/>
+          </a:bodyPr>
+          <a:lstStyle/>
+          <a:p>
+            <a:pPr algn="l">
+              <a:defRPr sz="1300" b="0">
+                <a:solidFill>
+                  <a:srgbClr val="666666"/>
+                </a:solidFill>
+              </a:defRPr>
+            </a:pPr>
+            <a:r>
+              <a:t>→  F. 変革・挑戦力：柔軟性／バイタリティ／革新性</a:t>
+            </a:r>
+          </a:p>
+        </p:txBody>
+      </p:sp>
+      <p:sp>
+        <p:nvSpPr>
+          <p:cNvPr id="14" name="TextBox 13"/>
+          <p:cNvSpPr txBox="1"/>
+          <p:nvPr/>
+        </p:nvSpPr>
+        <p:spPr>
+          <a:xfrm>
+            <a:off x="1097280" y="4240000"/>
+            <a:ext cx="10058400" cy="370000"/>
           </a:xfrm>
           <a:prstGeom prst="rect">
             <a:avLst/>
@@ -9345,14 +9384,14 @@
       </p:sp>
       <p:sp>
         <p:nvSpPr>
-          <p:cNvPr id="14" name="TextBox 13"/>
-          <p:cNvSpPr txBox="1"/>
-          <p:nvPr/>
-        </p:nvSpPr>
-        <p:spPr>
-          <a:xfrm>
-            <a:off x="1097280" y="4490000"/>
-            <a:ext cx="10058400" cy="380000"/>
+          <p:cNvPr id="15" name="TextBox 14"/>
+          <p:cNvSpPr txBox="1"/>
+          <p:nvPr/>
+        </p:nvSpPr>
+        <p:spPr>
+          <a:xfrm>
+            <a:off x="1097280" y="4610000"/>
+            <a:ext cx="10058400" cy="370000"/>
           </a:xfrm>
           <a:prstGeom prst="rect">
             <a:avLst/>

--- a/clients/大晃産業/03_日程調整/【アジェンダ】20260323_打合せ.pptx
+++ b/clients/大晃産業/03_日程調整/【アジェンダ】20260323_打合せ.pptx
@@ -3764,7 +3764,7 @@
           </a:bodyPr>
           <a:lstStyle/>
           <a:p>
-            <a:pPr algn="l">
+            <a:pPr>
               <a:defRPr sz="3000" b="1"/>
             </a:pPr>
             <a:r>
@@ -3824,22 +3824,22 @@
         </p:nvSpPr>
         <p:spPr>
           <a:xfrm>
-            <a:off x="1097280" y="1737360"/>
-            <a:ext cx="10058400" cy="411480"/>
-          </a:xfrm>
-          <a:prstGeom prst="rect">
-            <a:avLst/>
-          </a:prstGeom>
-          <a:noFill/>
-        </p:spPr>
-        <p:txBody>
-          <a:bodyPr wrap="square">
-            <a:spAutoFit/>
-          </a:bodyPr>
-          <a:lstStyle/>
-          <a:p>
-            <a:pPr algn="l">
-              <a:defRPr sz="1800" b="0"/>
+            <a:off x="1097280" y="1650000"/>
+            <a:ext cx="10058400" cy="340000"/>
+          </a:xfrm>
+          <a:prstGeom prst="rect">
+            <a:avLst/>
+          </a:prstGeom>
+          <a:noFill/>
+        </p:spPr>
+        <p:txBody>
+          <a:bodyPr wrap="square">
+            <a:spAutoFit/>
+          </a:bodyPr>
+          <a:lstStyle/>
+          <a:p>
+            <a:pPr>
+              <a:defRPr sz="1700" b="0"/>
             </a:pPr>
             <a:r>
               <a:t>●  課題図書の提示可否（費用負担含む）</a:t>
@@ -3855,22 +3855,22 @@
         </p:nvSpPr>
         <p:spPr>
           <a:xfrm>
-            <a:off x="1097280" y="2194560"/>
-            <a:ext cx="10058400" cy="411480"/>
-          </a:xfrm>
-          <a:prstGeom prst="rect">
-            <a:avLst/>
-          </a:prstGeom>
-          <a:noFill/>
-        </p:spPr>
-        <p:txBody>
-          <a:bodyPr wrap="square">
-            <a:spAutoFit/>
-          </a:bodyPr>
-          <a:lstStyle/>
-          <a:p>
-            <a:pPr algn="l">
-              <a:defRPr sz="1800" b="0"/>
+            <a:off x="1097280" y="1990000"/>
+            <a:ext cx="10058400" cy="340000"/>
+          </a:xfrm>
+          <a:prstGeom prst="rect">
+            <a:avLst/>
+          </a:prstGeom>
+          <a:noFill/>
+        </p:spPr>
+        <p:txBody>
+          <a:bodyPr wrap="square">
+            <a:spAutoFit/>
+          </a:bodyPr>
+          <a:lstStyle/>
+          <a:p>
+            <a:pPr>
+              <a:defRPr sz="1700" b="0"/>
             </a:pPr>
             <a:r>
               <a:t>●  4回分程度を想定：どのタイミングで指定するか</a:t>
@@ -3886,22 +3886,22 @@
         </p:nvSpPr>
         <p:spPr>
           <a:xfrm>
-            <a:off x="1097280" y="2651760"/>
-            <a:ext cx="10058400" cy="411480"/>
-          </a:xfrm>
-          <a:prstGeom prst="rect">
-            <a:avLst/>
-          </a:prstGeom>
-          <a:noFill/>
-        </p:spPr>
-        <p:txBody>
-          <a:bodyPr wrap="square">
-            <a:spAutoFit/>
-          </a:bodyPr>
-          <a:lstStyle/>
-          <a:p>
-            <a:pPr algn="l">
-              <a:defRPr sz="1800" b="0"/>
+            <a:off x="1097280" y="2330000"/>
+            <a:ext cx="10058400" cy="340000"/>
+          </a:xfrm>
+          <a:prstGeom prst="rect">
+            <a:avLst/>
+          </a:prstGeom>
+          <a:noFill/>
+        </p:spPr>
+        <p:txBody>
+          <a:bodyPr wrap="square">
+            <a:spAutoFit/>
+          </a:bodyPr>
+          <a:lstStyle/>
+          <a:p>
+            <a:pPr>
+              <a:defRPr sz="1700" b="0"/>
             </a:pPr>
             <a:r>
               <a:t>●  選書はえんのした側で行い、先方承認の流れでよいか</a:t>
@@ -3917,25 +3917,452 @@
         </p:nvSpPr>
         <p:spPr>
           <a:xfrm>
-            <a:off x="1097280" y="3108960"/>
-            <a:ext cx="10058400" cy="411480"/>
-          </a:xfrm>
-          <a:prstGeom prst="rect">
-            <a:avLst/>
-          </a:prstGeom>
-          <a:noFill/>
-        </p:spPr>
-        <p:txBody>
-          <a:bodyPr wrap="square">
-            <a:spAutoFit/>
-          </a:bodyPr>
-          <a:lstStyle/>
-          <a:p>
-            <a:pPr algn="l">
-              <a:defRPr sz="1800" b="0"/>
+            <a:off x="1097280" y="2670000"/>
+            <a:ext cx="10058400" cy="340000"/>
+          </a:xfrm>
+          <a:prstGeom prst="rect">
+            <a:avLst/>
+          </a:prstGeom>
+          <a:noFill/>
+        </p:spPr>
+        <p:txBody>
+          <a:bodyPr wrap="square">
+            <a:spAutoFit/>
+          </a:bodyPr>
+          <a:lstStyle/>
+          <a:p>
+            <a:pPr>
+              <a:defRPr sz="1700" b="0"/>
             </a:pPr>
             <a:r>
               <a:t>●  購入・配布の方法（会社負担 or 個人負担）</a:t>
+            </a:r>
+          </a:p>
+        </p:txBody>
+      </p:sp>
+      <p:sp>
+        <p:nvSpPr>
+          <p:cNvPr id="10" name="TextBox 9"/>
+          <p:cNvSpPr txBox="1"/>
+          <p:nvPr/>
+        </p:nvSpPr>
+        <p:spPr>
+          <a:xfrm>
+            <a:off x="1097280" y="3090000"/>
+            <a:ext cx="10058400" cy="380000"/>
+          </a:xfrm>
+          <a:prstGeom prst="rect">
+            <a:avLst/>
+          </a:prstGeom>
+          <a:noFill/>
+        </p:spPr>
+        <p:txBody>
+          <a:bodyPr wrap="square">
+            <a:spAutoFit/>
+          </a:bodyPr>
+          <a:lstStyle/>
+          <a:p>
+            <a:pPr>
+              <a:defRPr sz="1700" b="1"/>
+            </a:pPr>
+            <a:r>
+              <a:t>●  現時点での課題図書案（4冊）</a:t>
+            </a:r>
+          </a:p>
+        </p:txBody>
+      </p:sp>
+      <p:sp>
+        <p:nvSpPr>
+          <p:cNvPr id="11" name="TextBox 10"/>
+          <p:cNvSpPr txBox="1"/>
+          <p:nvPr/>
+        </p:nvSpPr>
+        <p:spPr>
+          <a:xfrm>
+            <a:off x="1371600" y="3510000"/>
+            <a:ext cx="9783900" cy="340000"/>
+          </a:xfrm>
+          <a:prstGeom prst="rect">
+            <a:avLst/>
+          </a:prstGeom>
+          <a:noFill/>
+        </p:spPr>
+        <p:txBody>
+          <a:bodyPr wrap="square">
+            <a:spAutoFit/>
+          </a:bodyPr>
+          <a:lstStyle/>
+          <a:p>
+            <a:r>
+              <a:rPr sz="1400" b="1"/>
+              <a:t>① 川上真史『会社を変える社員はどこにいるか』2003年、ダイヤモンド社</a:t>
+            </a:r>
+          </a:p>
+        </p:txBody>
+      </p:sp>
+      <p:sp>
+        <p:nvSpPr>
+          <p:cNvPr id="12" name="TextBox 11"/>
+          <p:cNvSpPr txBox="1"/>
+          <p:nvPr/>
+        </p:nvSpPr>
+        <p:spPr>
+          <a:xfrm>
+            <a:off x="1645920" y="3820000"/>
+            <a:ext cx="9509760" cy="290000"/>
+          </a:xfrm>
+          <a:prstGeom prst="rect">
+            <a:avLst/>
+          </a:prstGeom>
+          <a:noFill/>
+        </p:spPr>
+        <p:txBody>
+          <a:bodyPr wrap="square">
+            <a:spAutoFit/>
+          </a:bodyPr>
+          <a:lstStyle/>
+          <a:p>
+            <a:pPr>
+              <a:defRPr sz="1200" b="0">
+                <a:solidFill>
+                  <a:srgbClr val="666666"/>
+                </a:solidFill>
+              </a:defRPr>
+            </a:pPr>
+            <a:r>
+              <a:t>→ 研修で伝えたいコンピテンシーについて優しく書かれています</a:t>
+            </a:r>
+          </a:p>
+        </p:txBody>
+      </p:sp>
+      <p:sp>
+        <p:nvSpPr>
+          <p:cNvPr id="13" name="TextBox 12"/>
+          <p:cNvSpPr txBox="1"/>
+          <p:nvPr/>
+        </p:nvSpPr>
+        <p:spPr>
+          <a:xfrm>
+            <a:off x="1645920" y="4080000"/>
+            <a:ext cx="9509760" cy="260000"/>
+          </a:xfrm>
+          <a:prstGeom prst="rect">
+            <a:avLst/>
+          </a:prstGeom>
+          <a:noFill/>
+        </p:spPr>
+        <p:txBody>
+          <a:bodyPr wrap="square">
+            <a:spAutoFit/>
+          </a:bodyPr>
+          <a:lstStyle/>
+          <a:p>
+            <a:pPr>
+              <a:defRPr sz="1100" b="0">
+                <a:solidFill>
+                  <a:srgbClr val="CC3333"/>
+                </a:solidFill>
+              </a:defRPr>
+            </a:pPr>
+            <a:r>
+              <a:t>（期限：7/末まで）RTシェア予定：8/7</a:t>
+            </a:r>
+          </a:p>
+        </p:txBody>
+      </p:sp>
+      <p:sp>
+        <p:nvSpPr>
+          <p:cNvPr id="14" name="TextBox 13"/>
+          <p:cNvSpPr txBox="1"/>
+          <p:nvPr/>
+        </p:nvSpPr>
+        <p:spPr>
+          <a:xfrm>
+            <a:off x="1371600" y="4390000"/>
+            <a:ext cx="9783900" cy="340000"/>
+          </a:xfrm>
+          <a:prstGeom prst="rect">
+            <a:avLst/>
+          </a:prstGeom>
+          <a:noFill/>
+        </p:spPr>
+        <p:txBody>
+          <a:bodyPr wrap="square">
+            <a:spAutoFit/>
+          </a:bodyPr>
+          <a:lstStyle/>
+          <a:p>
+            <a:r>
+              <a:rPr sz="1400" b="1"/>
+              <a:t>② 嶋田毅『実況ロジカルシンキング教室』2011年、PHP研究所</a:t>
+            </a:r>
+          </a:p>
+        </p:txBody>
+      </p:sp>
+      <p:sp>
+        <p:nvSpPr>
+          <p:cNvPr id="15" name="TextBox 14"/>
+          <p:cNvSpPr txBox="1"/>
+          <p:nvPr/>
+        </p:nvSpPr>
+        <p:spPr>
+          <a:xfrm>
+            <a:off x="1645920" y="4700000"/>
+            <a:ext cx="9509760" cy="290000"/>
+          </a:xfrm>
+          <a:prstGeom prst="rect">
+            <a:avLst/>
+          </a:prstGeom>
+          <a:noFill/>
+        </p:spPr>
+        <p:txBody>
+          <a:bodyPr wrap="square">
+            <a:spAutoFit/>
+          </a:bodyPr>
+          <a:lstStyle/>
+          <a:p>
+            <a:pPr>
+              <a:defRPr sz="1200" b="0">
+                <a:solidFill>
+                  <a:srgbClr val="666666"/>
+                </a:solidFill>
+              </a:defRPr>
+            </a:pPr>
+            <a:r>
+              <a:t>→ 研修で伝えたい問題解決のステップや、ロジカルシンキングが優しく書かれています</a:t>
+            </a:r>
+          </a:p>
+        </p:txBody>
+      </p:sp>
+      <p:sp>
+        <p:nvSpPr>
+          <p:cNvPr id="16" name="TextBox 15"/>
+          <p:cNvSpPr txBox="1"/>
+          <p:nvPr/>
+        </p:nvSpPr>
+        <p:spPr>
+          <a:xfrm>
+            <a:off x="1645920" y="4960000"/>
+            <a:ext cx="9509760" cy="260000"/>
+          </a:xfrm>
+          <a:prstGeom prst="rect">
+            <a:avLst/>
+          </a:prstGeom>
+          <a:noFill/>
+        </p:spPr>
+        <p:txBody>
+          <a:bodyPr wrap="square">
+            <a:spAutoFit/>
+          </a:bodyPr>
+          <a:lstStyle/>
+          <a:p>
+            <a:pPr>
+              <a:defRPr sz="1100" b="0">
+                <a:solidFill>
+                  <a:srgbClr val="CC3333"/>
+                </a:solidFill>
+              </a:defRPr>
+            </a:pPr>
+            <a:r>
+              <a:t>（期限：9/末まで）RTシェア予定：10/9</a:t>
+            </a:r>
+          </a:p>
+        </p:txBody>
+      </p:sp>
+      <p:sp>
+        <p:nvSpPr>
+          <p:cNvPr id="17" name="TextBox 16"/>
+          <p:cNvSpPr txBox="1"/>
+          <p:nvPr/>
+        </p:nvSpPr>
+        <p:spPr>
+          <a:xfrm>
+            <a:off x="1371600" y="5270000"/>
+            <a:ext cx="9783900" cy="340000"/>
+          </a:xfrm>
+          <a:prstGeom prst="rect">
+            <a:avLst/>
+          </a:prstGeom>
+          <a:noFill/>
+        </p:spPr>
+        <p:txBody>
+          <a:bodyPr wrap="square">
+            <a:spAutoFit/>
+          </a:bodyPr>
+          <a:lstStyle/>
+          <a:p>
+            <a:r>
+              <a:rPr sz="1400" b="1"/>
+              <a:t>③ 細谷功『「具体⇄抽象」トレーニング 思考力が飛躍的にアップする29問』2020年、PHPビジネス新書</a:t>
+            </a:r>
+          </a:p>
+        </p:txBody>
+      </p:sp>
+      <p:sp>
+        <p:nvSpPr>
+          <p:cNvPr id="18" name="TextBox 17"/>
+          <p:cNvSpPr txBox="1"/>
+          <p:nvPr/>
+        </p:nvSpPr>
+        <p:spPr>
+          <a:xfrm>
+            <a:off x="1645920" y="5580000"/>
+            <a:ext cx="9509760" cy="290000"/>
+          </a:xfrm>
+          <a:prstGeom prst="rect">
+            <a:avLst/>
+          </a:prstGeom>
+          <a:noFill/>
+        </p:spPr>
+        <p:txBody>
+          <a:bodyPr wrap="square">
+            <a:spAutoFit/>
+          </a:bodyPr>
+          <a:lstStyle/>
+          <a:p>
+            <a:pPr>
+              <a:defRPr sz="1200" b="0">
+                <a:solidFill>
+                  <a:srgbClr val="666666"/>
+                </a:solidFill>
+              </a:defRPr>
+            </a:pPr>
+            <a:r>
+              <a:t>→ 研修の中で度々口にする論点です。選抜教育Ⅱの参加者には絶対に押さえて頂きたい</a:t>
+            </a:r>
+          </a:p>
+        </p:txBody>
+      </p:sp>
+      <p:sp>
+        <p:nvSpPr>
+          <p:cNvPr id="19" name="TextBox 18"/>
+          <p:cNvSpPr txBox="1"/>
+          <p:nvPr/>
+        </p:nvSpPr>
+        <p:spPr>
+          <a:xfrm>
+            <a:off x="1645920" y="5840000"/>
+            <a:ext cx="9509760" cy="260000"/>
+          </a:xfrm>
+          <a:prstGeom prst="rect">
+            <a:avLst/>
+          </a:prstGeom>
+          <a:noFill/>
+        </p:spPr>
+        <p:txBody>
+          <a:bodyPr wrap="square">
+            <a:spAutoFit/>
+          </a:bodyPr>
+          <a:lstStyle/>
+          <a:p>
+            <a:pPr>
+              <a:defRPr sz="1100" b="0">
+                <a:solidFill>
+                  <a:srgbClr val="CC3333"/>
+                </a:solidFill>
+              </a:defRPr>
+            </a:pPr>
+            <a:r>
+              <a:t>（期限：年始まで）RTシェア予定：1/22</a:t>
+            </a:r>
+          </a:p>
+        </p:txBody>
+      </p:sp>
+      <p:sp>
+        <p:nvSpPr>
+          <p:cNvPr id="20" name="TextBox 19"/>
+          <p:cNvSpPr txBox="1"/>
+          <p:nvPr/>
+        </p:nvSpPr>
+        <p:spPr>
+          <a:xfrm>
+            <a:off x="1371600" y="6150000"/>
+            <a:ext cx="9783900" cy="340000"/>
+          </a:xfrm>
+          <a:prstGeom prst="rect">
+            <a:avLst/>
+          </a:prstGeom>
+          <a:noFill/>
+        </p:spPr>
+        <p:txBody>
+          <a:bodyPr wrap="square">
+            <a:spAutoFit/>
+          </a:bodyPr>
+          <a:lstStyle/>
+          <a:p>
+            <a:r>
+              <a:rPr sz="1400" b="1"/>
+              <a:t>④ 入山章栄『世界標準の経営理論』2019年、ダイヤモンド社</a:t>
+            </a:r>
+          </a:p>
+        </p:txBody>
+      </p:sp>
+      <p:sp>
+        <p:nvSpPr>
+          <p:cNvPr id="21" name="TextBox 20"/>
+          <p:cNvSpPr txBox="1"/>
+          <p:nvPr/>
+        </p:nvSpPr>
+        <p:spPr>
+          <a:xfrm>
+            <a:off x="1645920" y="6460000"/>
+            <a:ext cx="9509760" cy="290000"/>
+          </a:xfrm>
+          <a:prstGeom prst="rect">
+            <a:avLst/>
+          </a:prstGeom>
+          <a:noFill/>
+        </p:spPr>
+        <p:txBody>
+          <a:bodyPr wrap="square">
+            <a:spAutoFit/>
+          </a:bodyPr>
+          <a:lstStyle/>
+          <a:p>
+            <a:pPr>
+              <a:defRPr sz="1200" b="0">
+                <a:solidFill>
+                  <a:srgbClr val="666666"/>
+                </a:solidFill>
+              </a:defRPr>
+            </a:pPr>
+            <a:r>
+              <a:t>→ 戦略を学ぶ前提知識としてインプットされたい</a:t>
+            </a:r>
+          </a:p>
+        </p:txBody>
+      </p:sp>
+      <p:sp>
+        <p:nvSpPr>
+          <p:cNvPr id="22" name="TextBox 21"/>
+          <p:cNvSpPr txBox="1"/>
+          <p:nvPr/>
+        </p:nvSpPr>
+        <p:spPr>
+          <a:xfrm>
+            <a:off x="1645920" y="6720000"/>
+            <a:ext cx="9509760" cy="260000"/>
+          </a:xfrm>
+          <a:prstGeom prst="rect">
+            <a:avLst/>
+          </a:prstGeom>
+          <a:noFill/>
+        </p:spPr>
+        <p:txBody>
+          <a:bodyPr wrap="square">
+            <a:spAutoFit/>
+          </a:bodyPr>
+          <a:lstStyle/>
+          <a:p>
+            <a:pPr>
+              <a:defRPr sz="1100" b="0">
+                <a:solidFill>
+                  <a:srgbClr val="CC3333"/>
+                </a:solidFill>
+              </a:defRPr>
+            </a:pPr>
+            <a:r>
+              <a:t>（期限：3/末まで）RTシェア予定：4/13</a:t>
             </a:r>
           </a:p>
         </p:txBody>

--- a/clients/大晃産業/03_日程調整/【アジェンダ】20260323_打合せ.pptx
+++ b/clients/大晃産業/03_日程調整/【アジェンダ】20260323_打合せ.pptx
@@ -3764,8 +3764,12 @@
           </a:bodyPr>
           <a:lstStyle/>
           <a:p>
-            <a:pPr>
-              <a:defRPr sz="3000" b="1"/>
+            <a:pPr algn="l">
+              <a:defRPr sz="3000" b="1">
+                <a:solidFill>
+                  <a:srgbClr val="000000"/>
+                </a:solidFill>
+              </a:defRPr>
             </a:pPr>
             <a:r>
               <a:t>課題図書について</a:t>
@@ -3838,8 +3842,12 @@
           </a:bodyPr>
           <a:lstStyle/>
           <a:p>
-            <a:pPr>
-              <a:defRPr sz="1700" b="0"/>
+            <a:pPr algn="l">
+              <a:defRPr sz="1600" b="0">
+                <a:solidFill>
+                  <a:srgbClr val="000000"/>
+                </a:solidFill>
+              </a:defRPr>
             </a:pPr>
             <a:r>
               <a:t>●  課題図書の提示可否（費用負担含む）</a:t>
@@ -3869,8 +3877,12 @@
           </a:bodyPr>
           <a:lstStyle/>
           <a:p>
-            <a:pPr>
-              <a:defRPr sz="1700" b="0"/>
+            <a:pPr algn="l">
+              <a:defRPr sz="1600" b="0">
+                <a:solidFill>
+                  <a:srgbClr val="000000"/>
+                </a:solidFill>
+              </a:defRPr>
             </a:pPr>
             <a:r>
               <a:t>●  4回分程度を想定：どのタイミングで指定するか</a:t>
@@ -3900,8 +3912,12 @@
           </a:bodyPr>
           <a:lstStyle/>
           <a:p>
-            <a:pPr>
-              <a:defRPr sz="1700" b="0"/>
+            <a:pPr algn="l">
+              <a:defRPr sz="1600" b="0">
+                <a:solidFill>
+                  <a:srgbClr val="000000"/>
+                </a:solidFill>
+              </a:defRPr>
             </a:pPr>
             <a:r>
               <a:t>●  選書はえんのした側で行い、先方承認の流れでよいか</a:t>
@@ -3931,8 +3947,12 @@
           </a:bodyPr>
           <a:lstStyle/>
           <a:p>
-            <a:pPr>
-              <a:defRPr sz="1700" b="0"/>
+            <a:pPr algn="l">
+              <a:defRPr sz="1600" b="0">
+                <a:solidFill>
+                  <a:srgbClr val="000000"/>
+                </a:solidFill>
+              </a:defRPr>
             </a:pPr>
             <a:r>
               <a:t>●  購入・配布の方法（会社負担 or 個人負担）</a:t>
@@ -3962,8 +3982,12 @@
           </a:bodyPr>
           <a:lstStyle/>
           <a:p>
-            <a:pPr>
-              <a:defRPr sz="1700" b="1"/>
+            <a:pPr algn="l">
+              <a:defRPr sz="1600" b="1">
+                <a:solidFill>
+                  <a:srgbClr val="000000"/>
+                </a:solidFill>
+              </a:defRPr>
             </a:pPr>
             <a:r>
               <a:t>●  現時点での課題図書案（4冊）</a:t>
@@ -3979,22 +4003,28 @@
         </p:nvSpPr>
         <p:spPr>
           <a:xfrm>
-            <a:off x="1371600" y="3510000"/>
-            <a:ext cx="9783900" cy="340000"/>
-          </a:xfrm>
-          <a:prstGeom prst="rect">
-            <a:avLst/>
-          </a:prstGeom>
-          <a:noFill/>
-        </p:spPr>
-        <p:txBody>
-          <a:bodyPr wrap="square">
-            <a:spAutoFit/>
-          </a:bodyPr>
-          <a:lstStyle/>
-          <a:p>
-            <a:r>
-              <a:rPr sz="1400" b="1"/>
+            <a:off x="1371600" y="3490000"/>
+            <a:ext cx="9783900" cy="320000"/>
+          </a:xfrm>
+          <a:prstGeom prst="rect">
+            <a:avLst/>
+          </a:prstGeom>
+          <a:noFill/>
+        </p:spPr>
+        <p:txBody>
+          <a:bodyPr wrap="square">
+            <a:spAutoFit/>
+          </a:bodyPr>
+          <a:lstStyle/>
+          <a:p>
+            <a:pPr algn="l">
+              <a:defRPr sz="1300" b="1">
+                <a:solidFill>
+                  <a:srgbClr val="000000"/>
+                </a:solidFill>
+              </a:defRPr>
+            </a:pPr>
+            <a:r>
               <a:t>① 川上真史『会社を変える社員はどこにいるか』2003年、ダイヤモンド社</a:t>
             </a:r>
           </a:p>
@@ -4008,22 +4038,22 @@
         </p:nvSpPr>
         <p:spPr>
           <a:xfrm>
-            <a:off x="1645920" y="3820000"/>
-            <a:ext cx="9509760" cy="290000"/>
-          </a:xfrm>
-          <a:prstGeom prst="rect">
-            <a:avLst/>
-          </a:prstGeom>
-          <a:noFill/>
-        </p:spPr>
-        <p:txBody>
-          <a:bodyPr wrap="square">
-            <a:spAutoFit/>
-          </a:bodyPr>
-          <a:lstStyle/>
-          <a:p>
-            <a:pPr>
-              <a:defRPr sz="1200" b="0">
+            <a:off x="1645920" y="3780000"/>
+            <a:ext cx="9509760" cy="270000"/>
+          </a:xfrm>
+          <a:prstGeom prst="rect">
+            <a:avLst/>
+          </a:prstGeom>
+          <a:noFill/>
+        </p:spPr>
+        <p:txBody>
+          <a:bodyPr wrap="square">
+            <a:spAutoFit/>
+          </a:bodyPr>
+          <a:lstStyle/>
+          <a:p>
+            <a:pPr algn="l">
+              <a:defRPr sz="1100" b="0">
                 <a:solidFill>
                   <a:srgbClr val="666666"/>
                 </a:solidFill>
@@ -4043,22 +4073,22 @@
         </p:nvSpPr>
         <p:spPr>
           <a:xfrm>
-            <a:off x="1645920" y="4080000"/>
-            <a:ext cx="9509760" cy="260000"/>
-          </a:xfrm>
-          <a:prstGeom prst="rect">
-            <a:avLst/>
-          </a:prstGeom>
-          <a:noFill/>
-        </p:spPr>
-        <p:txBody>
-          <a:bodyPr wrap="square">
-            <a:spAutoFit/>
-          </a:bodyPr>
-          <a:lstStyle/>
-          <a:p>
-            <a:pPr>
-              <a:defRPr sz="1100" b="0">
+            <a:off x="1645920" y="4020000"/>
+            <a:ext cx="9509760" cy="250000"/>
+          </a:xfrm>
+          <a:prstGeom prst="rect">
+            <a:avLst/>
+          </a:prstGeom>
+          <a:noFill/>
+        </p:spPr>
+        <p:txBody>
+          <a:bodyPr wrap="square">
+            <a:spAutoFit/>
+          </a:bodyPr>
+          <a:lstStyle/>
+          <a:p>
+            <a:pPr algn="l">
+              <a:defRPr sz="1000" b="0">
                 <a:solidFill>
                   <a:srgbClr val="CC3333"/>
                 </a:solidFill>
@@ -4078,22 +4108,28 @@
         </p:nvSpPr>
         <p:spPr>
           <a:xfrm>
-            <a:off x="1371600" y="4390000"/>
-            <a:ext cx="9783900" cy="340000"/>
-          </a:xfrm>
-          <a:prstGeom prst="rect">
-            <a:avLst/>
-          </a:prstGeom>
-          <a:noFill/>
-        </p:spPr>
-        <p:txBody>
-          <a:bodyPr wrap="square">
-            <a:spAutoFit/>
-          </a:bodyPr>
-          <a:lstStyle/>
-          <a:p>
-            <a:r>
-              <a:rPr sz="1400" b="1"/>
+            <a:off x="1371600" y="4310000"/>
+            <a:ext cx="9783900" cy="320000"/>
+          </a:xfrm>
+          <a:prstGeom prst="rect">
+            <a:avLst/>
+          </a:prstGeom>
+          <a:noFill/>
+        </p:spPr>
+        <p:txBody>
+          <a:bodyPr wrap="square">
+            <a:spAutoFit/>
+          </a:bodyPr>
+          <a:lstStyle/>
+          <a:p>
+            <a:pPr algn="l">
+              <a:defRPr sz="1300" b="1">
+                <a:solidFill>
+                  <a:srgbClr val="000000"/>
+                </a:solidFill>
+              </a:defRPr>
+            </a:pPr>
+            <a:r>
               <a:t>② 嶋田毅『実況ロジカルシンキング教室』2011年、PHP研究所</a:t>
             </a:r>
           </a:p>
@@ -4107,22 +4143,22 @@
         </p:nvSpPr>
         <p:spPr>
           <a:xfrm>
-            <a:off x="1645920" y="4700000"/>
-            <a:ext cx="9509760" cy="290000"/>
-          </a:xfrm>
-          <a:prstGeom prst="rect">
-            <a:avLst/>
-          </a:prstGeom>
-          <a:noFill/>
-        </p:spPr>
-        <p:txBody>
-          <a:bodyPr wrap="square">
-            <a:spAutoFit/>
-          </a:bodyPr>
-          <a:lstStyle/>
-          <a:p>
-            <a:pPr>
-              <a:defRPr sz="1200" b="0">
+            <a:off x="1645920" y="4600000"/>
+            <a:ext cx="9509760" cy="270000"/>
+          </a:xfrm>
+          <a:prstGeom prst="rect">
+            <a:avLst/>
+          </a:prstGeom>
+          <a:noFill/>
+        </p:spPr>
+        <p:txBody>
+          <a:bodyPr wrap="square">
+            <a:spAutoFit/>
+          </a:bodyPr>
+          <a:lstStyle/>
+          <a:p>
+            <a:pPr algn="l">
+              <a:defRPr sz="1100" b="0">
                 <a:solidFill>
                   <a:srgbClr val="666666"/>
                 </a:solidFill>
@@ -4142,22 +4178,22 @@
         </p:nvSpPr>
         <p:spPr>
           <a:xfrm>
-            <a:off x="1645920" y="4960000"/>
-            <a:ext cx="9509760" cy="260000"/>
-          </a:xfrm>
-          <a:prstGeom prst="rect">
-            <a:avLst/>
-          </a:prstGeom>
-          <a:noFill/>
-        </p:spPr>
-        <p:txBody>
-          <a:bodyPr wrap="square">
-            <a:spAutoFit/>
-          </a:bodyPr>
-          <a:lstStyle/>
-          <a:p>
-            <a:pPr>
-              <a:defRPr sz="1100" b="0">
+            <a:off x="1645920" y="4840000"/>
+            <a:ext cx="9509760" cy="250000"/>
+          </a:xfrm>
+          <a:prstGeom prst="rect">
+            <a:avLst/>
+          </a:prstGeom>
+          <a:noFill/>
+        </p:spPr>
+        <p:txBody>
+          <a:bodyPr wrap="square">
+            <a:spAutoFit/>
+          </a:bodyPr>
+          <a:lstStyle/>
+          <a:p>
+            <a:pPr algn="l">
+              <a:defRPr sz="1000" b="0">
                 <a:solidFill>
                   <a:srgbClr val="CC3333"/>
                 </a:solidFill>
@@ -4177,22 +4213,28 @@
         </p:nvSpPr>
         <p:spPr>
           <a:xfrm>
-            <a:off x="1371600" y="5270000"/>
-            <a:ext cx="9783900" cy="340000"/>
-          </a:xfrm>
-          <a:prstGeom prst="rect">
-            <a:avLst/>
-          </a:prstGeom>
-          <a:noFill/>
-        </p:spPr>
-        <p:txBody>
-          <a:bodyPr wrap="square">
-            <a:spAutoFit/>
-          </a:bodyPr>
-          <a:lstStyle/>
-          <a:p>
-            <a:r>
-              <a:rPr sz="1400" b="1"/>
+            <a:off x="1371600" y="5130000"/>
+            <a:ext cx="9783900" cy="320000"/>
+          </a:xfrm>
+          <a:prstGeom prst="rect">
+            <a:avLst/>
+          </a:prstGeom>
+          <a:noFill/>
+        </p:spPr>
+        <p:txBody>
+          <a:bodyPr wrap="square">
+            <a:spAutoFit/>
+          </a:bodyPr>
+          <a:lstStyle/>
+          <a:p>
+            <a:pPr algn="l">
+              <a:defRPr sz="1300" b="1">
+                <a:solidFill>
+                  <a:srgbClr val="000000"/>
+                </a:solidFill>
+              </a:defRPr>
+            </a:pPr>
+            <a:r>
               <a:t>③ 細谷功『「具体⇄抽象」トレーニング 思考力が飛躍的にアップする29問』2020年、PHPビジネス新書</a:t>
             </a:r>
           </a:p>
@@ -4206,22 +4248,22 @@
         </p:nvSpPr>
         <p:spPr>
           <a:xfrm>
-            <a:off x="1645920" y="5580000"/>
-            <a:ext cx="9509760" cy="290000"/>
-          </a:xfrm>
-          <a:prstGeom prst="rect">
-            <a:avLst/>
-          </a:prstGeom>
-          <a:noFill/>
-        </p:spPr>
-        <p:txBody>
-          <a:bodyPr wrap="square">
-            <a:spAutoFit/>
-          </a:bodyPr>
-          <a:lstStyle/>
-          <a:p>
-            <a:pPr>
-              <a:defRPr sz="1200" b="0">
+            <a:off x="1645920" y="5420000"/>
+            <a:ext cx="9509760" cy="270000"/>
+          </a:xfrm>
+          <a:prstGeom prst="rect">
+            <a:avLst/>
+          </a:prstGeom>
+          <a:noFill/>
+        </p:spPr>
+        <p:txBody>
+          <a:bodyPr wrap="square">
+            <a:spAutoFit/>
+          </a:bodyPr>
+          <a:lstStyle/>
+          <a:p>
+            <a:pPr algn="l">
+              <a:defRPr sz="1100" b="0">
                 <a:solidFill>
                   <a:srgbClr val="666666"/>
                 </a:solidFill>
@@ -4241,22 +4283,22 @@
         </p:nvSpPr>
         <p:spPr>
           <a:xfrm>
-            <a:off x="1645920" y="5840000"/>
-            <a:ext cx="9509760" cy="260000"/>
-          </a:xfrm>
-          <a:prstGeom prst="rect">
-            <a:avLst/>
-          </a:prstGeom>
-          <a:noFill/>
-        </p:spPr>
-        <p:txBody>
-          <a:bodyPr wrap="square">
-            <a:spAutoFit/>
-          </a:bodyPr>
-          <a:lstStyle/>
-          <a:p>
-            <a:pPr>
-              <a:defRPr sz="1100" b="0">
+            <a:off x="1645920" y="5660000"/>
+            <a:ext cx="9509760" cy="250000"/>
+          </a:xfrm>
+          <a:prstGeom prst="rect">
+            <a:avLst/>
+          </a:prstGeom>
+          <a:noFill/>
+        </p:spPr>
+        <p:txBody>
+          <a:bodyPr wrap="square">
+            <a:spAutoFit/>
+          </a:bodyPr>
+          <a:lstStyle/>
+          <a:p>
+            <a:pPr algn="l">
+              <a:defRPr sz="1000" b="0">
                 <a:solidFill>
                   <a:srgbClr val="CC3333"/>
                 </a:solidFill>
@@ -4276,22 +4318,28 @@
         </p:nvSpPr>
         <p:spPr>
           <a:xfrm>
-            <a:off x="1371600" y="6150000"/>
-            <a:ext cx="9783900" cy="340000"/>
-          </a:xfrm>
-          <a:prstGeom prst="rect">
-            <a:avLst/>
-          </a:prstGeom>
-          <a:noFill/>
-        </p:spPr>
-        <p:txBody>
-          <a:bodyPr wrap="square">
-            <a:spAutoFit/>
-          </a:bodyPr>
-          <a:lstStyle/>
-          <a:p>
-            <a:r>
-              <a:rPr sz="1400" b="1"/>
+            <a:off x="1371600" y="5950000"/>
+            <a:ext cx="9783900" cy="320000"/>
+          </a:xfrm>
+          <a:prstGeom prst="rect">
+            <a:avLst/>
+          </a:prstGeom>
+          <a:noFill/>
+        </p:spPr>
+        <p:txBody>
+          <a:bodyPr wrap="square">
+            <a:spAutoFit/>
+          </a:bodyPr>
+          <a:lstStyle/>
+          <a:p>
+            <a:pPr algn="l">
+              <a:defRPr sz="1300" b="1">
+                <a:solidFill>
+                  <a:srgbClr val="000000"/>
+                </a:solidFill>
+              </a:defRPr>
+            </a:pPr>
+            <a:r>
               <a:t>④ 入山章栄『世界標準の経営理論』2019年、ダイヤモンド社</a:t>
             </a:r>
           </a:p>
@@ -4305,22 +4353,22 @@
         </p:nvSpPr>
         <p:spPr>
           <a:xfrm>
-            <a:off x="1645920" y="6460000"/>
-            <a:ext cx="9509760" cy="290000"/>
-          </a:xfrm>
-          <a:prstGeom prst="rect">
-            <a:avLst/>
-          </a:prstGeom>
-          <a:noFill/>
-        </p:spPr>
-        <p:txBody>
-          <a:bodyPr wrap="square">
-            <a:spAutoFit/>
-          </a:bodyPr>
-          <a:lstStyle/>
-          <a:p>
-            <a:pPr>
-              <a:defRPr sz="1200" b="0">
+            <a:off x="1645920" y="6240000"/>
+            <a:ext cx="9509760" cy="270000"/>
+          </a:xfrm>
+          <a:prstGeom prst="rect">
+            <a:avLst/>
+          </a:prstGeom>
+          <a:noFill/>
+        </p:spPr>
+        <p:txBody>
+          <a:bodyPr wrap="square">
+            <a:spAutoFit/>
+          </a:bodyPr>
+          <a:lstStyle/>
+          <a:p>
+            <a:pPr algn="l">
+              <a:defRPr sz="1100" b="0">
                 <a:solidFill>
                   <a:srgbClr val="666666"/>
                 </a:solidFill>
@@ -4340,22 +4388,22 @@
         </p:nvSpPr>
         <p:spPr>
           <a:xfrm>
-            <a:off x="1645920" y="6720000"/>
-            <a:ext cx="9509760" cy="260000"/>
-          </a:xfrm>
-          <a:prstGeom prst="rect">
-            <a:avLst/>
-          </a:prstGeom>
-          <a:noFill/>
-        </p:spPr>
-        <p:txBody>
-          <a:bodyPr wrap="square">
-            <a:spAutoFit/>
-          </a:bodyPr>
-          <a:lstStyle/>
-          <a:p>
-            <a:pPr>
-              <a:defRPr sz="1100" b="0">
+            <a:off x="1645920" y="6480000"/>
+            <a:ext cx="9509760" cy="250000"/>
+          </a:xfrm>
+          <a:prstGeom prst="rect">
+            <a:avLst/>
+          </a:prstGeom>
+          <a:noFill/>
+        </p:spPr>
+        <p:txBody>
+          <a:bodyPr wrap="square">
+            <a:spAutoFit/>
+          </a:bodyPr>
+          <a:lstStyle/>
+          <a:p>
+            <a:pPr algn="l">
+              <a:defRPr sz="1000" b="0">
                 <a:solidFill>
                   <a:srgbClr val="CC3333"/>
                 </a:solidFill>
